--- a/exports/pptx/lessons/middle-module-10-herbs-aushadhi/day-04-haridra.pptx
+++ b/exports/pptx/lessons/middle-module-10-herbs-aushadhi/day-04-haridra.pptx
@@ -17,9 +17,17 @@
     <p:sldId id="265" r:id="rId11"/>
     <p:sldId id="266" r:id="rId12"/>
     <p:sldId id="267" r:id="rId13"/>
+    <p:sldId id="268" r:id="rId14"/>
+    <p:sldId id="269" r:id="rId15"/>
+    <p:sldId id="270" r:id="rId16"/>
+    <p:sldId id="271" r:id="rId17"/>
+    <p:sldId id="272" r:id="rId18"/>
+    <p:sldId id="273" r:id="rId19"/>
+    <p:sldId id="274" r:id="rId20"/>
+    <p:sldId id="275" r:id="rId21"/>
   </p:sldIdLst>
   <p:notesMasterIdLst>
-    <p:notesMasterId r:id="rId14"/>
+    <p:notesMasterId r:id="rId22"/>
   </p:notesMasterIdLst>
   <p:sldSz cx="9144000" cy="5143500"/>
   <p:notesSz cx="5143500" cy="9144000"/>
@@ -819,6 +827,622 @@
 </p:notes>
 </file>
 
+<file path=ppt/notesSlides/notesSlide13.xml><?xml version="1.0" encoding="utf-8"?>
+<p:notes xmlns:a="http://schemas.openxmlformats.org/drawingml/2006/main" xmlns:r="http://schemas.openxmlformats.org/officeDocument/2006/relationships" xmlns:p="http://schemas.openxmlformats.org/presentationml/2006/main">
+  <p:cSld>
+    <p:spTree>
+      <p:nvGrpSpPr>
+        <p:cNvPr id="1" name=""/>
+        <p:cNvGrpSpPr/>
+        <p:nvPr/>
+      </p:nvGrpSpPr>
+      <p:grpSpPr>
+        <a:xfrm>
+          <a:off x="0" y="0"/>
+          <a:ext cx="0" cy="0"/>
+          <a:chOff x="0" y="0"/>
+          <a:chExt cx="0" cy="0"/>
+        </a:xfrm>
+      </p:grpSpPr>
+      <p:sp>
+        <p:nvSpPr>
+          <p:cNvPr id="2" name="Slide Image Placeholder 1"/>
+          <p:cNvSpPr>
+            <a:spLocks noGrp="1" noRot="1" noChangeAspect="1"/>
+          </p:cNvSpPr>
+          <p:nvPr>
+            <p:ph type="sldImg"/>
+          </p:nvPr>
+        </p:nvSpPr>
+        <p:spPr/>
+      </p:sp>
+      <p:sp>
+        <p:nvSpPr>
+          <p:cNvPr id="3" name="Notes Placeholder 2"/>
+          <p:cNvSpPr>
+            <a:spLocks noGrp="1"/>
+          </p:cNvSpPr>
+          <p:nvPr>
+            <p:ph type="body" idx="1"/>
+          </p:nvPr>
+        </p:nvSpPr>
+        <p:spPr/>
+        <p:txBody>
+          <a:bodyPr/>
+          <a:lstStyle/>
+          <a:p>
+            <a:r>
+              <a:rPr lang="en-US" dirty="0"/>
+              <a:t/>
+            </a:r>
+            <a:endParaRPr lang="en-US" dirty="0"/>
+          </a:p>
+        </p:txBody>
+      </p:sp>
+      <p:sp>
+        <p:nvSpPr>
+          <p:cNvPr id="4" name="Slide Number Placeholder 3"/>
+          <p:cNvSpPr>
+            <a:spLocks noGrp="1"/>
+          </p:cNvSpPr>
+          <p:nvPr>
+            <p:ph type="sldNum" sz="quarter" idx="10"/>
+          </p:nvPr>
+        </p:nvSpPr>
+        <p:spPr/>
+        <p:txBody>
+          <a:bodyPr/>
+          <a:lstStyle/>
+          <a:p>
+            <a:fld id="{F7021451-1387-4CA6-816F-3879F97B5CBC}" type="slidenum">
+              <a:rPr lang="en-US"/>
+              <a:t>13</a:t>
+            </a:fld>
+            <a:endParaRPr lang="en-US"/>
+          </a:p>
+        </p:txBody>
+      </p:sp>
+    </p:spTree>
+    <p:extLst>
+      <p:ext uri="{BB962C8B-B14F-4D97-AF65-F5344CB8AC3E}">
+        <p14:creationId xmlns:p14="http://schemas.microsoft.com/office/powerpoint/2010/main" val="1024086991"/>
+      </p:ext>
+    </p:extLst>
+  </p:cSld>
+  <p:clrMapOvr>
+    <a:masterClrMapping/>
+  </p:clrMapOvr>
+</p:notes>
+</file>
+
+<file path=ppt/notesSlides/notesSlide14.xml><?xml version="1.0" encoding="utf-8"?>
+<p:notes xmlns:a="http://schemas.openxmlformats.org/drawingml/2006/main" xmlns:r="http://schemas.openxmlformats.org/officeDocument/2006/relationships" xmlns:p="http://schemas.openxmlformats.org/presentationml/2006/main">
+  <p:cSld>
+    <p:spTree>
+      <p:nvGrpSpPr>
+        <p:cNvPr id="1" name=""/>
+        <p:cNvGrpSpPr/>
+        <p:nvPr/>
+      </p:nvGrpSpPr>
+      <p:grpSpPr>
+        <a:xfrm>
+          <a:off x="0" y="0"/>
+          <a:ext cx="0" cy="0"/>
+          <a:chOff x="0" y="0"/>
+          <a:chExt cx="0" cy="0"/>
+        </a:xfrm>
+      </p:grpSpPr>
+      <p:sp>
+        <p:nvSpPr>
+          <p:cNvPr id="2" name="Slide Image Placeholder 1"/>
+          <p:cNvSpPr>
+            <a:spLocks noGrp="1" noRot="1" noChangeAspect="1"/>
+          </p:cNvSpPr>
+          <p:nvPr>
+            <p:ph type="sldImg"/>
+          </p:nvPr>
+        </p:nvSpPr>
+        <p:spPr/>
+      </p:sp>
+      <p:sp>
+        <p:nvSpPr>
+          <p:cNvPr id="3" name="Notes Placeholder 2"/>
+          <p:cNvSpPr>
+            <a:spLocks noGrp="1"/>
+          </p:cNvSpPr>
+          <p:nvPr>
+            <p:ph type="body" idx="1"/>
+          </p:nvPr>
+        </p:nvSpPr>
+        <p:spPr/>
+        <p:txBody>
+          <a:bodyPr/>
+          <a:lstStyle/>
+          <a:p>
+            <a:r>
+              <a:rPr lang="en-US" dirty="0"/>
+              <a:t/>
+            </a:r>
+            <a:endParaRPr lang="en-US" dirty="0"/>
+          </a:p>
+        </p:txBody>
+      </p:sp>
+      <p:sp>
+        <p:nvSpPr>
+          <p:cNvPr id="4" name="Slide Number Placeholder 3"/>
+          <p:cNvSpPr>
+            <a:spLocks noGrp="1"/>
+          </p:cNvSpPr>
+          <p:nvPr>
+            <p:ph type="sldNum" sz="quarter" idx="10"/>
+          </p:nvPr>
+        </p:nvSpPr>
+        <p:spPr/>
+        <p:txBody>
+          <a:bodyPr/>
+          <a:lstStyle/>
+          <a:p>
+            <a:fld id="{F7021451-1387-4CA6-816F-3879F97B5CBC}" type="slidenum">
+              <a:rPr lang="en-US"/>
+              <a:t>14</a:t>
+            </a:fld>
+            <a:endParaRPr lang="en-US"/>
+          </a:p>
+        </p:txBody>
+      </p:sp>
+    </p:spTree>
+    <p:extLst>
+      <p:ext uri="{BB962C8B-B14F-4D97-AF65-F5344CB8AC3E}">
+        <p14:creationId xmlns:p14="http://schemas.microsoft.com/office/powerpoint/2010/main" val="1024086991"/>
+      </p:ext>
+    </p:extLst>
+  </p:cSld>
+  <p:clrMapOvr>
+    <a:masterClrMapping/>
+  </p:clrMapOvr>
+</p:notes>
+</file>
+
+<file path=ppt/notesSlides/notesSlide15.xml><?xml version="1.0" encoding="utf-8"?>
+<p:notes xmlns:a="http://schemas.openxmlformats.org/drawingml/2006/main" xmlns:r="http://schemas.openxmlformats.org/officeDocument/2006/relationships" xmlns:p="http://schemas.openxmlformats.org/presentationml/2006/main">
+  <p:cSld>
+    <p:spTree>
+      <p:nvGrpSpPr>
+        <p:cNvPr id="1" name=""/>
+        <p:cNvGrpSpPr/>
+        <p:nvPr/>
+      </p:nvGrpSpPr>
+      <p:grpSpPr>
+        <a:xfrm>
+          <a:off x="0" y="0"/>
+          <a:ext cx="0" cy="0"/>
+          <a:chOff x="0" y="0"/>
+          <a:chExt cx="0" cy="0"/>
+        </a:xfrm>
+      </p:grpSpPr>
+      <p:sp>
+        <p:nvSpPr>
+          <p:cNvPr id="2" name="Slide Image Placeholder 1"/>
+          <p:cNvSpPr>
+            <a:spLocks noGrp="1" noRot="1" noChangeAspect="1"/>
+          </p:cNvSpPr>
+          <p:nvPr>
+            <p:ph type="sldImg"/>
+          </p:nvPr>
+        </p:nvSpPr>
+        <p:spPr/>
+      </p:sp>
+      <p:sp>
+        <p:nvSpPr>
+          <p:cNvPr id="3" name="Notes Placeholder 2"/>
+          <p:cNvSpPr>
+            <a:spLocks noGrp="1"/>
+          </p:cNvSpPr>
+          <p:nvPr>
+            <p:ph type="body" idx="1"/>
+          </p:nvPr>
+        </p:nvSpPr>
+        <p:spPr/>
+        <p:txBody>
+          <a:bodyPr/>
+          <a:lstStyle/>
+          <a:p>
+            <a:r>
+              <a:rPr lang="en-US" dirty="0"/>
+              <a:t/>
+            </a:r>
+            <a:endParaRPr lang="en-US" dirty="0"/>
+          </a:p>
+        </p:txBody>
+      </p:sp>
+      <p:sp>
+        <p:nvSpPr>
+          <p:cNvPr id="4" name="Slide Number Placeholder 3"/>
+          <p:cNvSpPr>
+            <a:spLocks noGrp="1"/>
+          </p:cNvSpPr>
+          <p:nvPr>
+            <p:ph type="sldNum" sz="quarter" idx="10"/>
+          </p:nvPr>
+        </p:nvSpPr>
+        <p:spPr/>
+        <p:txBody>
+          <a:bodyPr/>
+          <a:lstStyle/>
+          <a:p>
+            <a:fld id="{F7021451-1387-4CA6-816F-3879F97B5CBC}" type="slidenum">
+              <a:rPr lang="en-US"/>
+              <a:t>15</a:t>
+            </a:fld>
+            <a:endParaRPr lang="en-US"/>
+          </a:p>
+        </p:txBody>
+      </p:sp>
+    </p:spTree>
+    <p:extLst>
+      <p:ext uri="{BB962C8B-B14F-4D97-AF65-F5344CB8AC3E}">
+        <p14:creationId xmlns:p14="http://schemas.microsoft.com/office/powerpoint/2010/main" val="1024086991"/>
+      </p:ext>
+    </p:extLst>
+  </p:cSld>
+  <p:clrMapOvr>
+    <a:masterClrMapping/>
+  </p:clrMapOvr>
+</p:notes>
+</file>
+
+<file path=ppt/notesSlides/notesSlide16.xml><?xml version="1.0" encoding="utf-8"?>
+<p:notes xmlns:a="http://schemas.openxmlformats.org/drawingml/2006/main" xmlns:r="http://schemas.openxmlformats.org/officeDocument/2006/relationships" xmlns:p="http://schemas.openxmlformats.org/presentationml/2006/main">
+  <p:cSld>
+    <p:spTree>
+      <p:nvGrpSpPr>
+        <p:cNvPr id="1" name=""/>
+        <p:cNvGrpSpPr/>
+        <p:nvPr/>
+      </p:nvGrpSpPr>
+      <p:grpSpPr>
+        <a:xfrm>
+          <a:off x="0" y="0"/>
+          <a:ext cx="0" cy="0"/>
+          <a:chOff x="0" y="0"/>
+          <a:chExt cx="0" cy="0"/>
+        </a:xfrm>
+      </p:grpSpPr>
+      <p:sp>
+        <p:nvSpPr>
+          <p:cNvPr id="2" name="Slide Image Placeholder 1"/>
+          <p:cNvSpPr>
+            <a:spLocks noGrp="1" noRot="1" noChangeAspect="1"/>
+          </p:cNvSpPr>
+          <p:nvPr>
+            <p:ph type="sldImg"/>
+          </p:nvPr>
+        </p:nvSpPr>
+        <p:spPr/>
+      </p:sp>
+      <p:sp>
+        <p:nvSpPr>
+          <p:cNvPr id="3" name="Notes Placeholder 2"/>
+          <p:cNvSpPr>
+            <a:spLocks noGrp="1"/>
+          </p:cNvSpPr>
+          <p:nvPr>
+            <p:ph type="body" idx="1"/>
+          </p:nvPr>
+        </p:nvSpPr>
+        <p:spPr/>
+        <p:txBody>
+          <a:bodyPr/>
+          <a:lstStyle/>
+          <a:p>
+            <a:r>
+              <a:rPr lang="en-US" dirty="0"/>
+              <a:t/>
+            </a:r>
+            <a:endParaRPr lang="en-US" dirty="0"/>
+          </a:p>
+        </p:txBody>
+      </p:sp>
+      <p:sp>
+        <p:nvSpPr>
+          <p:cNvPr id="4" name="Slide Number Placeholder 3"/>
+          <p:cNvSpPr>
+            <a:spLocks noGrp="1"/>
+          </p:cNvSpPr>
+          <p:nvPr>
+            <p:ph type="sldNum" sz="quarter" idx="10"/>
+          </p:nvPr>
+        </p:nvSpPr>
+        <p:spPr/>
+        <p:txBody>
+          <a:bodyPr/>
+          <a:lstStyle/>
+          <a:p>
+            <a:fld id="{F7021451-1387-4CA6-816F-3879F97B5CBC}" type="slidenum">
+              <a:rPr lang="en-US"/>
+              <a:t>16</a:t>
+            </a:fld>
+            <a:endParaRPr lang="en-US"/>
+          </a:p>
+        </p:txBody>
+      </p:sp>
+    </p:spTree>
+    <p:extLst>
+      <p:ext uri="{BB962C8B-B14F-4D97-AF65-F5344CB8AC3E}">
+        <p14:creationId xmlns:p14="http://schemas.microsoft.com/office/powerpoint/2010/main" val="1024086991"/>
+      </p:ext>
+    </p:extLst>
+  </p:cSld>
+  <p:clrMapOvr>
+    <a:masterClrMapping/>
+  </p:clrMapOvr>
+</p:notes>
+</file>
+
+<file path=ppt/notesSlides/notesSlide17.xml><?xml version="1.0" encoding="utf-8"?>
+<p:notes xmlns:a="http://schemas.openxmlformats.org/drawingml/2006/main" xmlns:r="http://schemas.openxmlformats.org/officeDocument/2006/relationships" xmlns:p="http://schemas.openxmlformats.org/presentationml/2006/main">
+  <p:cSld>
+    <p:spTree>
+      <p:nvGrpSpPr>
+        <p:cNvPr id="1" name=""/>
+        <p:cNvGrpSpPr/>
+        <p:nvPr/>
+      </p:nvGrpSpPr>
+      <p:grpSpPr>
+        <a:xfrm>
+          <a:off x="0" y="0"/>
+          <a:ext cx="0" cy="0"/>
+          <a:chOff x="0" y="0"/>
+          <a:chExt cx="0" cy="0"/>
+        </a:xfrm>
+      </p:grpSpPr>
+      <p:sp>
+        <p:nvSpPr>
+          <p:cNvPr id="2" name="Slide Image Placeholder 1"/>
+          <p:cNvSpPr>
+            <a:spLocks noGrp="1" noRot="1" noChangeAspect="1"/>
+          </p:cNvSpPr>
+          <p:nvPr>
+            <p:ph type="sldImg"/>
+          </p:nvPr>
+        </p:nvSpPr>
+        <p:spPr/>
+      </p:sp>
+      <p:sp>
+        <p:nvSpPr>
+          <p:cNvPr id="3" name="Notes Placeholder 2"/>
+          <p:cNvSpPr>
+            <a:spLocks noGrp="1"/>
+          </p:cNvSpPr>
+          <p:nvPr>
+            <p:ph type="body" idx="1"/>
+          </p:nvPr>
+        </p:nvSpPr>
+        <p:spPr/>
+        <p:txBody>
+          <a:bodyPr/>
+          <a:lstStyle/>
+          <a:p>
+            <a:r>
+              <a:rPr lang="en-US" dirty="0"/>
+              <a:t/>
+            </a:r>
+            <a:endParaRPr lang="en-US" dirty="0"/>
+          </a:p>
+        </p:txBody>
+      </p:sp>
+      <p:sp>
+        <p:nvSpPr>
+          <p:cNvPr id="4" name="Slide Number Placeholder 3"/>
+          <p:cNvSpPr>
+            <a:spLocks noGrp="1"/>
+          </p:cNvSpPr>
+          <p:nvPr>
+            <p:ph type="sldNum" sz="quarter" idx="10"/>
+          </p:nvPr>
+        </p:nvSpPr>
+        <p:spPr/>
+        <p:txBody>
+          <a:bodyPr/>
+          <a:lstStyle/>
+          <a:p>
+            <a:fld id="{F7021451-1387-4CA6-816F-3879F97B5CBC}" type="slidenum">
+              <a:rPr lang="en-US"/>
+              <a:t>17</a:t>
+            </a:fld>
+            <a:endParaRPr lang="en-US"/>
+          </a:p>
+        </p:txBody>
+      </p:sp>
+    </p:spTree>
+    <p:extLst>
+      <p:ext uri="{BB962C8B-B14F-4D97-AF65-F5344CB8AC3E}">
+        <p14:creationId xmlns:p14="http://schemas.microsoft.com/office/powerpoint/2010/main" val="1024086991"/>
+      </p:ext>
+    </p:extLst>
+  </p:cSld>
+  <p:clrMapOvr>
+    <a:masterClrMapping/>
+  </p:clrMapOvr>
+</p:notes>
+</file>
+
+<file path=ppt/notesSlides/notesSlide18.xml><?xml version="1.0" encoding="utf-8"?>
+<p:notes xmlns:a="http://schemas.openxmlformats.org/drawingml/2006/main" xmlns:r="http://schemas.openxmlformats.org/officeDocument/2006/relationships" xmlns:p="http://schemas.openxmlformats.org/presentationml/2006/main">
+  <p:cSld>
+    <p:spTree>
+      <p:nvGrpSpPr>
+        <p:cNvPr id="1" name=""/>
+        <p:cNvGrpSpPr/>
+        <p:nvPr/>
+      </p:nvGrpSpPr>
+      <p:grpSpPr>
+        <a:xfrm>
+          <a:off x="0" y="0"/>
+          <a:ext cx="0" cy="0"/>
+          <a:chOff x="0" y="0"/>
+          <a:chExt cx="0" cy="0"/>
+        </a:xfrm>
+      </p:grpSpPr>
+      <p:sp>
+        <p:nvSpPr>
+          <p:cNvPr id="2" name="Slide Image Placeholder 1"/>
+          <p:cNvSpPr>
+            <a:spLocks noGrp="1" noRot="1" noChangeAspect="1"/>
+          </p:cNvSpPr>
+          <p:nvPr>
+            <p:ph type="sldImg"/>
+          </p:nvPr>
+        </p:nvSpPr>
+        <p:spPr/>
+      </p:sp>
+      <p:sp>
+        <p:nvSpPr>
+          <p:cNvPr id="3" name="Notes Placeholder 2"/>
+          <p:cNvSpPr>
+            <a:spLocks noGrp="1"/>
+          </p:cNvSpPr>
+          <p:nvPr>
+            <p:ph type="body" idx="1"/>
+          </p:nvPr>
+        </p:nvSpPr>
+        <p:spPr/>
+        <p:txBody>
+          <a:bodyPr/>
+          <a:lstStyle/>
+          <a:p>
+            <a:r>
+              <a:rPr lang="en-US" dirty="0"/>
+              <a:t/>
+            </a:r>
+            <a:endParaRPr lang="en-US" dirty="0"/>
+          </a:p>
+        </p:txBody>
+      </p:sp>
+      <p:sp>
+        <p:nvSpPr>
+          <p:cNvPr id="4" name="Slide Number Placeholder 3"/>
+          <p:cNvSpPr>
+            <a:spLocks noGrp="1"/>
+          </p:cNvSpPr>
+          <p:nvPr>
+            <p:ph type="sldNum" sz="quarter" idx="10"/>
+          </p:nvPr>
+        </p:nvSpPr>
+        <p:spPr/>
+        <p:txBody>
+          <a:bodyPr/>
+          <a:lstStyle/>
+          <a:p>
+            <a:fld id="{F7021451-1387-4CA6-816F-3879F97B5CBC}" type="slidenum">
+              <a:rPr lang="en-US"/>
+              <a:t>18</a:t>
+            </a:fld>
+            <a:endParaRPr lang="en-US"/>
+          </a:p>
+        </p:txBody>
+      </p:sp>
+    </p:spTree>
+    <p:extLst>
+      <p:ext uri="{BB962C8B-B14F-4D97-AF65-F5344CB8AC3E}">
+        <p14:creationId xmlns:p14="http://schemas.microsoft.com/office/powerpoint/2010/main" val="1024086991"/>
+      </p:ext>
+    </p:extLst>
+  </p:cSld>
+  <p:clrMapOvr>
+    <a:masterClrMapping/>
+  </p:clrMapOvr>
+</p:notes>
+</file>
+
+<file path=ppt/notesSlides/notesSlide19.xml><?xml version="1.0" encoding="utf-8"?>
+<p:notes xmlns:a="http://schemas.openxmlformats.org/drawingml/2006/main" xmlns:r="http://schemas.openxmlformats.org/officeDocument/2006/relationships" xmlns:p="http://schemas.openxmlformats.org/presentationml/2006/main">
+  <p:cSld>
+    <p:spTree>
+      <p:nvGrpSpPr>
+        <p:cNvPr id="1" name=""/>
+        <p:cNvGrpSpPr/>
+        <p:nvPr/>
+      </p:nvGrpSpPr>
+      <p:grpSpPr>
+        <a:xfrm>
+          <a:off x="0" y="0"/>
+          <a:ext cx="0" cy="0"/>
+          <a:chOff x="0" y="0"/>
+          <a:chExt cx="0" cy="0"/>
+        </a:xfrm>
+      </p:grpSpPr>
+      <p:sp>
+        <p:nvSpPr>
+          <p:cNvPr id="2" name="Slide Image Placeholder 1"/>
+          <p:cNvSpPr>
+            <a:spLocks noGrp="1" noRot="1" noChangeAspect="1"/>
+          </p:cNvSpPr>
+          <p:nvPr>
+            <p:ph type="sldImg"/>
+          </p:nvPr>
+        </p:nvSpPr>
+        <p:spPr/>
+      </p:sp>
+      <p:sp>
+        <p:nvSpPr>
+          <p:cNvPr id="3" name="Notes Placeholder 2"/>
+          <p:cNvSpPr>
+            <a:spLocks noGrp="1"/>
+          </p:cNvSpPr>
+          <p:nvPr>
+            <p:ph type="body" idx="1"/>
+          </p:nvPr>
+        </p:nvSpPr>
+        <p:spPr/>
+        <p:txBody>
+          <a:bodyPr/>
+          <a:lstStyle/>
+          <a:p>
+            <a:r>
+              <a:rPr lang="en-US" dirty="0"/>
+              <a:t/>
+            </a:r>
+            <a:endParaRPr lang="en-US" dirty="0"/>
+          </a:p>
+        </p:txBody>
+      </p:sp>
+      <p:sp>
+        <p:nvSpPr>
+          <p:cNvPr id="4" name="Slide Number Placeholder 3"/>
+          <p:cNvSpPr>
+            <a:spLocks noGrp="1"/>
+          </p:cNvSpPr>
+          <p:nvPr>
+            <p:ph type="sldNum" sz="quarter" idx="10"/>
+          </p:nvPr>
+        </p:nvSpPr>
+        <p:spPr/>
+        <p:txBody>
+          <a:bodyPr/>
+          <a:lstStyle/>
+          <a:p>
+            <a:fld id="{F7021451-1387-4CA6-816F-3879F97B5CBC}" type="slidenum">
+              <a:rPr lang="en-US"/>
+              <a:t>19</a:t>
+            </a:fld>
+            <a:endParaRPr lang="en-US"/>
+          </a:p>
+        </p:txBody>
+      </p:sp>
+    </p:spTree>
+    <p:extLst>
+      <p:ext uri="{BB962C8B-B14F-4D97-AF65-F5344CB8AC3E}">
+        <p14:creationId xmlns:p14="http://schemas.microsoft.com/office/powerpoint/2010/main" val="1024086991"/>
+      </p:ext>
+    </p:extLst>
+  </p:cSld>
+  <p:clrMapOvr>
+    <a:masterClrMapping/>
+  </p:clrMapOvr>
+</p:notes>
+</file>
+
 <file path=ppt/notesSlides/notesSlide2.xml><?xml version="1.0" encoding="utf-8"?>
 <p:notes xmlns:a="http://schemas.openxmlformats.org/drawingml/2006/main" xmlns:r="http://schemas.openxmlformats.org/officeDocument/2006/relationships" xmlns:p="http://schemas.openxmlformats.org/presentationml/2006/main">
   <p:cSld>
@@ -889,6 +1513,94 @@
             <a:fld id="{F7021451-1387-4CA6-816F-3879F97B5CBC}" type="slidenum">
               <a:rPr lang="en-US"/>
               <a:t>2</a:t>
+            </a:fld>
+            <a:endParaRPr lang="en-US"/>
+          </a:p>
+        </p:txBody>
+      </p:sp>
+    </p:spTree>
+    <p:extLst>
+      <p:ext uri="{BB962C8B-B14F-4D97-AF65-F5344CB8AC3E}">
+        <p14:creationId xmlns:p14="http://schemas.microsoft.com/office/powerpoint/2010/main" val="1024086991"/>
+      </p:ext>
+    </p:extLst>
+  </p:cSld>
+  <p:clrMapOvr>
+    <a:masterClrMapping/>
+  </p:clrMapOvr>
+</p:notes>
+</file>
+
+<file path=ppt/notesSlides/notesSlide20.xml><?xml version="1.0" encoding="utf-8"?>
+<p:notes xmlns:a="http://schemas.openxmlformats.org/drawingml/2006/main" xmlns:r="http://schemas.openxmlformats.org/officeDocument/2006/relationships" xmlns:p="http://schemas.openxmlformats.org/presentationml/2006/main">
+  <p:cSld>
+    <p:spTree>
+      <p:nvGrpSpPr>
+        <p:cNvPr id="1" name=""/>
+        <p:cNvGrpSpPr/>
+        <p:nvPr/>
+      </p:nvGrpSpPr>
+      <p:grpSpPr>
+        <a:xfrm>
+          <a:off x="0" y="0"/>
+          <a:ext cx="0" cy="0"/>
+          <a:chOff x="0" y="0"/>
+          <a:chExt cx="0" cy="0"/>
+        </a:xfrm>
+      </p:grpSpPr>
+      <p:sp>
+        <p:nvSpPr>
+          <p:cNvPr id="2" name="Slide Image Placeholder 1"/>
+          <p:cNvSpPr>
+            <a:spLocks noGrp="1" noRot="1" noChangeAspect="1"/>
+          </p:cNvSpPr>
+          <p:nvPr>
+            <p:ph type="sldImg"/>
+          </p:nvPr>
+        </p:nvSpPr>
+        <p:spPr/>
+      </p:sp>
+      <p:sp>
+        <p:nvSpPr>
+          <p:cNvPr id="3" name="Notes Placeholder 2"/>
+          <p:cNvSpPr>
+            <a:spLocks noGrp="1"/>
+          </p:cNvSpPr>
+          <p:nvPr>
+            <p:ph type="body" idx="1"/>
+          </p:nvPr>
+        </p:nvSpPr>
+        <p:spPr/>
+        <p:txBody>
+          <a:bodyPr/>
+          <a:lstStyle/>
+          <a:p>
+            <a:r>
+              <a:rPr lang="en-US" dirty="0"/>
+              <a:t/>
+            </a:r>
+            <a:endParaRPr lang="en-US" dirty="0"/>
+          </a:p>
+        </p:txBody>
+      </p:sp>
+      <p:sp>
+        <p:nvSpPr>
+          <p:cNvPr id="4" name="Slide Number Placeholder 3"/>
+          <p:cNvSpPr>
+            <a:spLocks noGrp="1"/>
+          </p:cNvSpPr>
+          <p:nvPr>
+            <p:ph type="sldNum" sz="quarter" idx="10"/>
+          </p:nvPr>
+        </p:nvSpPr>
+        <p:spPr/>
+        <p:txBody>
+          <a:bodyPr/>
+          <a:lstStyle/>
+          <a:p>
+            <a:fld id="{F7021451-1387-4CA6-816F-3879F97B5CBC}" type="slidenum">
+              <a:rPr lang="en-US"/>
+              <a:t>20</a:t>
             </a:fld>
             <a:endParaRPr lang="en-US"/>
           </a:p>
@@ -2140,240 +2852,6 @@
         </p:nvSpPr>
         <p:spPr>
           <a:xfrm>
-            <a:off x="406301" y="1223963"/>
-            <a:ext cx="8498026" cy="274290"/>
-          </a:xfrm>
-          <a:prstGeom prst="rect">
-            <a:avLst/>
-          </a:prstGeom>
-          <a:noFill/>
-          <a:ln/>
-        </p:spPr>
-        <p:txBody>
-          <a:bodyPr wrap="square" lIns="0" tIns="0" rIns="0" bIns="0" rtlCol="0" anchor="t"/>
-          <a:lstStyle/>
-          <a:p>
-            <a:pPr algn="l" indent="0" marL="0">
-              <a:lnSpc>
-                <a:spcPts val="2160"/>
-              </a:lnSpc>
-              <a:spcBef>
-                <a:spcPts val="600"/>
-              </a:spcBef>
-              <a:spcAft>
-                <a:spcPts val="800"/>
-              </a:spcAft>
-              <a:buNone/>
-            </a:pPr>
-            <a:r>
-              <a:rPr lang="en-US" sz="1800" b="1" dirty="0">
-                <a:solidFill>
-                  <a:srgbClr val="FE4447"/>
-                </a:solidFill>
-                <a:latin typeface="Georgia" pitchFamily="34" charset="0"/>
-                <a:ea typeface="Georgia" pitchFamily="34" charset="-122"/>
-                <a:cs typeface="Georgia" pitchFamily="34" charset="-120"/>
-              </a:rPr>
-              <a:t>Learning objective</a:t>
-            </a:r>
-            <a:endParaRPr lang="en-US" sz="1800" dirty="0"/>
-          </a:p>
-        </p:txBody>
-      </p:sp>
-      <p:sp>
-        <p:nvSpPr>
-          <p:cNvPr id="6" name="Text 4"/>
-          <p:cNvSpPr/>
-          <p:nvPr/>
-        </p:nvSpPr>
-        <p:spPr>
-          <a:xfrm>
-            <a:off x="406301" y="1637854"/>
-            <a:ext cx="8498026" cy="639812"/>
-          </a:xfrm>
-          <a:prstGeom prst="rect">
-            <a:avLst/>
-          </a:prstGeom>
-          <a:noFill/>
-          <a:ln/>
-        </p:spPr>
-        <p:txBody>
-          <a:bodyPr wrap="square" lIns="0" tIns="0" rIns="0" bIns="0" rtlCol="0" anchor="t"/>
-          <a:lstStyle/>
-          <a:p>
-            <a:pPr algn="l" indent="0" marL="0">
-              <a:lnSpc>
-                <a:spcPts val="1680"/>
-              </a:lnSpc>
-              <a:spcBef>
-                <a:spcPts val="300"/>
-              </a:spcBef>
-              <a:spcAft>
-                <a:spcPts val="300"/>
-              </a:spcAft>
-              <a:buNone/>
-            </a:pPr>
-            <a:r>
-              <a:rPr lang="en-US" sz="1200" dirty="0">
-                <a:solidFill>
-                  <a:srgbClr val="1C2833"/>
-                </a:solidFill>
-                <a:latin typeface="Arial" pitchFamily="34" charset="0"/>
-                <a:ea typeface="Arial" pitchFamily="34" charset="-122"/>
-                <a:cs typeface="Arial" pitchFamily="34" charset="-120"/>
-              </a:rPr>
-              <a:t>By the end of this lesson, students can identify </a:t>
-            </a:r>
-            <a:pPr algn="l" indent="0" marL="0">
-              <a:lnSpc>
-                <a:spcPts val="1680"/>
-              </a:lnSpc>
-              <a:spcBef>
-                <a:spcPts val="300"/>
-              </a:spcBef>
-              <a:spcAft>
-                <a:spcPts val="300"/>
-              </a:spcAft>
-              <a:buNone/>
-            </a:pPr>
-            <a:r>
-              <a:rPr lang="en-US" sz="1200" i="1" dirty="0">
-                <a:solidFill>
-                  <a:srgbClr val="1C2833"/>
-                </a:solidFill>
-                <a:latin typeface="Arial" pitchFamily="34" charset="0"/>
-                <a:ea typeface="Arial" pitchFamily="34" charset="-122"/>
-                <a:cs typeface="Arial" pitchFamily="34" charset="-120"/>
-              </a:rPr>
-              <a:t>haridrā</a:t>
-            </a:r>
-            <a:pPr algn="l" indent="0" marL="0">
-              <a:lnSpc>
-                <a:spcPts val="1680"/>
-              </a:lnSpc>
-              <a:spcBef>
-                <a:spcPts val="300"/>
-              </a:spcBef>
-              <a:spcAft>
-                <a:spcPts val="300"/>
-              </a:spcAft>
-              <a:buNone/>
-            </a:pPr>
-            <a:r>
-              <a:rPr lang="en-US" sz="1200" dirty="0">
-                <a:solidFill>
-                  <a:srgbClr val="1C2833"/>
-                </a:solidFill>
-                <a:latin typeface="Arial" pitchFamily="34" charset="0"/>
-                <a:ea typeface="Arial" pitchFamily="34" charset="-122"/>
-                <a:cs typeface="Arial" pitchFamily="34" charset="-120"/>
-              </a:rPr>
-              <a:t> (</a:t>
-            </a:r>
-            <a:pPr algn="l" indent="0" marL="0">
-              <a:lnSpc>
-                <a:spcPts val="1680"/>
-              </a:lnSpc>
-              <a:spcBef>
-                <a:spcPts val="300"/>
-              </a:spcBef>
-              <a:spcAft>
-                <a:spcPts val="300"/>
-              </a:spcAft>
-              <a:buNone/>
-            </a:pPr>
-            <a:r>
-              <a:rPr lang="en-US" sz="1200" i="1" dirty="0">
-                <a:solidFill>
-                  <a:srgbClr val="1C2833"/>
-                </a:solidFill>
-                <a:latin typeface="Arial" pitchFamily="34" charset="0"/>
-                <a:ea typeface="Arial" pitchFamily="34" charset="-122"/>
-                <a:cs typeface="Arial" pitchFamily="34" charset="-120"/>
-              </a:rPr>
-              <a:t>Curcuma longa</a:t>
-            </a:r>
-            <a:pPr algn="l" indent="0" marL="0">
-              <a:lnSpc>
-                <a:spcPts val="1680"/>
-              </a:lnSpc>
-              <a:spcBef>
-                <a:spcPts val="300"/>
-              </a:spcBef>
-              <a:spcAft>
-                <a:spcPts val="300"/>
-              </a:spcAft>
-              <a:buNone/>
-            </a:pPr>
-            <a:r>
-              <a:rPr lang="en-US" sz="1200" dirty="0">
-                <a:solidFill>
-                  <a:srgbClr val="1C2833"/>
-                </a:solidFill>
-                <a:latin typeface="Arial" pitchFamily="34" charset="0"/>
-                <a:ea typeface="Arial" pitchFamily="34" charset="-122"/>
-                <a:cs typeface="Arial" pitchFamily="34" charset="-120"/>
-              </a:rPr>
-              <a:t>) as a rhizome (not a root), name </a:t>
-            </a:r>
-            <a:pPr algn="l" indent="0" marL="0">
-              <a:lnSpc>
-                <a:spcPts val="1680"/>
-              </a:lnSpc>
-              <a:spcBef>
-                <a:spcPts val="300"/>
-              </a:spcBef>
-              <a:spcAft>
-                <a:spcPts val="300"/>
-              </a:spcAft>
-              <a:buNone/>
-            </a:pPr>
-            <a:r>
-              <a:rPr lang="en-US" sz="1200" b="1" dirty="0">
-                <a:solidFill>
-                  <a:srgbClr val="1C2833"/>
-                </a:solidFill>
-                <a:latin typeface="Arial" pitchFamily="34" charset="0"/>
-                <a:ea typeface="Arial" pitchFamily="34" charset="-122"/>
-                <a:cs typeface="Arial" pitchFamily="34" charset="-120"/>
-              </a:rPr>
-              <a:t>curcumin</a:t>
-            </a:r>
-            <a:pPr algn="l" indent="0" marL="0">
-              <a:lnSpc>
-                <a:spcPts val="1680"/>
-              </a:lnSpc>
-              <a:spcBef>
-                <a:spcPts val="300"/>
-              </a:spcBef>
-              <a:spcAft>
-                <a:spcPts val="300"/>
-              </a:spcAft>
-              <a:buNone/>
-            </a:pPr>
-            <a:r>
-              <a:rPr lang="en-US" sz="1200" dirty="0">
-                <a:solidFill>
-                  <a:srgbClr val="1C2833"/>
-                </a:solidFill>
-                <a:latin typeface="Arial" pitchFamily="34" charset="0"/>
-                <a:ea typeface="Arial" pitchFamily="34" charset="-122"/>
-                <a:cs typeface="Arial" pitchFamily="34" charset="-120"/>
-              </a:rPr>
-              <a:t> as its principal pigment and active compound, distinguish whole-spice culinary use from concentrated supplement use, and describe one well-supported and one over-claimed use.</a:t>
-            </a:r>
-            <a:endParaRPr lang="en-US" sz="1200" dirty="0"/>
-          </a:p>
-        </p:txBody>
-      </p:sp>
-      <p:sp>
-        <p:nvSpPr>
-          <p:cNvPr id="7" name="Text 5"/>
-          <p:cNvSpPr/>
-          <p:nvPr/>
-        </p:nvSpPr>
-        <p:spPr>
-          <a:xfrm>
             <a:off x="406301" y="4434929"/>
             <a:ext cx="8498026" cy="213271"/>
           </a:xfrm>
@@ -2518,7 +2996,7 @@
                 <a:ea typeface="Georgia" pitchFamily="34" charset="-122"/>
                 <a:cs typeface="Georgia" pitchFamily="34" charset="-120"/>
               </a:rPr>
-              <a:t>Differentiation</a:t>
+              <a:t>Core (20 min) (cont.)</a:t>
             </a:r>
             <a:endParaRPr lang="en-US" sz="1800" dirty="0"/>
           </a:p>
@@ -2533,7 +3011,7 @@
         <p:spPr>
           <a:xfrm>
             <a:off x="634901" y="883593"/>
-            <a:ext cx="8102798" cy="937022"/>
+            <a:ext cx="8102798" cy="281880"/>
           </a:xfrm>
           <a:prstGeom prst="rect">
             <a:avLst/>
@@ -2564,70 +3042,52 @@
                 <a:ea typeface="Arial" pitchFamily="34" charset="-122"/>
                 <a:cs typeface="Arial" pitchFamily="34" charset="-120"/>
               </a:rPr>
-              <a:t>One tier up:</a:t>
-            </a:r>
-            <a:pPr algn="l" indent="0" marL="0">
-              <a:lnSpc>
-                <a:spcPts val="1620"/>
-              </a:lnSpc>
-              <a:spcAft>
-                <a:spcPts val="300"/>
-              </a:spcAft>
-              <a:buNone/>
-            </a:pPr>
-            <a:r>
-              <a:rPr lang="en-US" sz="1200" dirty="0">
-                <a:solidFill>
-                  <a:srgbClr val="1C2833"/>
-                </a:solidFill>
-                <a:latin typeface="Arial" pitchFamily="34" charset="0"/>
-                <a:ea typeface="Arial" pitchFamily="34" charset="-122"/>
-                <a:cs typeface="Arial" pitchFamily="34" charset="-120"/>
-              </a:rPr>
-              <a:t> Curcumin is fluorescent under UV light. Look up </a:t>
-            </a:r>
-            <a:pPr algn="l" indent="0" marL="0">
-              <a:lnSpc>
-                <a:spcPts val="1620"/>
-              </a:lnSpc>
-              <a:spcAft>
-                <a:spcPts val="300"/>
-              </a:spcAft>
-              <a:buNone/>
-            </a:pPr>
-            <a:r>
-              <a:rPr lang="en-US" sz="1200" i="1" dirty="0">
-                <a:solidFill>
-                  <a:srgbClr val="1C2833"/>
-                </a:solidFill>
-                <a:latin typeface="Arial" pitchFamily="34" charset="0"/>
-                <a:ea typeface="Arial" pitchFamily="34" charset="-122"/>
-                <a:cs typeface="Arial" pitchFamily="34" charset="-120"/>
-              </a:rPr>
-              <a:t>one</a:t>
-            </a:r>
-            <a:pPr algn="l" indent="0" marL="0">
-              <a:lnSpc>
-                <a:spcPts val="1620"/>
-              </a:lnSpc>
-              <a:spcAft>
-                <a:spcPts val="300"/>
-              </a:spcAft>
-              <a:buNone/>
-            </a:pPr>
-            <a:r>
-              <a:rPr lang="en-US" sz="1200" dirty="0">
-                <a:solidFill>
-                  <a:srgbClr val="1C2833"/>
-                </a:solidFill>
-                <a:latin typeface="Arial" pitchFamily="34" charset="0"/>
-                <a:ea typeface="Arial" pitchFamily="34" charset="-122"/>
-                <a:cs typeface="Arial" pitchFamily="34" charset="-120"/>
-              </a:rPr>
-              <a:t> other dietary pigment that fluoresces. Why might fluorescence and biological activity be related (hint: think about how light energy interacts with electronic structure)?</a:t>
+              <a:t>What modern chemistry knows.</a:t>
+            </a:r>
+            <a:pPr algn="l" indent="0" marL="0">
+              <a:lnSpc>
+                <a:spcPts val="1620"/>
+              </a:lnSpc>
+              <a:spcAft>
+                <a:spcPts val="300"/>
+              </a:spcAft>
+              <a:buNone/>
+            </a:pPr>
+            <a:r>
+              <a:rPr lang="en-US" sz="1200" dirty="0">
+                <a:solidFill>
+                  <a:srgbClr val="1C2833"/>
+                </a:solidFill>
+                <a:latin typeface="Arial" pitchFamily="34" charset="0"/>
+                <a:ea typeface="Arial" pitchFamily="34" charset="-122"/>
+                <a:cs typeface="Arial" pitchFamily="34" charset="-120"/>
+              </a:rPr>
+              <a:t> Real, well-supported:</a:t>
             </a:r>
             <a:endParaRPr lang="en-US" sz="1200" dirty="0"/>
           </a:p>
+        </p:txBody>
+      </p:sp>
+      <p:sp>
+        <p:nvSpPr>
+          <p:cNvPr id="5" name="Text 3"/>
+          <p:cNvSpPr/>
+          <p:nvPr/>
+        </p:nvSpPr>
+        <p:spPr>
+          <a:xfrm>
+            <a:off x="634901" y="1266974"/>
+            <a:ext cx="8102798" cy="1592163"/>
+          </a:xfrm>
+          <a:prstGeom prst="rect">
+            <a:avLst/>
+          </a:prstGeom>
+          <a:noFill/>
+          <a:ln/>
+        </p:spPr>
+        <p:txBody>
+          <a:bodyPr wrap="square" lIns="0" tIns="0" rIns="0" bIns="0" rtlCol="0" anchor="t"/>
+          <a:lstStyle/>
           <a:p>
             <a:pPr algn="l" marL="342900" indent="-342900">
               <a:lnSpc>
@@ -2648,35 +3108,163 @@
                 <a:ea typeface="Arial" pitchFamily="34" charset="-122"/>
                 <a:cs typeface="Arial" pitchFamily="34" charset="-120"/>
               </a:rPr>
-              <a:t>One tier down:</a:t>
-            </a:r>
-            <a:pPr algn="l" indent="0" marL="0">
-              <a:lnSpc>
-                <a:spcPts val="1620"/>
-              </a:lnSpc>
-              <a:spcAft>
-                <a:spcPts val="300"/>
-              </a:spcAft>
-              <a:buNone/>
-            </a:pPr>
-            <a:r>
-              <a:rPr lang="en-US" sz="1200" dirty="0">
-                <a:solidFill>
-                  <a:srgbClr val="1C2833"/>
-                </a:solidFill>
-                <a:latin typeface="Arial" pitchFamily="34" charset="0"/>
-                <a:ea typeface="Arial" pitchFamily="34" charset="-122"/>
-                <a:cs typeface="Arial" pitchFamily="34" charset="-120"/>
-              </a:rPr>
-              <a:t> Focus on identifying the rhizome shape and remembering the word "curcumin." Stain demo and bioavailability concept come back on Day 10's revision.</a:t>
+              <a:t>Anti-inflammatory mechanism:</a:t>
+            </a:r>
+            <a:pPr algn="l" indent="0" marL="0">
+              <a:lnSpc>
+                <a:spcPts val="1620"/>
+              </a:lnSpc>
+              <a:spcAft>
+                <a:spcPts val="300"/>
+              </a:spcAft>
+              <a:buNone/>
+            </a:pPr>
+            <a:r>
+              <a:rPr lang="en-US" sz="1200" dirty="0">
+                <a:solidFill>
+                  <a:srgbClr val="1C2833"/>
+                </a:solidFill>
+                <a:latin typeface="Arial" pitchFamily="34" charset="0"/>
+                <a:ea typeface="Arial" pitchFamily="34" charset="-122"/>
+                <a:cs typeface="Arial" pitchFamily="34" charset="-120"/>
+              </a:rPr>
+              <a:t> curcumin inhibits several inflammation-related signalling molecules in lab studies. Mechanism evidence is strong.</a:t>
             </a:r>
             <a:endParaRPr lang="en-US" sz="1200" dirty="0"/>
           </a:p>
-        </p:txBody>
-      </p:sp>
-      <p:sp>
-        <p:nvSpPr>
-          <p:cNvPr id="5" name="Text 3"/>
+          <a:p>
+            <a:pPr algn="l" marL="342900" indent="-342900">
+              <a:lnSpc>
+                <a:spcPts val="1620"/>
+              </a:lnSpc>
+              <a:spcAft>
+                <a:spcPts val="300"/>
+              </a:spcAft>
+              <a:buSzPct val="100000"/>
+              <a:buChar char="•"/>
+            </a:pPr>
+            <a:r>
+              <a:rPr lang="en-US" sz="1200" b="1" dirty="0">
+                <a:solidFill>
+                  <a:srgbClr val="1C2833"/>
+                </a:solidFill>
+                <a:latin typeface="Arial" pitchFamily="34" charset="0"/>
+                <a:ea typeface="Arial" pitchFamily="34" charset="-122"/>
+                <a:cs typeface="Arial" pitchFamily="34" charset="-120"/>
+              </a:rPr>
+              <a:t>Low bioavailability:</a:t>
+            </a:r>
+            <a:pPr algn="l" indent="0" marL="0">
+              <a:lnSpc>
+                <a:spcPts val="1620"/>
+              </a:lnSpc>
+              <a:spcAft>
+                <a:spcPts val="300"/>
+              </a:spcAft>
+              <a:buNone/>
+            </a:pPr>
+            <a:r>
+              <a:rPr lang="en-US" sz="1200" dirty="0">
+                <a:solidFill>
+                  <a:srgbClr val="1C2833"/>
+                </a:solidFill>
+                <a:latin typeface="Arial" pitchFamily="34" charset="0"/>
+                <a:ea typeface="Arial" pitchFamily="34" charset="-122"/>
+                <a:cs typeface="Arial" pitchFamily="34" charset="-120"/>
+              </a:rPr>
+              <a:t> here's the catch — curcumin is </a:t>
+            </a:r>
+            <a:pPr algn="l" indent="0" marL="0">
+              <a:lnSpc>
+                <a:spcPts val="1620"/>
+              </a:lnSpc>
+              <a:spcAft>
+                <a:spcPts val="300"/>
+              </a:spcAft>
+              <a:buNone/>
+            </a:pPr>
+            <a:r>
+              <a:rPr lang="en-US" sz="1200" b="1" dirty="0">
+                <a:solidFill>
+                  <a:srgbClr val="1C2833"/>
+                </a:solidFill>
+                <a:latin typeface="Arial" pitchFamily="34" charset="0"/>
+                <a:ea typeface="Arial" pitchFamily="34" charset="-122"/>
+                <a:cs typeface="Arial" pitchFamily="34" charset="-120"/>
+              </a:rPr>
+              <a:t>poorly absorbed</a:t>
+            </a:r>
+            <a:pPr algn="l" indent="0" marL="0">
+              <a:lnSpc>
+                <a:spcPts val="1620"/>
+              </a:lnSpc>
+              <a:spcAft>
+                <a:spcPts val="300"/>
+              </a:spcAft>
+              <a:buNone/>
+            </a:pPr>
+            <a:r>
+              <a:rPr lang="en-US" sz="1200" dirty="0">
+                <a:solidFill>
+                  <a:srgbClr val="1C2833"/>
+                </a:solidFill>
+                <a:latin typeface="Arial" pitchFamily="34" charset="0"/>
+                <a:ea typeface="Arial" pitchFamily="34" charset="-122"/>
+                <a:cs typeface="Arial" pitchFamily="34" charset="-120"/>
+              </a:rPr>
+              <a:t> by the human gut on its own. Most of what you eat passes through unabsorbed.</a:t>
+            </a:r>
+            <a:endParaRPr lang="en-US" sz="1200" dirty="0"/>
+          </a:p>
+          <a:p>
+            <a:pPr algn="l" marL="342900" indent="-342900">
+              <a:lnSpc>
+                <a:spcPts val="1620"/>
+              </a:lnSpc>
+              <a:spcAft>
+                <a:spcPts val="300"/>
+              </a:spcAft>
+              <a:buSzPct val="100000"/>
+              <a:buChar char="•"/>
+            </a:pPr>
+            <a:r>
+              <a:rPr lang="en-US" sz="1200" b="1" dirty="0">
+                <a:solidFill>
+                  <a:srgbClr val="1C2833"/>
+                </a:solidFill>
+                <a:latin typeface="Arial" pitchFamily="34" charset="0"/>
+                <a:ea typeface="Arial" pitchFamily="34" charset="-122"/>
+                <a:cs typeface="Arial" pitchFamily="34" charset="-120"/>
+              </a:rPr>
+              <a:t>Piperine (black pepper) increases absorption</a:t>
+            </a:r>
+            <a:pPr algn="l" indent="0" marL="0">
+              <a:lnSpc>
+                <a:spcPts val="1620"/>
+              </a:lnSpc>
+              <a:spcAft>
+                <a:spcPts val="300"/>
+              </a:spcAft>
+              <a:buNone/>
+            </a:pPr>
+            <a:r>
+              <a:rPr lang="en-US" sz="1200" dirty="0">
+                <a:solidFill>
+                  <a:srgbClr val="1C2833"/>
+                </a:solidFill>
+                <a:latin typeface="Arial" pitchFamily="34" charset="0"/>
+                <a:ea typeface="Arial" pitchFamily="34" charset="-122"/>
+                <a:cs typeface="Arial" pitchFamily="34" charset="-120"/>
+              </a:rPr>
+              <a:t> by roughly 20×, by inhibiting a liver enzyme that breaks down curcumin. This is why traditional preparations often combine turmeric with pepper. The tradition figured out the absorption problem long before the molecule was named.</a:t>
+            </a:r>
+            <a:endParaRPr lang="en-US" sz="1200" dirty="0"/>
+          </a:p>
+        </p:txBody>
+      </p:sp>
+      <p:sp>
+        <p:nvSpPr>
+          <p:cNvPr id="6" name="Text 4"/>
           <p:cNvSpPr/>
           <p:nvPr/>
         </p:nvSpPr>
@@ -2826,7 +3414,7 @@
                 <a:ea typeface="Georgia" pitchFamily="34" charset="-122"/>
                 <a:cs typeface="Georgia" pitchFamily="34" charset="-120"/>
               </a:rPr>
-              <a:t>Teacher notes</a:t>
+              <a:t>Core (20 min) (cont.)</a:t>
             </a:r>
             <a:endParaRPr lang="en-US" sz="1800" dirty="0"/>
           </a:p>
@@ -2841,7 +3429,7 @@
         <p:spPr>
           <a:xfrm>
             <a:off x="634901" y="883593"/>
-            <a:ext cx="8102798" cy="487561"/>
+            <a:ext cx="8102798" cy="281880"/>
           </a:xfrm>
           <a:prstGeom prst="rect">
             <a:avLst/>
@@ -2872,27 +3460,7 @@
                 <a:ea typeface="Arial" pitchFamily="34" charset="-122"/>
                 <a:cs typeface="Arial" pitchFamily="34" charset="-120"/>
               </a:rPr>
-              <a:t>Stain risk in the classroom is real.</a:t>
-            </a:r>
-            <a:pPr algn="l" indent="0" marL="0">
-              <a:lnSpc>
-                <a:spcPts val="1620"/>
-              </a:lnSpc>
-              <a:spcAft>
-                <a:spcPts val="300"/>
-              </a:spcAft>
-              <a:buNone/>
-            </a:pPr>
-            <a:r>
-              <a:rPr lang="en-US" sz="1200" dirty="0">
-                <a:solidFill>
-                  <a:srgbClr val="1C2833"/>
-                </a:solidFill>
-                <a:latin typeface="Arial" pitchFamily="34" charset="0"/>
-                <a:ea typeface="Arial" pitchFamily="34" charset="-122"/>
-                <a:cs typeface="Arial" pitchFamily="34" charset="-120"/>
-              </a:rPr>
-              <a:t> Cover desks. Have warm water + soap nearby. A fresh curcumin stain on cloth washes out before it sets; once it sets and gets sun, it sticks.</a:t>
+              <a:t>What's claimed vs what's solid.</a:t>
             </a:r>
             <a:endParaRPr lang="en-US" sz="1200" dirty="0"/>
           </a:p>
@@ -2906,8 +3474,8 @@
         </p:nvSpPr>
         <p:spPr>
           <a:xfrm>
-            <a:off x="406301" y="1460004"/>
-            <a:ext cx="8498026" cy="639812"/>
+            <a:off x="634901" y="1266974"/>
+            <a:ext cx="8102798" cy="1592163"/>
           </a:xfrm>
           <a:prstGeom prst="rect">
             <a:avLst/>
@@ -2919,40 +3487,15 @@
           <a:bodyPr wrap="square" lIns="0" tIns="0" rIns="0" bIns="0" rtlCol="0" anchor="t"/>
           <a:lstStyle/>
           <a:p>
-            <a:pPr algn="l" indent="0" marL="0">
-              <a:lnSpc>
-                <a:spcPts val="1680"/>
-              </a:lnSpc>
-              <a:spcBef>
-                <a:spcPts val="300"/>
-              </a:spcBef>
-              <a:spcAft>
-                <a:spcPts val="300"/>
-              </a:spcAft>
-              <a:buNone/>
-            </a:pPr>
-            <a:r>
-              <a:rPr lang="en-US" sz="1200" dirty="0">
-                <a:solidFill>
-                  <a:srgbClr val="1C2833"/>
-                </a:solidFill>
-                <a:latin typeface="Arial" pitchFamily="34" charset="0"/>
-                <a:ea typeface="Arial" pitchFamily="34" charset="-122"/>
-                <a:cs typeface="Arial" pitchFamily="34" charset="-120"/>
-              </a:rPr>
-              <a:t>– The bioavailability + black pepper story is the </a:t>
-            </a:r>
-            <a:pPr algn="l" indent="0" marL="0">
-              <a:lnSpc>
-                <a:spcPts val="1680"/>
-              </a:lnSpc>
-              <a:spcBef>
-                <a:spcPts val="300"/>
-              </a:spcBef>
-              <a:spcAft>
-                <a:spcPts val="300"/>
-              </a:spcAft>
-              <a:buNone/>
+            <a:pPr algn="l" marL="342900" indent="-342900">
+              <a:lnSpc>
+                <a:spcPts val="1620"/>
+              </a:lnSpc>
+              <a:spcAft>
+                <a:spcPts val="300"/>
+              </a:spcAft>
+              <a:buSzPct val="100000"/>
+              <a:buChar char="•"/>
             </a:pPr>
             <a:r>
               <a:rPr lang="en-US" sz="1200" b="1" dirty="0">
@@ -2963,30 +3506,195 @@
                 <a:ea typeface="Arial" pitchFamily="34" charset="-122"/>
                 <a:cs typeface="Arial" pitchFamily="34" charset="-120"/>
               </a:rPr>
-              <a:t>single biggest "aha"</a:t>
-            </a:r>
-            <a:pPr algn="l" indent="0" marL="0">
-              <a:lnSpc>
-                <a:spcPts val="1680"/>
-              </a:lnSpc>
-              <a:spcBef>
-                <a:spcPts val="300"/>
-              </a:spcBef>
-              <a:spcAft>
-                <a:spcPts val="300"/>
-              </a:spcAft>
-              <a:buNone/>
-            </a:pPr>
-            <a:r>
-              <a:rPr lang="en-US" sz="1200" dirty="0">
-                <a:solidFill>
-                  <a:srgbClr val="1C2833"/>
-                </a:solidFill>
-                <a:latin typeface="Arial" pitchFamily="34" charset="0"/>
-                <a:ea typeface="Arial" pitchFamily="34" charset="-122"/>
-                <a:cs typeface="Arial" pitchFamily="34" charset="-120"/>
-              </a:rPr>
-              <a:t> of this module for many students. Their families may have known to use the two together without knowing why. Let students go home and ask. – Don't let the "cancer cure" myth go unaddressed. It's everywhere on social media. Be specific: "lab activity ≠ clinical effect ≠ cure."</a:t>
+              <a:t>Well-supported:</a:t>
+            </a:r>
+            <a:pPr algn="l" indent="0" marL="0">
+              <a:lnSpc>
+                <a:spcPts val="1620"/>
+              </a:lnSpc>
+              <a:spcAft>
+                <a:spcPts val="300"/>
+              </a:spcAft>
+              <a:buNone/>
+            </a:pPr>
+            <a:r>
+              <a:rPr lang="en-US" sz="1200" dirty="0">
+                <a:solidFill>
+                  <a:srgbClr val="1C2833"/>
+                </a:solidFill>
+                <a:latin typeface="Arial" pitchFamily="34" charset="0"/>
+                <a:ea typeface="Arial" pitchFamily="34" charset="-122"/>
+                <a:cs typeface="Arial" pitchFamily="34" charset="-120"/>
+              </a:rPr>
+              <a:t> Turmeric is a safe culinary spice. It contributes to the colour and a mild flavour. Curcumin has anti-inflammatory activity in lab studies.</a:t>
+            </a:r>
+            <a:endParaRPr lang="en-US" sz="1200" dirty="0"/>
+          </a:p>
+          <a:p>
+            <a:pPr algn="l" marL="342900" indent="-342900">
+              <a:lnSpc>
+                <a:spcPts val="1620"/>
+              </a:lnSpc>
+              <a:spcAft>
+                <a:spcPts val="300"/>
+              </a:spcAft>
+              <a:buSzPct val="100000"/>
+              <a:buChar char="•"/>
+            </a:pPr>
+            <a:r>
+              <a:rPr lang="en-US" sz="1200" b="1" dirty="0">
+                <a:solidFill>
+                  <a:srgbClr val="1C2833"/>
+                </a:solidFill>
+                <a:latin typeface="Arial" pitchFamily="34" charset="0"/>
+                <a:ea typeface="Arial" pitchFamily="34" charset="-122"/>
+                <a:cs typeface="Arial" pitchFamily="34" charset="-120"/>
+              </a:rPr>
+              <a:t>Mixed evidence:</a:t>
+            </a:r>
+            <a:pPr algn="l" indent="0" marL="0">
+              <a:lnSpc>
+                <a:spcPts val="1620"/>
+              </a:lnSpc>
+              <a:spcAft>
+                <a:spcPts val="300"/>
+              </a:spcAft>
+              <a:buNone/>
+            </a:pPr>
+            <a:r>
+              <a:rPr lang="en-US" sz="1200" dirty="0">
+                <a:solidFill>
+                  <a:srgbClr val="1C2833"/>
+                </a:solidFill>
+                <a:latin typeface="Arial" pitchFamily="34" charset="0"/>
+                <a:ea typeface="Arial" pitchFamily="34" charset="-122"/>
+                <a:cs typeface="Arial" pitchFamily="34" charset="-120"/>
+              </a:rPr>
+              <a:t> Curcumin supplements for arthritis pain — </a:t>
+            </a:r>
+            <a:pPr algn="l" indent="0" marL="0">
+              <a:lnSpc>
+                <a:spcPts val="1620"/>
+              </a:lnSpc>
+              <a:spcAft>
+                <a:spcPts val="300"/>
+              </a:spcAft>
+              <a:buNone/>
+            </a:pPr>
+            <a:r>
+              <a:rPr lang="en-US" sz="1200" i="1" dirty="0">
+                <a:solidFill>
+                  <a:srgbClr val="1C2833"/>
+                </a:solidFill>
+                <a:latin typeface="Arial" pitchFamily="34" charset="0"/>
+                <a:ea typeface="Arial" pitchFamily="34" charset="-122"/>
+                <a:cs typeface="Arial" pitchFamily="34" charset="-120"/>
+              </a:rPr>
+              <a:t>some</a:t>
+            </a:r>
+            <a:pPr algn="l" indent="0" marL="0">
+              <a:lnSpc>
+                <a:spcPts val="1620"/>
+              </a:lnSpc>
+              <a:spcAft>
+                <a:spcPts val="300"/>
+              </a:spcAft>
+              <a:buNone/>
+            </a:pPr>
+            <a:r>
+              <a:rPr lang="en-US" sz="1200" dirty="0">
+                <a:solidFill>
+                  <a:srgbClr val="1C2833"/>
+                </a:solidFill>
+                <a:latin typeface="Arial" pitchFamily="34" charset="0"/>
+                <a:ea typeface="Arial" pitchFamily="34" charset="-122"/>
+                <a:cs typeface="Arial" pitchFamily="34" charset="-120"/>
+              </a:rPr>
+              <a:t> clinical trials show modest benefit; others show no effect beyond placebo.</a:t>
+            </a:r>
+            <a:endParaRPr lang="en-US" sz="1200" dirty="0"/>
+          </a:p>
+          <a:p>
+            <a:pPr algn="l" marL="342900" indent="-342900">
+              <a:lnSpc>
+                <a:spcPts val="1620"/>
+              </a:lnSpc>
+              <a:spcAft>
+                <a:spcPts val="300"/>
+              </a:spcAft>
+              <a:buSzPct val="100000"/>
+              <a:buChar char="•"/>
+            </a:pPr>
+            <a:r>
+              <a:rPr lang="en-US" sz="1200" b="1" dirty="0">
+                <a:solidFill>
+                  <a:srgbClr val="1C2833"/>
+                </a:solidFill>
+                <a:latin typeface="Arial" pitchFamily="34" charset="0"/>
+                <a:ea typeface="Arial" pitchFamily="34" charset="-122"/>
+                <a:cs typeface="Arial" pitchFamily="34" charset="-120"/>
+              </a:rPr>
+              <a:t>Overclaimed:</a:t>
+            </a:r>
+            <a:pPr algn="l" indent="0" marL="0">
+              <a:lnSpc>
+                <a:spcPts val="1620"/>
+              </a:lnSpc>
+              <a:spcAft>
+                <a:spcPts val="300"/>
+              </a:spcAft>
+              <a:buNone/>
+            </a:pPr>
+            <a:r>
+              <a:rPr lang="en-US" sz="1200" dirty="0">
+                <a:solidFill>
+                  <a:srgbClr val="1C2833"/>
+                </a:solidFill>
+                <a:latin typeface="Arial" pitchFamily="34" charset="0"/>
+                <a:ea typeface="Arial" pitchFamily="34" charset="-122"/>
+                <a:cs typeface="Arial" pitchFamily="34" charset="-120"/>
+              </a:rPr>
+              <a:t> "Turmeric cures cancer." This is a marketing claim, not a clinical finding. Curcumin is being studied for various cancer-related effects in the lab, but jumping from "lab activity" to "cure" is exactly the leap we are training students </a:t>
+            </a:r>
+            <a:pPr algn="l" indent="0" marL="0">
+              <a:lnSpc>
+                <a:spcPts val="1620"/>
+              </a:lnSpc>
+              <a:spcAft>
+                <a:spcPts val="300"/>
+              </a:spcAft>
+              <a:buNone/>
+            </a:pPr>
+            <a:r>
+              <a:rPr lang="en-US" sz="1200" i="1" dirty="0">
+                <a:solidFill>
+                  <a:srgbClr val="1C2833"/>
+                </a:solidFill>
+                <a:latin typeface="Arial" pitchFamily="34" charset="0"/>
+                <a:ea typeface="Arial" pitchFamily="34" charset="-122"/>
+                <a:cs typeface="Arial" pitchFamily="34" charset="-120"/>
+              </a:rPr>
+              <a:t>not</a:t>
+            </a:r>
+            <a:pPr algn="l" indent="0" marL="0">
+              <a:lnSpc>
+                <a:spcPts val="1620"/>
+              </a:lnSpc>
+              <a:spcAft>
+                <a:spcPts val="300"/>
+              </a:spcAft>
+              <a:buNone/>
+            </a:pPr>
+            <a:r>
+              <a:rPr lang="en-US" sz="1200" dirty="0">
+                <a:solidFill>
+                  <a:srgbClr val="1C2833"/>
+                </a:solidFill>
+                <a:latin typeface="Arial" pitchFamily="34" charset="0"/>
+                <a:ea typeface="Arial" pitchFamily="34" charset="-122"/>
+                <a:cs typeface="Arial" pitchFamily="34" charset="-120"/>
+              </a:rPr>
+              <a:t> to make.</a:t>
             </a:r>
             <a:endParaRPr lang="en-US" sz="1200" dirty="0"/>
           </a:p>
@@ -3144,7 +3852,7 @@
                 <a:ea typeface="Georgia" pitchFamily="34" charset="-122"/>
                 <a:cs typeface="Georgia" pitchFamily="34" charset="-120"/>
               </a:rPr>
-              <a:t>Citation(s) used in this lesson</a:t>
+              <a:t>Core (20 min) (cont.)</a:t>
             </a:r>
             <a:endParaRPr lang="en-US" sz="1800" dirty="0"/>
           </a:p>
@@ -3158,8 +3866,8 @@
         </p:nvSpPr>
         <p:spPr>
           <a:xfrm>
-            <a:off x="406301" y="870942"/>
-            <a:ext cx="8498026" cy="1066354"/>
+            <a:off x="634901" y="883593"/>
+            <a:ext cx="8102798" cy="693241"/>
           </a:xfrm>
           <a:prstGeom prst="rect">
             <a:avLst/>
@@ -3171,6 +3879,272 @@
           <a:bodyPr wrap="square" lIns="0" tIns="0" rIns="0" bIns="0" rtlCol="0" anchor="t"/>
           <a:lstStyle/>
           <a:p>
+            <a:pPr algn="l" marL="342900" indent="-342900">
+              <a:lnSpc>
+                <a:spcPts val="1620"/>
+              </a:lnSpc>
+              <a:spcAft>
+                <a:spcPts val="300"/>
+              </a:spcAft>
+              <a:buSzPct val="100000"/>
+              <a:buChar char="•"/>
+            </a:pPr>
+            <a:r>
+              <a:rPr lang="en-US" sz="1200" b="1" dirty="0">
+                <a:solidFill>
+                  <a:srgbClr val="1C2833"/>
+                </a:solidFill>
+                <a:latin typeface="Arial" pitchFamily="34" charset="0"/>
+                <a:ea typeface="Arial" pitchFamily="34" charset="-122"/>
+                <a:cs typeface="Arial" pitchFamily="34" charset="-120"/>
+              </a:rPr>
+              <a:t>Traditional use in Ayurveda.</a:t>
+            </a:r>
+            <a:pPr algn="l" indent="0" marL="0">
+              <a:lnSpc>
+                <a:spcPts val="1620"/>
+              </a:lnSpc>
+              <a:spcAft>
+                <a:spcPts val="300"/>
+              </a:spcAft>
+              <a:buNone/>
+            </a:pPr>
+            <a:r>
+              <a:rPr lang="en-US" sz="1200" dirty="0">
+                <a:solidFill>
+                  <a:srgbClr val="1C2833"/>
+                </a:solidFill>
+                <a:latin typeface="Arial" pitchFamily="34" charset="0"/>
+                <a:ea typeface="Arial" pitchFamily="34" charset="-122"/>
+                <a:cs typeface="Arial" pitchFamily="34" charset="-120"/>
+              </a:rPr>
+              <a:t> </a:t>
+            </a:r>
+            <a:pPr algn="l" indent="0" marL="0">
+              <a:lnSpc>
+                <a:spcPts val="1620"/>
+              </a:lnSpc>
+              <a:spcAft>
+                <a:spcPts val="300"/>
+              </a:spcAft>
+              <a:buNone/>
+            </a:pPr>
+            <a:r>
+              <a:rPr lang="en-US" sz="1200" i="1" dirty="0">
+                <a:solidFill>
+                  <a:srgbClr val="1C2833"/>
+                </a:solidFill>
+                <a:latin typeface="Arial" pitchFamily="34" charset="0"/>
+                <a:ea typeface="Arial" pitchFamily="34" charset="-122"/>
+                <a:cs typeface="Arial" pitchFamily="34" charset="-120"/>
+              </a:rPr>
+              <a:t>Haridrā</a:t>
+            </a:r>
+            <a:pPr algn="l" indent="0" marL="0">
+              <a:lnSpc>
+                <a:spcPts val="1620"/>
+              </a:lnSpc>
+              <a:spcAft>
+                <a:spcPts val="300"/>
+              </a:spcAft>
+              <a:buNone/>
+            </a:pPr>
+            <a:r>
+              <a:rPr lang="en-US" sz="1200" dirty="0">
+                <a:solidFill>
+                  <a:srgbClr val="1C2833"/>
+                </a:solidFill>
+                <a:latin typeface="Arial" pitchFamily="34" charset="0"/>
+                <a:ea typeface="Arial" pitchFamily="34" charset="-122"/>
+                <a:cs typeface="Arial" pitchFamily="34" charset="-120"/>
+              </a:rPr>
+              <a:t> is </a:t>
+            </a:r>
+            <a:pPr algn="l" indent="0" marL="0">
+              <a:lnSpc>
+                <a:spcPts val="1620"/>
+              </a:lnSpc>
+              <a:spcAft>
+                <a:spcPts val="300"/>
+              </a:spcAft>
+              <a:buNone/>
+            </a:pPr>
+            <a:r>
+              <a:rPr lang="en-US" sz="1200" i="1" dirty="0">
+                <a:solidFill>
+                  <a:srgbClr val="1C2833"/>
+                </a:solidFill>
+                <a:latin typeface="Arial" pitchFamily="34" charset="0"/>
+                <a:ea typeface="Arial" pitchFamily="34" charset="-122"/>
+                <a:cs typeface="Arial" pitchFamily="34" charset="-120"/>
+              </a:rPr>
+              <a:t>kaṭu-tikta</a:t>
+            </a:r>
+            <a:pPr algn="l" indent="0" marL="0">
+              <a:lnSpc>
+                <a:spcPts val="1620"/>
+              </a:lnSpc>
+              <a:spcAft>
+                <a:spcPts val="300"/>
+              </a:spcAft>
+              <a:buNone/>
+            </a:pPr>
+            <a:r>
+              <a:rPr lang="en-US" sz="1200" dirty="0">
+                <a:solidFill>
+                  <a:srgbClr val="1C2833"/>
+                </a:solidFill>
+                <a:latin typeface="Arial" pitchFamily="34" charset="0"/>
+                <a:ea typeface="Arial" pitchFamily="34" charset="-122"/>
+                <a:cs typeface="Arial" pitchFamily="34" charset="-120"/>
+              </a:rPr>
+              <a:t> (pungent-bitter) in taste, </a:t>
+            </a:r>
+            <a:pPr algn="l" indent="0" marL="0">
+              <a:lnSpc>
+                <a:spcPts val="1620"/>
+              </a:lnSpc>
+              <a:spcAft>
+                <a:spcPts val="300"/>
+              </a:spcAft>
+              <a:buNone/>
+            </a:pPr>
+            <a:r>
+              <a:rPr lang="en-US" sz="1200" i="1" dirty="0">
+                <a:solidFill>
+                  <a:srgbClr val="1C2833"/>
+                </a:solidFill>
+                <a:latin typeface="Arial" pitchFamily="34" charset="0"/>
+                <a:ea typeface="Arial" pitchFamily="34" charset="-122"/>
+                <a:cs typeface="Arial" pitchFamily="34" charset="-120"/>
+              </a:rPr>
+              <a:t>uṣṇa</a:t>
+            </a:r>
+            <a:pPr algn="l" indent="0" marL="0">
+              <a:lnSpc>
+                <a:spcPts val="1620"/>
+              </a:lnSpc>
+              <a:spcAft>
+                <a:spcPts val="300"/>
+              </a:spcAft>
+              <a:buNone/>
+            </a:pPr>
+            <a:r>
+              <a:rPr lang="en-US" sz="1200" dirty="0">
+                <a:solidFill>
+                  <a:srgbClr val="1C2833"/>
+                </a:solidFill>
+                <a:latin typeface="Arial" pitchFamily="34" charset="0"/>
+                <a:ea typeface="Arial" pitchFamily="34" charset="-122"/>
+                <a:cs typeface="Arial" pitchFamily="34" charset="-120"/>
+              </a:rPr>
+              <a:t> (heating) in </a:t>
+            </a:r>
+            <a:pPr algn="l" indent="0" marL="0">
+              <a:lnSpc>
+                <a:spcPts val="1620"/>
+              </a:lnSpc>
+              <a:spcAft>
+                <a:spcPts val="300"/>
+              </a:spcAft>
+              <a:buNone/>
+            </a:pPr>
+            <a:r>
+              <a:rPr lang="en-US" sz="1200" i="1" dirty="0">
+                <a:solidFill>
+                  <a:srgbClr val="1C2833"/>
+                </a:solidFill>
+                <a:latin typeface="Arial" pitchFamily="34" charset="0"/>
+                <a:ea typeface="Arial" pitchFamily="34" charset="-122"/>
+                <a:cs typeface="Arial" pitchFamily="34" charset="-120"/>
+              </a:rPr>
+              <a:t>vīrya</a:t>
+            </a:r>
+            <a:pPr algn="l" indent="0" marL="0">
+              <a:lnSpc>
+                <a:spcPts val="1620"/>
+              </a:lnSpc>
+              <a:spcAft>
+                <a:spcPts val="300"/>
+              </a:spcAft>
+              <a:buNone/>
+            </a:pPr>
+            <a:r>
+              <a:rPr lang="en-US" sz="1200" dirty="0">
+                <a:solidFill>
+                  <a:srgbClr val="1C2833"/>
+                </a:solidFill>
+                <a:latin typeface="Arial" pitchFamily="34" charset="0"/>
+                <a:ea typeface="Arial" pitchFamily="34" charset="-122"/>
+                <a:cs typeface="Arial" pitchFamily="34" charset="-120"/>
+              </a:rPr>
+              <a:t>. Used in formulations for skin conditions (external paste), wound healing (external paste), and digestive support (small culinary amounts). The bright pigment is also used at weddings (</a:t>
+            </a:r>
+            <a:pPr algn="l" indent="0" marL="0">
+              <a:lnSpc>
+                <a:spcPts val="1620"/>
+              </a:lnSpc>
+              <a:spcAft>
+                <a:spcPts val="300"/>
+              </a:spcAft>
+              <a:buNone/>
+            </a:pPr>
+            <a:r>
+              <a:rPr lang="en-US" sz="1200" i="1" dirty="0">
+                <a:solidFill>
+                  <a:srgbClr val="1C2833"/>
+                </a:solidFill>
+                <a:latin typeface="Arial" pitchFamily="34" charset="0"/>
+                <a:ea typeface="Arial" pitchFamily="34" charset="-122"/>
+                <a:cs typeface="Arial" pitchFamily="34" charset="-120"/>
+              </a:rPr>
+              <a:t>haldi</a:t>
+            </a:r>
+            <a:pPr algn="l" indent="0" marL="0">
+              <a:lnSpc>
+                <a:spcPts val="1620"/>
+              </a:lnSpc>
+              <a:spcAft>
+                <a:spcPts val="300"/>
+              </a:spcAft>
+              <a:buNone/>
+            </a:pPr>
+            <a:r>
+              <a:rPr lang="en-US" sz="1200" dirty="0">
+                <a:solidFill>
+                  <a:srgbClr val="1C2833"/>
+                </a:solidFill>
+                <a:latin typeface="Arial" pitchFamily="34" charset="0"/>
+                <a:ea typeface="Arial" pitchFamily="34" charset="-122"/>
+                <a:cs typeface="Arial" pitchFamily="34" charset="-120"/>
+              </a:rPr>
+              <a:t> ceremony) — non-medicinal cultural use.</a:t>
+            </a:r>
+            <a:endParaRPr lang="en-US" sz="1200" dirty="0"/>
+          </a:p>
+        </p:txBody>
+      </p:sp>
+      <p:sp>
+        <p:nvSpPr>
+          <p:cNvPr id="5" name="Text 3"/>
+          <p:cNvSpPr/>
+          <p:nvPr/>
+        </p:nvSpPr>
+        <p:spPr>
+          <a:xfrm>
+            <a:off x="406301" y="4434929"/>
+            <a:ext cx="8498026" cy="213271"/>
+          </a:xfrm>
+          <a:prstGeom prst="rect">
+            <a:avLst/>
+          </a:prstGeom>
+          <a:noFill/>
+          <a:ln/>
+        </p:spPr>
+        <p:txBody>
+          <a:bodyPr wrap="square" lIns="0" tIns="0" rIns="0" bIns="0" rtlCol="0" anchor="t"/>
+          <a:lstStyle/>
+          <a:p>
             <a:pPr algn="l" indent="0" marL="0">
               <a:lnSpc>
                 <a:spcPts val="1680"/>
@@ -3192,8 +4166,143 @@
                 <a:ea typeface="Arial" pitchFamily="34" charset="-122"/>
                 <a:cs typeface="Arial" pitchFamily="34" charset="-120"/>
               </a:rPr>
-              <a:t>– Curcumin chemistry and bioavailability with piperine: well-established in nutrition and ethnopharmacology textbooks. Modern reviews exist in journals such as </a:t>
-            </a:r>
+              <a:t>Middle ·  · IKS Curriculum</a:t>
+            </a:r>
+            <a:endParaRPr lang="en-US" sz="1200" dirty="0"/>
+          </a:p>
+        </p:txBody>
+      </p:sp>
+    </p:spTree>
+  </p:cSld>
+  <p:clrMapOvr>
+    <a:masterClrMapping/>
+  </p:clrMapOvr>
+</p:sld>
+</file>
+
+<file path=ppt/slides/slide13.xml><?xml version="1.0" encoding="utf-8"?>
+<p:sld xmlns:a="http://schemas.openxmlformats.org/drawingml/2006/main" xmlns:r="http://schemas.openxmlformats.org/officeDocument/2006/relationships" xmlns:p="http://schemas.openxmlformats.org/presentationml/2006/main">
+  <p:cSld name="Slide 13">
+    <p:bg>
+      <p:bgPr>
+        <a:solidFill>
+          <a:srgbClr val="FFFFFF"/>
+        </a:solidFill>
+      </p:bgPr>
+    </p:bg>
+    <p:spTree>
+      <p:nvGrpSpPr>
+        <p:cNvPr id="1" name=""/>
+        <p:cNvGrpSpPr/>
+        <p:nvPr/>
+      </p:nvGrpSpPr>
+      <p:grpSpPr>
+        <a:xfrm>
+          <a:off x="0" y="0"/>
+          <a:ext cx="0" cy="0"/>
+          <a:chOff x="0" y="0"/>
+          <a:chExt cx="0" cy="0"/>
+        </a:xfrm>
+      </p:grpSpPr>
+      <p:sp>
+        <p:nvSpPr>
+          <p:cNvPr id="2" name="Text 0"/>
+          <p:cNvSpPr/>
+          <p:nvPr/>
+        </p:nvSpPr>
+        <p:spPr>
+          <a:xfrm>
+            <a:off x="0" y="0"/>
+            <a:ext cx="9144000" cy="101501"/>
+          </a:xfrm>
+          <a:prstGeom prst="rect">
+            <a:avLst/>
+          </a:prstGeom>
+          <a:solidFill>
+            <a:srgbClr val="277884"/>
+          </a:solidFill>
+          <a:ln/>
+        </p:spPr>
+        <p:txBody>
+          <a:bodyPr wrap="square" rtlCol="0" anchor="ctr"/>
+          <a:lstStyle/>
+          <a:p>
+            <a:pPr indent="0" marL="0">
+              <a:buNone/>
+            </a:pPr>
+            <a:endParaRPr lang="en-US" dirty="0"/>
+          </a:p>
+        </p:txBody>
+      </p:sp>
+      <p:sp>
+        <p:nvSpPr>
+          <p:cNvPr id="3" name="Text 1"/>
+          <p:cNvSpPr/>
+          <p:nvPr/>
+        </p:nvSpPr>
+        <p:spPr>
+          <a:xfrm>
+            <a:off x="406301" y="457051"/>
+            <a:ext cx="8498026" cy="548580"/>
+          </a:xfrm>
+          <a:prstGeom prst="rect">
+            <a:avLst/>
+          </a:prstGeom>
+          <a:noFill/>
+          <a:ln/>
+        </p:spPr>
+        <p:txBody>
+          <a:bodyPr wrap="square" lIns="0" tIns="0" rIns="0" bIns="0" rtlCol="0" anchor="t"/>
+          <a:lstStyle/>
+          <a:p>
+            <a:pPr algn="l" indent="0" marL="0">
+              <a:lnSpc>
+                <a:spcPts val="2160"/>
+              </a:lnSpc>
+              <a:spcBef>
+                <a:spcPts val="600"/>
+              </a:spcBef>
+              <a:spcAft>
+                <a:spcPts val="800"/>
+              </a:spcAft>
+              <a:buNone/>
+            </a:pPr>
+            <a:r>
+              <a:rPr lang="en-US" sz="1800" b="1" dirty="0">
+                <a:solidFill>
+                  <a:srgbClr val="FE4447"/>
+                </a:solidFill>
+                <a:latin typeface="Georgia" pitchFamily="34" charset="0"/>
+                <a:ea typeface="Georgia" pitchFamily="34" charset="-122"/>
+                <a:cs typeface="Georgia" pitchFamily="34" charset="-120"/>
+              </a:rPr>
+              <a:t>Activity (15 min) — Golden-milk demonstration (or recipe-card if no cooking allowed)</a:t>
+            </a:r>
+            <a:endParaRPr lang="en-US" sz="1800" dirty="0"/>
+          </a:p>
+        </p:txBody>
+      </p:sp>
+      <p:sp>
+        <p:nvSpPr>
+          <p:cNvPr id="4" name="Text 2"/>
+          <p:cNvSpPr/>
+          <p:nvPr/>
+        </p:nvSpPr>
+        <p:spPr>
+          <a:xfrm>
+            <a:off x="406301" y="1145232"/>
+            <a:ext cx="8498026" cy="213271"/>
+          </a:xfrm>
+          <a:prstGeom prst="rect">
+            <a:avLst/>
+          </a:prstGeom>
+          <a:noFill/>
+          <a:ln/>
+        </p:spPr>
+        <p:txBody>
+          <a:bodyPr wrap="square" lIns="0" tIns="0" rIns="0" bIns="0" rtlCol="0" anchor="t"/>
+          <a:lstStyle/>
+          <a:p>
             <a:pPr algn="l" indent="0" marL="0">
               <a:lnSpc>
                 <a:spcPts val="1680"/>
@@ -3207,6 +4316,452 @@
               <a:buNone/>
             </a:pPr>
             <a:r>
+              <a:rPr lang="en-US" sz="1200" b="1" dirty="0">
+                <a:solidFill>
+                  <a:srgbClr val="1C2833"/>
+                </a:solidFill>
+                <a:latin typeface="Arial" pitchFamily="34" charset="0"/>
+                <a:ea typeface="Arial" pitchFamily="34" charset="-122"/>
+                <a:cs typeface="Arial" pitchFamily="34" charset="-120"/>
+              </a:rPr>
+              <a:t>If cooking is permitted:</a:t>
+            </a:r>
+            <a:endParaRPr lang="en-US" sz="1200" dirty="0"/>
+          </a:p>
+        </p:txBody>
+      </p:sp>
+      <p:sp>
+        <p:nvSpPr>
+          <p:cNvPr id="5" name="Text 3"/>
+          <p:cNvSpPr/>
+          <p:nvPr/>
+        </p:nvSpPr>
+        <p:spPr>
+          <a:xfrm>
+            <a:off x="634901" y="1447354"/>
+            <a:ext cx="8102798" cy="937022"/>
+          </a:xfrm>
+          <a:prstGeom prst="rect">
+            <a:avLst/>
+          </a:prstGeom>
+          <a:noFill/>
+          <a:ln/>
+        </p:spPr>
+        <p:txBody>
+          <a:bodyPr wrap="square" lIns="0" tIns="0" rIns="0" bIns="0" rtlCol="0" anchor="t"/>
+          <a:lstStyle/>
+          <a:p>
+            <a:pPr algn="l" marL="342900" indent="-342900">
+              <a:lnSpc>
+                <a:spcPts val="1620"/>
+              </a:lnSpc>
+              <a:spcAft>
+                <a:spcPts val="300"/>
+              </a:spcAft>
+              <a:buSzPct val="100000"/>
+              <a:buChar char="•"/>
+            </a:pPr>
+            <a:r>
+              <a:rPr lang="en-US" sz="1200" dirty="0">
+                <a:solidFill>
+                  <a:srgbClr val="1C2833"/>
+                </a:solidFill>
+                <a:latin typeface="Arial" pitchFamily="34" charset="0"/>
+                <a:ea typeface="Arial" pitchFamily="34" charset="-122"/>
+                <a:cs typeface="Arial" pitchFamily="34" charset="-120"/>
+              </a:rPr>
+              <a:t>Teacher prepares a single demo cup: 200 ml warm milk + ¼ tsp turmeric powder + tiny pinch black pepper + jaggery to taste. Warm gently (do </a:t>
+            </a:r>
+            <a:pPr algn="l" indent="0" marL="0">
+              <a:lnSpc>
+                <a:spcPts val="1620"/>
+              </a:lnSpc>
+              <a:spcAft>
+                <a:spcPts val="300"/>
+              </a:spcAft>
+              <a:buNone/>
+            </a:pPr>
+            <a:r>
+              <a:rPr lang="en-US" sz="1200" b="1" dirty="0">
+                <a:solidFill>
+                  <a:srgbClr val="1C2833"/>
+                </a:solidFill>
+                <a:latin typeface="Arial" pitchFamily="34" charset="0"/>
+                <a:ea typeface="Arial" pitchFamily="34" charset="-122"/>
+                <a:cs typeface="Arial" pitchFamily="34" charset="-120"/>
+              </a:rPr>
+              <a:t>not</a:t>
+            </a:r>
+            <a:pPr algn="l" indent="0" marL="0">
+              <a:lnSpc>
+                <a:spcPts val="1620"/>
+              </a:lnSpc>
+              <a:spcAft>
+                <a:spcPts val="300"/>
+              </a:spcAft>
+              <a:buNone/>
+            </a:pPr>
+            <a:r>
+              <a:rPr lang="en-US" sz="1200" dirty="0">
+                <a:solidFill>
+                  <a:srgbClr val="1C2833"/>
+                </a:solidFill>
+                <a:latin typeface="Arial" pitchFamily="34" charset="0"/>
+                <a:ea typeface="Arial" pitchFamily="34" charset="-122"/>
+                <a:cs typeface="Arial" pitchFamily="34" charset="-120"/>
+              </a:rPr>
+              <a:t> boil).</a:t>
+            </a:r>
+            <a:endParaRPr lang="en-US" sz="1200" dirty="0"/>
+          </a:p>
+          <a:p>
+            <a:pPr algn="l" marL="342900" indent="-342900">
+              <a:lnSpc>
+                <a:spcPts val="1620"/>
+              </a:lnSpc>
+              <a:spcAft>
+                <a:spcPts val="300"/>
+              </a:spcAft>
+              <a:buSzPct val="100000"/>
+              <a:buChar char="•"/>
+            </a:pPr>
+            <a:r>
+              <a:rPr lang="en-US" sz="1200" dirty="0">
+                <a:solidFill>
+                  <a:srgbClr val="1C2833"/>
+                </a:solidFill>
+                <a:latin typeface="Arial" pitchFamily="34" charset="0"/>
+                <a:ea typeface="Arial" pitchFamily="34" charset="-122"/>
+                <a:cs typeface="Arial" pitchFamily="34" charset="-120"/>
+              </a:rPr>
+              <a:t>Don't drink in class. </a:t>
+            </a:r>
+            <a:pPr algn="l" indent="0" marL="0">
+              <a:lnSpc>
+                <a:spcPts val="1620"/>
+              </a:lnSpc>
+              <a:spcAft>
+                <a:spcPts val="300"/>
+              </a:spcAft>
+              <a:buNone/>
+            </a:pPr>
+            <a:r>
+              <a:rPr lang="en-US" sz="1200" b="1" dirty="0">
+                <a:solidFill>
+                  <a:srgbClr val="1C2833"/>
+                </a:solidFill>
+                <a:latin typeface="Arial" pitchFamily="34" charset="0"/>
+                <a:ea typeface="Arial" pitchFamily="34" charset="-122"/>
+                <a:cs typeface="Arial" pitchFamily="34" charset="-120"/>
+              </a:rPr>
+              <a:t>The point is the recipe, not the consumption.</a:t>
+            </a:r>
+            <a:pPr algn="l" indent="0" marL="0">
+              <a:lnSpc>
+                <a:spcPts val="1620"/>
+              </a:lnSpc>
+              <a:spcAft>
+                <a:spcPts val="300"/>
+              </a:spcAft>
+              <a:buNone/>
+            </a:pPr>
+            <a:r>
+              <a:rPr lang="en-US" sz="1200" dirty="0">
+                <a:solidFill>
+                  <a:srgbClr val="1C2833"/>
+                </a:solidFill>
+                <a:latin typeface="Arial" pitchFamily="34" charset="0"/>
+                <a:ea typeface="Arial" pitchFamily="34" charset="-122"/>
+                <a:cs typeface="Arial" pitchFamily="34" charset="-120"/>
+              </a:rPr>
+              <a:t> Or, prepare a cooled small tasting cup and offer to those without dairy/curcumin/dietary concerns.</a:t>
+            </a:r>
+            <a:endParaRPr lang="en-US" sz="1200" dirty="0"/>
+          </a:p>
+        </p:txBody>
+      </p:sp>
+      <p:sp>
+        <p:nvSpPr>
+          <p:cNvPr id="6" name="Text 4"/>
+          <p:cNvSpPr/>
+          <p:nvPr/>
+        </p:nvSpPr>
+        <p:spPr>
+          <a:xfrm>
+            <a:off x="406301" y="4434929"/>
+            <a:ext cx="8498026" cy="213271"/>
+          </a:xfrm>
+          <a:prstGeom prst="rect">
+            <a:avLst/>
+          </a:prstGeom>
+          <a:noFill/>
+          <a:ln/>
+        </p:spPr>
+        <p:txBody>
+          <a:bodyPr wrap="square" lIns="0" tIns="0" rIns="0" bIns="0" rtlCol="0" anchor="t"/>
+          <a:lstStyle/>
+          <a:p>
+            <a:pPr algn="l" indent="0" marL="0">
+              <a:lnSpc>
+                <a:spcPts val="1680"/>
+              </a:lnSpc>
+              <a:spcBef>
+                <a:spcPts val="300"/>
+              </a:spcBef>
+              <a:spcAft>
+                <a:spcPts val="300"/>
+              </a:spcAft>
+              <a:buNone/>
+            </a:pPr>
+            <a:r>
+              <a:rPr lang="en-US" sz="1200" dirty="0">
+                <a:solidFill>
+                  <a:srgbClr val="1C2833"/>
+                </a:solidFill>
+                <a:latin typeface="Arial" pitchFamily="34" charset="0"/>
+                <a:ea typeface="Arial" pitchFamily="34" charset="-122"/>
+                <a:cs typeface="Arial" pitchFamily="34" charset="-120"/>
+              </a:rPr>
+              <a:t>Middle ·  · IKS Curriculum</a:t>
+            </a:r>
+            <a:endParaRPr lang="en-US" sz="1200" dirty="0"/>
+          </a:p>
+        </p:txBody>
+      </p:sp>
+    </p:spTree>
+  </p:cSld>
+  <p:clrMapOvr>
+    <a:masterClrMapping/>
+  </p:clrMapOvr>
+</p:sld>
+</file>
+
+<file path=ppt/slides/slide14.xml><?xml version="1.0" encoding="utf-8"?>
+<p:sld xmlns:a="http://schemas.openxmlformats.org/drawingml/2006/main" xmlns:r="http://schemas.openxmlformats.org/officeDocument/2006/relationships" xmlns:p="http://schemas.openxmlformats.org/presentationml/2006/main">
+  <p:cSld name="Slide 14">
+    <p:bg>
+      <p:bgPr>
+        <a:solidFill>
+          <a:srgbClr val="FFFFFF"/>
+        </a:solidFill>
+      </p:bgPr>
+    </p:bg>
+    <p:spTree>
+      <p:nvGrpSpPr>
+        <p:cNvPr id="1" name=""/>
+        <p:cNvGrpSpPr/>
+        <p:nvPr/>
+      </p:nvGrpSpPr>
+      <p:grpSpPr>
+        <a:xfrm>
+          <a:off x="0" y="0"/>
+          <a:ext cx="0" cy="0"/>
+          <a:chOff x="0" y="0"/>
+          <a:chExt cx="0" cy="0"/>
+        </a:xfrm>
+      </p:grpSpPr>
+      <p:sp>
+        <p:nvSpPr>
+          <p:cNvPr id="2" name="Text 0"/>
+          <p:cNvSpPr/>
+          <p:nvPr/>
+        </p:nvSpPr>
+        <p:spPr>
+          <a:xfrm>
+            <a:off x="0" y="0"/>
+            <a:ext cx="9144000" cy="101501"/>
+          </a:xfrm>
+          <a:prstGeom prst="rect">
+            <a:avLst/>
+          </a:prstGeom>
+          <a:solidFill>
+            <a:srgbClr val="277884"/>
+          </a:solidFill>
+          <a:ln/>
+        </p:spPr>
+        <p:txBody>
+          <a:bodyPr wrap="square" rtlCol="0" anchor="ctr"/>
+          <a:lstStyle/>
+          <a:p>
+            <a:pPr indent="0" marL="0">
+              <a:buNone/>
+            </a:pPr>
+            <a:endParaRPr lang="en-US" dirty="0"/>
+          </a:p>
+        </p:txBody>
+      </p:sp>
+      <p:sp>
+        <p:nvSpPr>
+          <p:cNvPr id="3" name="Text 1"/>
+          <p:cNvSpPr/>
+          <p:nvPr/>
+        </p:nvSpPr>
+        <p:spPr>
+          <a:xfrm>
+            <a:off x="406301" y="457051"/>
+            <a:ext cx="8498026" cy="548580"/>
+          </a:xfrm>
+          <a:prstGeom prst="rect">
+            <a:avLst/>
+          </a:prstGeom>
+          <a:noFill/>
+          <a:ln/>
+        </p:spPr>
+        <p:txBody>
+          <a:bodyPr wrap="square" lIns="0" tIns="0" rIns="0" bIns="0" rtlCol="0" anchor="t"/>
+          <a:lstStyle/>
+          <a:p>
+            <a:pPr algn="l" indent="0" marL="0">
+              <a:lnSpc>
+                <a:spcPts val="2160"/>
+              </a:lnSpc>
+              <a:spcBef>
+                <a:spcPts val="600"/>
+              </a:spcBef>
+              <a:spcAft>
+                <a:spcPts val="800"/>
+              </a:spcAft>
+              <a:buNone/>
+            </a:pPr>
+            <a:r>
+              <a:rPr lang="en-US" sz="1800" b="1" dirty="0">
+                <a:solidFill>
+                  <a:srgbClr val="FE4447"/>
+                </a:solidFill>
+                <a:latin typeface="Georgia" pitchFamily="34" charset="0"/>
+                <a:ea typeface="Georgia" pitchFamily="34" charset="-122"/>
+                <a:cs typeface="Georgia" pitchFamily="34" charset="-120"/>
+              </a:rPr>
+              <a:t>Activity (15 min) — Golden-milk demonstration (or recipe-card if no cooking allowed) (cont.)</a:t>
+            </a:r>
+            <a:endParaRPr lang="en-US" sz="1800" dirty="0"/>
+          </a:p>
+        </p:txBody>
+      </p:sp>
+      <p:sp>
+        <p:nvSpPr>
+          <p:cNvPr id="4" name="Text 2"/>
+          <p:cNvSpPr/>
+          <p:nvPr/>
+        </p:nvSpPr>
+        <p:spPr>
+          <a:xfrm>
+            <a:off x="406301" y="1145232"/>
+            <a:ext cx="8498026" cy="213271"/>
+          </a:xfrm>
+          <a:prstGeom prst="rect">
+            <a:avLst/>
+          </a:prstGeom>
+          <a:noFill/>
+          <a:ln/>
+        </p:spPr>
+        <p:txBody>
+          <a:bodyPr wrap="square" lIns="0" tIns="0" rIns="0" bIns="0" rtlCol="0" anchor="t"/>
+          <a:lstStyle/>
+          <a:p>
+            <a:pPr algn="l" indent="0" marL="0">
+              <a:lnSpc>
+                <a:spcPts val="1680"/>
+              </a:lnSpc>
+              <a:spcBef>
+                <a:spcPts val="300"/>
+              </a:spcBef>
+              <a:spcAft>
+                <a:spcPts val="300"/>
+              </a:spcAft>
+              <a:buNone/>
+            </a:pPr>
+            <a:r>
+              <a:rPr lang="en-US" sz="1200" b="1" dirty="0">
+                <a:solidFill>
+                  <a:srgbClr val="1C2833"/>
+                </a:solidFill>
+                <a:latin typeface="Arial" pitchFamily="34" charset="0"/>
+                <a:ea typeface="Arial" pitchFamily="34" charset="-122"/>
+                <a:cs typeface="Arial" pitchFamily="34" charset="-120"/>
+              </a:rPr>
+              <a:t>If cooking is not permitted (or as a complement):</a:t>
+            </a:r>
+            <a:endParaRPr lang="en-US" sz="1200" dirty="0"/>
+          </a:p>
+        </p:txBody>
+      </p:sp>
+      <p:sp>
+        <p:nvSpPr>
+          <p:cNvPr id="5" name="Text 3"/>
+          <p:cNvSpPr/>
+          <p:nvPr/>
+        </p:nvSpPr>
+        <p:spPr>
+          <a:xfrm>
+            <a:off x="634901" y="1447354"/>
+            <a:ext cx="8102798" cy="731341"/>
+          </a:xfrm>
+          <a:prstGeom prst="rect">
+            <a:avLst/>
+          </a:prstGeom>
+          <a:noFill/>
+          <a:ln/>
+        </p:spPr>
+        <p:txBody>
+          <a:bodyPr wrap="square" lIns="0" tIns="0" rIns="0" bIns="0" rtlCol="0" anchor="t"/>
+          <a:lstStyle/>
+          <a:p>
+            <a:pPr algn="l" marL="342900" indent="-342900">
+              <a:lnSpc>
+                <a:spcPts val="1620"/>
+              </a:lnSpc>
+              <a:spcAft>
+                <a:spcPts val="300"/>
+              </a:spcAft>
+              <a:buSzPct val="100000"/>
+              <a:buChar char="•"/>
+            </a:pPr>
+            <a:r>
+              <a:rPr lang="en-US" sz="1200" dirty="0">
+                <a:solidFill>
+                  <a:srgbClr val="1C2833"/>
+                </a:solidFill>
+                <a:latin typeface="Arial" pitchFamily="34" charset="0"/>
+                <a:ea typeface="Arial" pitchFamily="34" charset="-122"/>
+                <a:cs typeface="Arial" pitchFamily="34" charset="-120"/>
+              </a:rPr>
+              <a:t>Each pair writes out a recipe card: ingredients, quantities, why each is there.</a:t>
+            </a:r>
+            <a:endParaRPr lang="en-US" sz="1200" dirty="0"/>
+          </a:p>
+          <a:p>
+            <a:pPr algn="l" marL="342900" indent="-342900">
+              <a:lnSpc>
+                <a:spcPts val="1620"/>
+              </a:lnSpc>
+              <a:spcAft>
+                <a:spcPts val="300"/>
+              </a:spcAft>
+              <a:buSzPct val="100000"/>
+              <a:buChar char="•"/>
+            </a:pPr>
+            <a:r>
+              <a:rPr lang="en-US" sz="1200" dirty="0">
+                <a:solidFill>
+                  <a:srgbClr val="1C2833"/>
+                </a:solidFill>
+                <a:latin typeface="Arial" pitchFamily="34" charset="0"/>
+                <a:ea typeface="Arial" pitchFamily="34" charset="-122"/>
+                <a:cs typeface="Arial" pitchFamily="34" charset="-120"/>
+              </a:rPr>
+              <a:t>Specifically: </a:t>
+            </a:r>
+            <a:pPr algn="l" indent="0" marL="0">
+              <a:lnSpc>
+                <a:spcPts val="1620"/>
+              </a:lnSpc>
+              <a:spcAft>
+                <a:spcPts val="300"/>
+              </a:spcAft>
+              <a:buNone/>
+            </a:pPr>
+            <a:r>
               <a:rPr lang="en-US" sz="1200" i="1" dirty="0">
                 <a:solidFill>
                   <a:srgbClr val="1C2833"/>
@@ -3215,8 +4770,133 @@
                 <a:ea typeface="Arial" pitchFamily="34" charset="-122"/>
                 <a:cs typeface="Arial" pitchFamily="34" charset="-120"/>
               </a:rPr>
-              <a:t>Foods</a:t>
-            </a:r>
+              <a:t>why pepper?</a:t>
+            </a:r>
+            <a:pPr algn="l" indent="0" marL="0">
+              <a:lnSpc>
+                <a:spcPts val="1620"/>
+              </a:lnSpc>
+              <a:spcAft>
+                <a:spcPts val="300"/>
+              </a:spcAft>
+              <a:buNone/>
+            </a:pPr>
+            <a:r>
+              <a:rPr lang="en-US" sz="1200" dirty="0">
+                <a:solidFill>
+                  <a:srgbClr val="1C2833"/>
+                </a:solidFill>
+                <a:latin typeface="Arial" pitchFamily="34" charset="0"/>
+                <a:ea typeface="Arial" pitchFamily="34" charset="-122"/>
+                <a:cs typeface="Arial" pitchFamily="34" charset="-120"/>
+              </a:rPr>
+              <a:t> (bioavailability) </a:t>
+            </a:r>
+            <a:pPr algn="l" indent="0" marL="0">
+              <a:lnSpc>
+                <a:spcPts val="1620"/>
+              </a:lnSpc>
+              <a:spcAft>
+                <a:spcPts val="300"/>
+              </a:spcAft>
+              <a:buNone/>
+            </a:pPr>
+            <a:r>
+              <a:rPr lang="en-US" sz="1200" i="1" dirty="0">
+                <a:solidFill>
+                  <a:srgbClr val="1C2833"/>
+                </a:solidFill>
+                <a:latin typeface="Arial" pitchFamily="34" charset="0"/>
+                <a:ea typeface="Arial" pitchFamily="34" charset="-122"/>
+                <a:cs typeface="Arial" pitchFamily="34" charset="-120"/>
+              </a:rPr>
+              <a:t>why warm not hot?</a:t>
+            </a:r>
+            <a:pPr algn="l" indent="0" marL="0">
+              <a:lnSpc>
+                <a:spcPts val="1620"/>
+              </a:lnSpc>
+              <a:spcAft>
+                <a:spcPts val="300"/>
+              </a:spcAft>
+              <a:buNone/>
+            </a:pPr>
+            <a:r>
+              <a:rPr lang="en-US" sz="1200" dirty="0">
+                <a:solidFill>
+                  <a:srgbClr val="1C2833"/>
+                </a:solidFill>
+                <a:latin typeface="Arial" pitchFamily="34" charset="0"/>
+                <a:ea typeface="Arial" pitchFamily="34" charset="-122"/>
+                <a:cs typeface="Arial" pitchFamily="34" charset="-120"/>
+              </a:rPr>
+              <a:t> (palatable; also avoids breakdown) </a:t>
+            </a:r>
+            <a:pPr algn="l" indent="0" marL="0">
+              <a:lnSpc>
+                <a:spcPts val="1620"/>
+              </a:lnSpc>
+              <a:spcAft>
+                <a:spcPts val="300"/>
+              </a:spcAft>
+              <a:buNone/>
+            </a:pPr>
+            <a:r>
+              <a:rPr lang="en-US" sz="1200" i="1" dirty="0">
+                <a:solidFill>
+                  <a:srgbClr val="1C2833"/>
+                </a:solidFill>
+                <a:latin typeface="Arial" pitchFamily="34" charset="0"/>
+                <a:ea typeface="Arial" pitchFamily="34" charset="-122"/>
+                <a:cs typeface="Arial" pitchFamily="34" charset="-120"/>
+              </a:rPr>
+              <a:t>why jaggery not white sugar?</a:t>
+            </a:r>
+            <a:pPr algn="l" indent="0" marL="0">
+              <a:lnSpc>
+                <a:spcPts val="1620"/>
+              </a:lnSpc>
+              <a:spcAft>
+                <a:spcPts val="300"/>
+              </a:spcAft>
+              <a:buNone/>
+            </a:pPr>
+            <a:r>
+              <a:rPr lang="en-US" sz="1200" dirty="0">
+                <a:solidFill>
+                  <a:srgbClr val="1C2833"/>
+                </a:solidFill>
+                <a:latin typeface="Arial" pitchFamily="34" charset="0"/>
+                <a:ea typeface="Arial" pitchFamily="34" charset="-122"/>
+                <a:cs typeface="Arial" pitchFamily="34" charset="-120"/>
+              </a:rPr>
+              <a:t> (cultural preference; jaggery is unrefined cane sugar; no major chemistry difference for this purpose).</a:t>
+            </a:r>
+            <a:endParaRPr lang="en-US" sz="1200" dirty="0"/>
+          </a:p>
+        </p:txBody>
+      </p:sp>
+      <p:sp>
+        <p:nvSpPr>
+          <p:cNvPr id="6" name="Text 4"/>
+          <p:cNvSpPr/>
+          <p:nvPr/>
+        </p:nvSpPr>
+        <p:spPr>
+          <a:xfrm>
+            <a:off x="406301" y="4434929"/>
+            <a:ext cx="8498026" cy="213271"/>
+          </a:xfrm>
+          <a:prstGeom prst="rect">
+            <a:avLst/>
+          </a:prstGeom>
+          <a:noFill/>
+          <a:ln/>
+        </p:spPr>
+        <p:txBody>
+          <a:bodyPr wrap="square" lIns="0" tIns="0" rIns="0" bIns="0" rtlCol="0" anchor="t"/>
+          <a:lstStyle/>
+          <a:p>
             <a:pPr algn="l" indent="0" marL="0">
               <a:lnSpc>
                 <a:spcPts val="1680"/>
@@ -3238,8 +4918,143 @@
                 <a:ea typeface="Arial" pitchFamily="34" charset="-122"/>
                 <a:cs typeface="Arial" pitchFamily="34" charset="-120"/>
               </a:rPr>
-              <a:t>, </a:t>
-            </a:r>
+              <a:t>Middle ·  · IKS Curriculum</a:t>
+            </a:r>
+            <a:endParaRPr lang="en-US" sz="1200" dirty="0"/>
+          </a:p>
+        </p:txBody>
+      </p:sp>
+    </p:spTree>
+  </p:cSld>
+  <p:clrMapOvr>
+    <a:masterClrMapping/>
+  </p:clrMapOvr>
+</p:sld>
+</file>
+
+<file path=ppt/slides/slide15.xml><?xml version="1.0" encoding="utf-8"?>
+<p:sld xmlns:a="http://schemas.openxmlformats.org/drawingml/2006/main" xmlns:r="http://schemas.openxmlformats.org/officeDocument/2006/relationships" xmlns:p="http://schemas.openxmlformats.org/presentationml/2006/main">
+  <p:cSld name="Slide 15">
+    <p:bg>
+      <p:bgPr>
+        <a:solidFill>
+          <a:srgbClr val="FFFFFF"/>
+        </a:solidFill>
+      </p:bgPr>
+    </p:bg>
+    <p:spTree>
+      <p:nvGrpSpPr>
+        <p:cNvPr id="1" name=""/>
+        <p:cNvGrpSpPr/>
+        <p:nvPr/>
+      </p:nvGrpSpPr>
+      <p:grpSpPr>
+        <a:xfrm>
+          <a:off x="0" y="0"/>
+          <a:ext cx="0" cy="0"/>
+          <a:chOff x="0" y="0"/>
+          <a:chExt cx="0" cy="0"/>
+        </a:xfrm>
+      </p:grpSpPr>
+      <p:sp>
+        <p:nvSpPr>
+          <p:cNvPr id="2" name="Text 0"/>
+          <p:cNvSpPr/>
+          <p:nvPr/>
+        </p:nvSpPr>
+        <p:spPr>
+          <a:xfrm>
+            <a:off x="0" y="0"/>
+            <a:ext cx="9144000" cy="101501"/>
+          </a:xfrm>
+          <a:prstGeom prst="rect">
+            <a:avLst/>
+          </a:prstGeom>
+          <a:solidFill>
+            <a:srgbClr val="277884"/>
+          </a:solidFill>
+          <a:ln/>
+        </p:spPr>
+        <p:txBody>
+          <a:bodyPr wrap="square" rtlCol="0" anchor="ctr"/>
+          <a:lstStyle/>
+          <a:p>
+            <a:pPr indent="0" marL="0">
+              <a:buNone/>
+            </a:pPr>
+            <a:endParaRPr lang="en-US" dirty="0"/>
+          </a:p>
+        </p:txBody>
+      </p:sp>
+      <p:sp>
+        <p:nvSpPr>
+          <p:cNvPr id="3" name="Text 1"/>
+          <p:cNvSpPr/>
+          <p:nvPr/>
+        </p:nvSpPr>
+        <p:spPr>
+          <a:xfrm>
+            <a:off x="406301" y="457051"/>
+            <a:ext cx="8498026" cy="548580"/>
+          </a:xfrm>
+          <a:prstGeom prst="rect">
+            <a:avLst/>
+          </a:prstGeom>
+          <a:noFill/>
+          <a:ln/>
+        </p:spPr>
+        <p:txBody>
+          <a:bodyPr wrap="square" lIns="0" tIns="0" rIns="0" bIns="0" rtlCol="0" anchor="t"/>
+          <a:lstStyle/>
+          <a:p>
+            <a:pPr algn="l" indent="0" marL="0">
+              <a:lnSpc>
+                <a:spcPts val="2160"/>
+              </a:lnSpc>
+              <a:spcBef>
+                <a:spcPts val="600"/>
+              </a:spcBef>
+              <a:spcAft>
+                <a:spcPts val="800"/>
+              </a:spcAft>
+              <a:buNone/>
+            </a:pPr>
+            <a:r>
+              <a:rPr lang="en-US" sz="1800" b="1" dirty="0">
+                <a:solidFill>
+                  <a:srgbClr val="FE4447"/>
+                </a:solidFill>
+                <a:latin typeface="Georgia" pitchFamily="34" charset="0"/>
+                <a:ea typeface="Georgia" pitchFamily="34" charset="-122"/>
+                <a:cs typeface="Georgia" pitchFamily="34" charset="-120"/>
+              </a:rPr>
+              <a:t>Activity (15 min) — Golden-milk demonstration (or recipe-card if no cooking allowed) (cont.)</a:t>
+            </a:r>
+            <a:endParaRPr lang="en-US" sz="1800" dirty="0"/>
+          </a:p>
+        </p:txBody>
+      </p:sp>
+      <p:sp>
+        <p:nvSpPr>
+          <p:cNvPr id="4" name="Text 2"/>
+          <p:cNvSpPr/>
+          <p:nvPr/>
+        </p:nvSpPr>
+        <p:spPr>
+          <a:xfrm>
+            <a:off x="406301" y="1145232"/>
+            <a:ext cx="8498026" cy="426541"/>
+          </a:xfrm>
+          <a:prstGeom prst="rect">
+            <a:avLst/>
+          </a:prstGeom>
+          <a:noFill/>
+          <a:ln/>
+        </p:spPr>
+        <p:txBody>
+          <a:bodyPr wrap="square" lIns="0" tIns="0" rIns="0" bIns="0" rtlCol="0" anchor="t"/>
+          <a:lstStyle/>
+          <a:p>
             <a:pPr algn="l" indent="0" marL="0">
               <a:lnSpc>
                 <a:spcPts val="1680"/>
@@ -3253,6 +5068,29 @@
               <a:buNone/>
             </a:pPr>
             <a:r>
+              <a:rPr lang="en-US" sz="1200" dirty="0">
+                <a:solidFill>
+                  <a:srgbClr val="1C2833"/>
+                </a:solidFill>
+                <a:latin typeface="Arial" pitchFamily="34" charset="0"/>
+                <a:ea typeface="Arial" pitchFamily="34" charset="-122"/>
+                <a:cs typeface="Arial" pitchFamily="34" charset="-120"/>
+              </a:rPr>
+              <a:t>Either way: 5 minutes of write-up on a reflection slip — </a:t>
+            </a:r>
+            <a:pPr algn="l" indent="0" marL="0">
+              <a:lnSpc>
+                <a:spcPts val="1680"/>
+              </a:lnSpc>
+              <a:spcBef>
+                <a:spcPts val="300"/>
+              </a:spcBef>
+              <a:spcAft>
+                <a:spcPts val="300"/>
+              </a:spcAft>
+              <a:buNone/>
+            </a:pPr>
+            <a:r>
               <a:rPr lang="en-US" sz="1200" i="1" dirty="0">
                 <a:solidFill>
                   <a:srgbClr val="1C2833"/>
@@ -3261,8 +5099,33 @@
                 <a:ea typeface="Arial" pitchFamily="34" charset="-122"/>
                 <a:cs typeface="Arial" pitchFamily="34" charset="-120"/>
               </a:rPr>
-              <a:t>Nutrients</a:t>
-            </a:r>
+              <a:t>"What did you learn today about claims around turmeric? Pick the most surprising thing."</a:t>
+            </a:r>
+            <a:endParaRPr lang="en-US" sz="1200" dirty="0"/>
+          </a:p>
+        </p:txBody>
+      </p:sp>
+      <p:sp>
+        <p:nvSpPr>
+          <p:cNvPr id="5" name="Text 3"/>
+          <p:cNvSpPr/>
+          <p:nvPr/>
+        </p:nvSpPr>
+        <p:spPr>
+          <a:xfrm>
+            <a:off x="406301" y="4434929"/>
+            <a:ext cx="8498026" cy="213271"/>
+          </a:xfrm>
+          <a:prstGeom prst="rect">
+            <a:avLst/>
+          </a:prstGeom>
+          <a:noFill/>
+          <a:ln/>
+        </p:spPr>
+        <p:txBody>
+          <a:bodyPr wrap="square" lIns="0" tIns="0" rIns="0" bIns="0" rtlCol="0" anchor="t"/>
+          <a:lstStyle/>
+          <a:p>
             <a:pPr algn="l" indent="0" marL="0">
               <a:lnSpc>
                 <a:spcPts val="1680"/>
@@ -3284,8 +5147,273 @@
                 <a:ea typeface="Arial" pitchFamily="34" charset="-122"/>
                 <a:cs typeface="Arial" pitchFamily="34" charset="-120"/>
               </a:rPr>
-              <a:t>, and the </a:t>
-            </a:r>
+              <a:t>Middle ·  · IKS Curriculum</a:t>
+            </a:r>
+            <a:endParaRPr lang="en-US" sz="1200" dirty="0"/>
+          </a:p>
+        </p:txBody>
+      </p:sp>
+    </p:spTree>
+  </p:cSld>
+  <p:clrMapOvr>
+    <a:masterClrMapping/>
+  </p:clrMapOvr>
+</p:sld>
+</file>
+
+<file path=ppt/slides/slide16.xml><?xml version="1.0" encoding="utf-8"?>
+<p:sld xmlns:a="http://schemas.openxmlformats.org/drawingml/2006/main" xmlns:r="http://schemas.openxmlformats.org/officeDocument/2006/relationships" xmlns:p="http://schemas.openxmlformats.org/presentationml/2006/main">
+  <p:cSld name="Slide 16">
+    <p:bg>
+      <p:bgPr>
+        <a:solidFill>
+          <a:srgbClr val="FFFFFF"/>
+        </a:solidFill>
+      </p:bgPr>
+    </p:bg>
+    <p:spTree>
+      <p:nvGrpSpPr>
+        <p:cNvPr id="1" name=""/>
+        <p:cNvGrpSpPr/>
+        <p:nvPr/>
+      </p:nvGrpSpPr>
+      <p:grpSpPr>
+        <a:xfrm>
+          <a:off x="0" y="0"/>
+          <a:ext cx="0" cy="0"/>
+          <a:chOff x="0" y="0"/>
+          <a:chExt cx="0" cy="0"/>
+        </a:xfrm>
+      </p:grpSpPr>
+      <p:sp>
+        <p:nvSpPr>
+          <p:cNvPr id="2" name="Text 0"/>
+          <p:cNvSpPr/>
+          <p:nvPr/>
+        </p:nvSpPr>
+        <p:spPr>
+          <a:xfrm>
+            <a:off x="0" y="0"/>
+            <a:ext cx="9144000" cy="101501"/>
+          </a:xfrm>
+          <a:prstGeom prst="rect">
+            <a:avLst/>
+          </a:prstGeom>
+          <a:solidFill>
+            <a:srgbClr val="277884"/>
+          </a:solidFill>
+          <a:ln/>
+        </p:spPr>
+        <p:txBody>
+          <a:bodyPr wrap="square" rtlCol="0" anchor="ctr"/>
+          <a:lstStyle/>
+          <a:p>
+            <a:pPr indent="0" marL="0">
+              <a:buNone/>
+            </a:pPr>
+            <a:endParaRPr lang="en-US" dirty="0"/>
+          </a:p>
+        </p:txBody>
+      </p:sp>
+      <p:sp>
+        <p:nvSpPr>
+          <p:cNvPr id="3" name="Text 1"/>
+          <p:cNvSpPr/>
+          <p:nvPr/>
+        </p:nvSpPr>
+        <p:spPr>
+          <a:xfrm>
+            <a:off x="406301" y="457051"/>
+            <a:ext cx="8498026" cy="274290"/>
+          </a:xfrm>
+          <a:prstGeom prst="rect">
+            <a:avLst/>
+          </a:prstGeom>
+          <a:noFill/>
+          <a:ln/>
+        </p:spPr>
+        <p:txBody>
+          <a:bodyPr wrap="square" lIns="0" tIns="0" rIns="0" bIns="0" rtlCol="0" anchor="t"/>
+          <a:lstStyle/>
+          <a:p>
+            <a:pPr algn="l" indent="0" marL="0">
+              <a:lnSpc>
+                <a:spcPts val="2160"/>
+              </a:lnSpc>
+              <a:spcBef>
+                <a:spcPts val="600"/>
+              </a:spcBef>
+              <a:spcAft>
+                <a:spcPts val="800"/>
+              </a:spcAft>
+              <a:buNone/>
+            </a:pPr>
+            <a:r>
+              <a:rPr lang="en-US" sz="1800" b="1" dirty="0">
+                <a:solidFill>
+                  <a:srgbClr val="FE4447"/>
+                </a:solidFill>
+                <a:latin typeface="Georgia" pitchFamily="34" charset="0"/>
+                <a:ea typeface="Georgia" pitchFamily="34" charset="-122"/>
+                <a:cs typeface="Georgia" pitchFamily="34" charset="-120"/>
+              </a:rPr>
+              <a:t>Wrap-up (5 min)</a:t>
+            </a:r>
+            <a:endParaRPr lang="en-US" sz="1800" dirty="0"/>
+          </a:p>
+        </p:txBody>
+      </p:sp>
+      <p:sp>
+        <p:nvSpPr>
+          <p:cNvPr id="4" name="Text 2"/>
+          <p:cNvSpPr/>
+          <p:nvPr/>
+        </p:nvSpPr>
+        <p:spPr>
+          <a:xfrm>
+            <a:off x="634901" y="883593"/>
+            <a:ext cx="8102798" cy="1142702"/>
+          </a:xfrm>
+          <a:prstGeom prst="rect">
+            <a:avLst/>
+          </a:prstGeom>
+          <a:noFill/>
+          <a:ln/>
+        </p:spPr>
+        <p:txBody>
+          <a:bodyPr wrap="square" lIns="0" tIns="0" rIns="0" bIns="0" rtlCol="0" anchor="t"/>
+          <a:lstStyle/>
+          <a:p>
+            <a:pPr algn="l" marL="342900" indent="-342900">
+              <a:lnSpc>
+                <a:spcPts val="1620"/>
+              </a:lnSpc>
+              <a:spcAft>
+                <a:spcPts val="300"/>
+              </a:spcAft>
+              <a:buSzPct val="100000"/>
+              <a:buChar char="•"/>
+            </a:pPr>
+            <a:r>
+              <a:rPr lang="en-US" sz="1200" dirty="0">
+                <a:solidFill>
+                  <a:srgbClr val="1C2833"/>
+                </a:solidFill>
+                <a:latin typeface="Arial" pitchFamily="34" charset="0"/>
+                <a:ea typeface="Arial" pitchFamily="34" charset="-122"/>
+                <a:cs typeface="Arial" pitchFamily="34" charset="-120"/>
+              </a:rPr>
+              <a:t>Restate the safety rule. Add the turmeric-specific note: </a:t>
+            </a:r>
+            <a:pPr algn="l" indent="0" marL="0">
+              <a:lnSpc>
+                <a:spcPts val="1620"/>
+              </a:lnSpc>
+              <a:spcAft>
+                <a:spcPts val="300"/>
+              </a:spcAft>
+              <a:buNone/>
+            </a:pPr>
+            <a:r>
+              <a:rPr lang="en-US" sz="1200" b="1" dirty="0">
+                <a:solidFill>
+                  <a:srgbClr val="1C2833"/>
+                </a:solidFill>
+                <a:latin typeface="Arial" pitchFamily="34" charset="0"/>
+                <a:ea typeface="Arial" pitchFamily="34" charset="-122"/>
+                <a:cs typeface="Arial" pitchFamily="34" charset="-120"/>
+              </a:rPr>
+              <a:t>turmeric supplements at multi-gram daily doses have caused liver issues in some individuals, particularly when combined with other supplements.</a:t>
+            </a:r>
+            <a:pPr algn="l" indent="0" marL="0">
+              <a:lnSpc>
+                <a:spcPts val="1620"/>
+              </a:lnSpc>
+              <a:spcAft>
+                <a:spcPts val="300"/>
+              </a:spcAft>
+              <a:buNone/>
+            </a:pPr>
+            <a:r>
+              <a:rPr lang="en-US" sz="1200" dirty="0">
+                <a:solidFill>
+                  <a:srgbClr val="1C2833"/>
+                </a:solidFill>
+                <a:latin typeface="Arial" pitchFamily="34" charset="0"/>
+                <a:ea typeface="Arial" pitchFamily="34" charset="-122"/>
+                <a:cs typeface="Arial" pitchFamily="34" charset="-120"/>
+              </a:rPr>
+              <a:t> Culinary use in food is not the same as supplement use.</a:t>
+            </a:r>
+            <a:endParaRPr lang="en-US" sz="1200" dirty="0"/>
+          </a:p>
+          <a:p>
+            <a:pPr algn="l" marL="342900" indent="-342900">
+              <a:lnSpc>
+                <a:spcPts val="1620"/>
+              </a:lnSpc>
+              <a:spcAft>
+                <a:spcPts val="300"/>
+              </a:spcAft>
+              <a:buSzPct val="100000"/>
+              <a:buChar char="•"/>
+            </a:pPr>
+            <a:r>
+              <a:rPr lang="en-US" sz="1200" dirty="0">
+                <a:solidFill>
+                  <a:srgbClr val="1C2833"/>
+                </a:solidFill>
+                <a:latin typeface="Arial" pitchFamily="34" charset="0"/>
+                <a:ea typeface="Arial" pitchFamily="34" charset="-122"/>
+                <a:cs typeface="Arial" pitchFamily="34" charset="-120"/>
+              </a:rPr>
+              <a:t>Preview Day 5: </a:t>
+            </a:r>
+            <a:pPr algn="l" indent="0" marL="0">
+              <a:lnSpc>
+                <a:spcPts val="1620"/>
+              </a:lnSpc>
+              <a:spcAft>
+                <a:spcPts val="300"/>
+              </a:spcAft>
+              <a:buNone/>
+            </a:pPr>
+            <a:r>
+              <a:rPr lang="en-US" sz="1200" i="1" dirty="0">
+                <a:solidFill>
+                  <a:srgbClr val="1C2833"/>
+                </a:solidFill>
+                <a:latin typeface="Arial" pitchFamily="34" charset="0"/>
+                <a:ea typeface="Arial" pitchFamily="34" charset="-122"/>
+                <a:cs typeface="Arial" pitchFamily="34" charset="-120"/>
+              </a:rPr>
+              <a:t>"Tomorrow, ginger — the kitchen rhizome that's also a key ingredient in many cold-and-flu home remedies."</a:t>
+            </a:r>
+            <a:endParaRPr lang="en-US" sz="1200" dirty="0"/>
+          </a:p>
+        </p:txBody>
+      </p:sp>
+      <p:sp>
+        <p:nvSpPr>
+          <p:cNvPr id="5" name="Text 3"/>
+          <p:cNvSpPr/>
+          <p:nvPr/>
+        </p:nvSpPr>
+        <p:spPr>
+          <a:xfrm>
+            <a:off x="406301" y="4434929"/>
+            <a:ext cx="8498026" cy="213271"/>
+          </a:xfrm>
+          <a:prstGeom prst="rect">
+            <a:avLst/>
+          </a:prstGeom>
+          <a:noFill/>
+          <a:ln/>
+        </p:spPr>
+        <p:txBody>
+          <a:bodyPr wrap="square" lIns="0" tIns="0" rIns="0" bIns="0" rtlCol="0" anchor="t"/>
+          <a:lstStyle/>
+          <a:p>
             <a:pPr algn="l" indent="0" marL="0">
               <a:lnSpc>
                 <a:spcPts val="1680"/>
@@ -3299,6 +5427,406 @@
               <a:buNone/>
             </a:pPr>
             <a:r>
+              <a:rPr lang="en-US" sz="1200" dirty="0">
+                <a:solidFill>
+                  <a:srgbClr val="1C2833"/>
+                </a:solidFill>
+                <a:latin typeface="Arial" pitchFamily="34" charset="0"/>
+                <a:ea typeface="Arial" pitchFamily="34" charset="-122"/>
+                <a:cs typeface="Arial" pitchFamily="34" charset="-120"/>
+              </a:rPr>
+              <a:t>Middle ·  · IKS Curriculum</a:t>
+            </a:r>
+            <a:endParaRPr lang="en-US" sz="1200" dirty="0"/>
+          </a:p>
+        </p:txBody>
+      </p:sp>
+    </p:spTree>
+  </p:cSld>
+  <p:clrMapOvr>
+    <a:masterClrMapping/>
+  </p:clrMapOvr>
+</p:sld>
+</file>
+
+<file path=ppt/slides/slide17.xml><?xml version="1.0" encoding="utf-8"?>
+<p:sld xmlns:a="http://schemas.openxmlformats.org/drawingml/2006/main" xmlns:r="http://schemas.openxmlformats.org/officeDocument/2006/relationships" xmlns:p="http://schemas.openxmlformats.org/presentationml/2006/main">
+  <p:cSld name="Slide 17">
+    <p:bg>
+      <p:bgPr>
+        <a:solidFill>
+          <a:srgbClr val="FFFFFF"/>
+        </a:solidFill>
+      </p:bgPr>
+    </p:bg>
+    <p:spTree>
+      <p:nvGrpSpPr>
+        <p:cNvPr id="1" name=""/>
+        <p:cNvGrpSpPr/>
+        <p:nvPr/>
+      </p:nvGrpSpPr>
+      <p:grpSpPr>
+        <a:xfrm>
+          <a:off x="0" y="0"/>
+          <a:ext cx="0" cy="0"/>
+          <a:chOff x="0" y="0"/>
+          <a:chExt cx="0" cy="0"/>
+        </a:xfrm>
+      </p:grpSpPr>
+      <p:sp>
+        <p:nvSpPr>
+          <p:cNvPr id="2" name="Text 0"/>
+          <p:cNvSpPr/>
+          <p:nvPr/>
+        </p:nvSpPr>
+        <p:spPr>
+          <a:xfrm>
+            <a:off x="0" y="0"/>
+            <a:ext cx="9144000" cy="101501"/>
+          </a:xfrm>
+          <a:prstGeom prst="rect">
+            <a:avLst/>
+          </a:prstGeom>
+          <a:solidFill>
+            <a:srgbClr val="277884"/>
+          </a:solidFill>
+          <a:ln/>
+        </p:spPr>
+        <p:txBody>
+          <a:bodyPr wrap="square" rtlCol="0" anchor="ctr"/>
+          <a:lstStyle/>
+          <a:p>
+            <a:pPr indent="0" marL="0">
+              <a:buNone/>
+            </a:pPr>
+            <a:endParaRPr lang="en-US" dirty="0"/>
+          </a:p>
+        </p:txBody>
+      </p:sp>
+      <p:sp>
+        <p:nvSpPr>
+          <p:cNvPr id="3" name="Text 1"/>
+          <p:cNvSpPr/>
+          <p:nvPr/>
+        </p:nvSpPr>
+        <p:spPr>
+          <a:xfrm>
+            <a:off x="406301" y="457051"/>
+            <a:ext cx="8498026" cy="274290"/>
+          </a:xfrm>
+          <a:prstGeom prst="rect">
+            <a:avLst/>
+          </a:prstGeom>
+          <a:noFill/>
+          <a:ln/>
+        </p:spPr>
+        <p:txBody>
+          <a:bodyPr wrap="square" lIns="0" tIns="0" rIns="0" bIns="0" rtlCol="0" anchor="t"/>
+          <a:lstStyle/>
+          <a:p>
+            <a:pPr algn="l" indent="0" marL="0">
+              <a:lnSpc>
+                <a:spcPts val="2160"/>
+              </a:lnSpc>
+              <a:spcBef>
+                <a:spcPts val="600"/>
+              </a:spcBef>
+              <a:spcAft>
+                <a:spcPts val="800"/>
+              </a:spcAft>
+              <a:buNone/>
+            </a:pPr>
+            <a:r>
+              <a:rPr lang="en-US" sz="1800" b="1" dirty="0">
+                <a:solidFill>
+                  <a:srgbClr val="FE4447"/>
+                </a:solidFill>
+                <a:latin typeface="Georgia" pitchFamily="34" charset="0"/>
+                <a:ea typeface="Georgia" pitchFamily="34" charset="-122"/>
+                <a:cs typeface="Georgia" pitchFamily="34" charset="-120"/>
+              </a:rPr>
+              <a:t>Homework</a:t>
+            </a:r>
+            <a:endParaRPr lang="en-US" sz="1800" dirty="0"/>
+          </a:p>
+        </p:txBody>
+      </p:sp>
+      <p:sp>
+        <p:nvSpPr>
+          <p:cNvPr id="4" name="Text 2"/>
+          <p:cNvSpPr/>
+          <p:nvPr/>
+        </p:nvSpPr>
+        <p:spPr>
+          <a:xfrm>
+            <a:off x="634901" y="883593"/>
+            <a:ext cx="8102798" cy="487561"/>
+          </a:xfrm>
+          <a:prstGeom prst="rect">
+            <a:avLst/>
+          </a:prstGeom>
+          <a:noFill/>
+          <a:ln/>
+        </p:spPr>
+        <p:txBody>
+          <a:bodyPr wrap="square" lIns="0" tIns="0" rIns="0" bIns="0" rtlCol="0" anchor="t"/>
+          <a:lstStyle/>
+          <a:p>
+            <a:pPr algn="l" marL="342900" indent="-342900">
+              <a:lnSpc>
+                <a:spcPts val="1620"/>
+              </a:lnSpc>
+              <a:spcAft>
+                <a:spcPts val="300"/>
+              </a:spcAft>
+              <a:buSzPct val="100000"/>
+              <a:buChar char="•"/>
+            </a:pPr>
+            <a:r>
+              <a:rPr lang="en-US" sz="1200" dirty="0">
+                <a:solidFill>
+                  <a:srgbClr val="1C2833"/>
+                </a:solidFill>
+                <a:latin typeface="Arial" pitchFamily="34" charset="0"/>
+                <a:ea typeface="Arial" pitchFamily="34" charset="-122"/>
+                <a:cs typeface="Arial" pitchFamily="34" charset="-120"/>
+              </a:rPr>
+              <a:t>Find turmeric in your home (powder, fresh, capsules, golden milk — anything). Note: where is it? What form? Has anyone in your family ever said "turmeric helps with X"? If yes, write the claim down — we'll look at it on Day 8.</a:t>
+            </a:r>
+            <a:endParaRPr lang="en-US" sz="1200" dirty="0"/>
+          </a:p>
+        </p:txBody>
+      </p:sp>
+      <p:sp>
+        <p:nvSpPr>
+          <p:cNvPr id="5" name="Text 3"/>
+          <p:cNvSpPr/>
+          <p:nvPr/>
+        </p:nvSpPr>
+        <p:spPr>
+          <a:xfrm>
+            <a:off x="406301" y="4434929"/>
+            <a:ext cx="8498026" cy="213271"/>
+          </a:xfrm>
+          <a:prstGeom prst="rect">
+            <a:avLst/>
+          </a:prstGeom>
+          <a:noFill/>
+          <a:ln/>
+        </p:spPr>
+        <p:txBody>
+          <a:bodyPr wrap="square" lIns="0" tIns="0" rIns="0" bIns="0" rtlCol="0" anchor="t"/>
+          <a:lstStyle/>
+          <a:p>
+            <a:pPr algn="l" indent="0" marL="0">
+              <a:lnSpc>
+                <a:spcPts val="1680"/>
+              </a:lnSpc>
+              <a:spcBef>
+                <a:spcPts val="300"/>
+              </a:spcBef>
+              <a:spcAft>
+                <a:spcPts val="300"/>
+              </a:spcAft>
+              <a:buNone/>
+            </a:pPr>
+            <a:r>
+              <a:rPr lang="en-US" sz="1200" dirty="0">
+                <a:solidFill>
+                  <a:srgbClr val="1C2833"/>
+                </a:solidFill>
+                <a:latin typeface="Arial" pitchFamily="34" charset="0"/>
+                <a:ea typeface="Arial" pitchFamily="34" charset="-122"/>
+                <a:cs typeface="Arial" pitchFamily="34" charset="-120"/>
+              </a:rPr>
+              <a:t>Middle ·  · IKS Curriculum</a:t>
+            </a:r>
+            <a:endParaRPr lang="en-US" sz="1200" dirty="0"/>
+          </a:p>
+        </p:txBody>
+      </p:sp>
+    </p:spTree>
+  </p:cSld>
+  <p:clrMapOvr>
+    <a:masterClrMapping/>
+  </p:clrMapOvr>
+</p:sld>
+</file>
+
+<file path=ppt/slides/slide18.xml><?xml version="1.0" encoding="utf-8"?>
+<p:sld xmlns:a="http://schemas.openxmlformats.org/drawingml/2006/main" xmlns:r="http://schemas.openxmlformats.org/officeDocument/2006/relationships" xmlns:p="http://schemas.openxmlformats.org/presentationml/2006/main">
+  <p:cSld name="Slide 18">
+    <p:bg>
+      <p:bgPr>
+        <a:solidFill>
+          <a:srgbClr val="FFFFFF"/>
+        </a:solidFill>
+      </p:bgPr>
+    </p:bg>
+    <p:spTree>
+      <p:nvGrpSpPr>
+        <p:cNvPr id="1" name=""/>
+        <p:cNvGrpSpPr/>
+        <p:nvPr/>
+      </p:nvGrpSpPr>
+      <p:grpSpPr>
+        <a:xfrm>
+          <a:off x="0" y="0"/>
+          <a:ext cx="0" cy="0"/>
+          <a:chOff x="0" y="0"/>
+          <a:chExt cx="0" cy="0"/>
+        </a:xfrm>
+      </p:grpSpPr>
+      <p:sp>
+        <p:nvSpPr>
+          <p:cNvPr id="2" name="Text 0"/>
+          <p:cNvSpPr/>
+          <p:nvPr/>
+        </p:nvSpPr>
+        <p:spPr>
+          <a:xfrm>
+            <a:off x="0" y="0"/>
+            <a:ext cx="9144000" cy="101501"/>
+          </a:xfrm>
+          <a:prstGeom prst="rect">
+            <a:avLst/>
+          </a:prstGeom>
+          <a:solidFill>
+            <a:srgbClr val="277884"/>
+          </a:solidFill>
+          <a:ln/>
+        </p:spPr>
+        <p:txBody>
+          <a:bodyPr wrap="square" rtlCol="0" anchor="ctr"/>
+          <a:lstStyle/>
+          <a:p>
+            <a:pPr indent="0" marL="0">
+              <a:buNone/>
+            </a:pPr>
+            <a:endParaRPr lang="en-US" dirty="0"/>
+          </a:p>
+        </p:txBody>
+      </p:sp>
+      <p:sp>
+        <p:nvSpPr>
+          <p:cNvPr id="3" name="Text 1"/>
+          <p:cNvSpPr/>
+          <p:nvPr/>
+        </p:nvSpPr>
+        <p:spPr>
+          <a:xfrm>
+            <a:off x="406301" y="457051"/>
+            <a:ext cx="8498026" cy="274290"/>
+          </a:xfrm>
+          <a:prstGeom prst="rect">
+            <a:avLst/>
+          </a:prstGeom>
+          <a:noFill/>
+          <a:ln/>
+        </p:spPr>
+        <p:txBody>
+          <a:bodyPr wrap="square" lIns="0" tIns="0" rIns="0" bIns="0" rtlCol="0" anchor="t"/>
+          <a:lstStyle/>
+          <a:p>
+            <a:pPr algn="l" indent="0" marL="0">
+              <a:lnSpc>
+                <a:spcPts val="2160"/>
+              </a:lnSpc>
+              <a:spcBef>
+                <a:spcPts val="600"/>
+              </a:spcBef>
+              <a:spcAft>
+                <a:spcPts val="800"/>
+              </a:spcAft>
+              <a:buNone/>
+            </a:pPr>
+            <a:r>
+              <a:rPr lang="en-US" sz="1800" b="1" dirty="0">
+                <a:solidFill>
+                  <a:srgbClr val="FE4447"/>
+                </a:solidFill>
+                <a:latin typeface="Georgia" pitchFamily="34" charset="0"/>
+                <a:ea typeface="Georgia" pitchFamily="34" charset="-122"/>
+                <a:cs typeface="Georgia" pitchFamily="34" charset="-120"/>
+              </a:rPr>
+              <a:t>Differentiation</a:t>
+            </a:r>
+            <a:endParaRPr lang="en-US" sz="1800" dirty="0"/>
+          </a:p>
+        </p:txBody>
+      </p:sp>
+      <p:sp>
+        <p:nvSpPr>
+          <p:cNvPr id="4" name="Text 2"/>
+          <p:cNvSpPr/>
+          <p:nvPr/>
+        </p:nvSpPr>
+        <p:spPr>
+          <a:xfrm>
+            <a:off x="634901" y="883593"/>
+            <a:ext cx="8102798" cy="937022"/>
+          </a:xfrm>
+          <a:prstGeom prst="rect">
+            <a:avLst/>
+          </a:prstGeom>
+          <a:noFill/>
+          <a:ln/>
+        </p:spPr>
+        <p:txBody>
+          <a:bodyPr wrap="square" lIns="0" tIns="0" rIns="0" bIns="0" rtlCol="0" anchor="t"/>
+          <a:lstStyle/>
+          <a:p>
+            <a:pPr algn="l" marL="342900" indent="-342900">
+              <a:lnSpc>
+                <a:spcPts val="1620"/>
+              </a:lnSpc>
+              <a:spcAft>
+                <a:spcPts val="300"/>
+              </a:spcAft>
+              <a:buSzPct val="100000"/>
+              <a:buChar char="•"/>
+            </a:pPr>
+            <a:r>
+              <a:rPr lang="en-US" sz="1200" b="1" dirty="0">
+                <a:solidFill>
+                  <a:srgbClr val="1C2833"/>
+                </a:solidFill>
+                <a:latin typeface="Arial" pitchFamily="34" charset="0"/>
+                <a:ea typeface="Arial" pitchFamily="34" charset="-122"/>
+                <a:cs typeface="Arial" pitchFamily="34" charset="-120"/>
+              </a:rPr>
+              <a:t>One tier up:</a:t>
+            </a:r>
+            <a:pPr algn="l" indent="0" marL="0">
+              <a:lnSpc>
+                <a:spcPts val="1620"/>
+              </a:lnSpc>
+              <a:spcAft>
+                <a:spcPts val="300"/>
+              </a:spcAft>
+              <a:buNone/>
+            </a:pPr>
+            <a:r>
+              <a:rPr lang="en-US" sz="1200" dirty="0">
+                <a:solidFill>
+                  <a:srgbClr val="1C2833"/>
+                </a:solidFill>
+                <a:latin typeface="Arial" pitchFamily="34" charset="0"/>
+                <a:ea typeface="Arial" pitchFamily="34" charset="-122"/>
+                <a:cs typeface="Arial" pitchFamily="34" charset="-120"/>
+              </a:rPr>
+              <a:t> Curcumin is fluorescent under UV light. Look up </a:t>
+            </a:r>
+            <a:pPr algn="l" indent="0" marL="0">
+              <a:lnSpc>
+                <a:spcPts val="1620"/>
+              </a:lnSpc>
+              <a:spcAft>
+                <a:spcPts val="300"/>
+              </a:spcAft>
+              <a:buNone/>
+            </a:pPr>
+            <a:r>
               <a:rPr lang="en-US" sz="1200" i="1" dirty="0">
                 <a:solidFill>
                   <a:srgbClr val="1C2833"/>
@@ -3307,8 +5835,97 @@
                 <a:ea typeface="Arial" pitchFamily="34" charset="-122"/>
                 <a:cs typeface="Arial" pitchFamily="34" charset="-120"/>
               </a:rPr>
-              <a:t>Journal of Ethnopharmacology</a:t>
-            </a:r>
+              <a:t>one</a:t>
+            </a:r>
+            <a:pPr algn="l" indent="0" marL="0">
+              <a:lnSpc>
+                <a:spcPts val="1620"/>
+              </a:lnSpc>
+              <a:spcAft>
+                <a:spcPts val="300"/>
+              </a:spcAft>
+              <a:buNone/>
+            </a:pPr>
+            <a:r>
+              <a:rPr lang="en-US" sz="1200" dirty="0">
+                <a:solidFill>
+                  <a:srgbClr val="1C2833"/>
+                </a:solidFill>
+                <a:latin typeface="Arial" pitchFamily="34" charset="0"/>
+                <a:ea typeface="Arial" pitchFamily="34" charset="-122"/>
+                <a:cs typeface="Arial" pitchFamily="34" charset="-120"/>
+              </a:rPr>
+              <a:t> other dietary pigment that fluoresces. Why might fluorescence and biological activity be related (hint: think about how light energy interacts with electronic structure)?</a:t>
+            </a:r>
+            <a:endParaRPr lang="en-US" sz="1200" dirty="0"/>
+          </a:p>
+          <a:p>
+            <a:pPr algn="l" marL="342900" indent="-342900">
+              <a:lnSpc>
+                <a:spcPts val="1620"/>
+              </a:lnSpc>
+              <a:spcAft>
+                <a:spcPts val="300"/>
+              </a:spcAft>
+              <a:buSzPct val="100000"/>
+              <a:buChar char="•"/>
+            </a:pPr>
+            <a:r>
+              <a:rPr lang="en-US" sz="1200" b="1" dirty="0">
+                <a:solidFill>
+                  <a:srgbClr val="1C2833"/>
+                </a:solidFill>
+                <a:latin typeface="Arial" pitchFamily="34" charset="0"/>
+                <a:ea typeface="Arial" pitchFamily="34" charset="-122"/>
+                <a:cs typeface="Arial" pitchFamily="34" charset="-120"/>
+              </a:rPr>
+              <a:t>One tier down:</a:t>
+            </a:r>
+            <a:pPr algn="l" indent="0" marL="0">
+              <a:lnSpc>
+                <a:spcPts val="1620"/>
+              </a:lnSpc>
+              <a:spcAft>
+                <a:spcPts val="300"/>
+              </a:spcAft>
+              <a:buNone/>
+            </a:pPr>
+            <a:r>
+              <a:rPr lang="en-US" sz="1200" dirty="0">
+                <a:solidFill>
+                  <a:srgbClr val="1C2833"/>
+                </a:solidFill>
+                <a:latin typeface="Arial" pitchFamily="34" charset="0"/>
+                <a:ea typeface="Arial" pitchFamily="34" charset="-122"/>
+                <a:cs typeface="Arial" pitchFamily="34" charset="-120"/>
+              </a:rPr>
+              <a:t> Focus on identifying the rhizome shape and remembering the word "curcumin." Stain demo and bioavailability concept come back on Day 10's revision.</a:t>
+            </a:r>
+            <a:endParaRPr lang="en-US" sz="1200" dirty="0"/>
+          </a:p>
+        </p:txBody>
+      </p:sp>
+      <p:sp>
+        <p:nvSpPr>
+          <p:cNvPr id="5" name="Text 3"/>
+          <p:cNvSpPr/>
+          <p:nvPr/>
+        </p:nvSpPr>
+        <p:spPr>
+          <a:xfrm>
+            <a:off x="406301" y="4434929"/>
+            <a:ext cx="8498026" cy="213271"/>
+          </a:xfrm>
+          <a:prstGeom prst="rect">
+            <a:avLst/>
+          </a:prstGeom>
+          <a:noFill/>
+          <a:ln/>
+        </p:spPr>
+        <p:txBody>
+          <a:bodyPr wrap="square" lIns="0" tIns="0" rIns="0" bIns="0" rtlCol="0" anchor="t"/>
+          <a:lstStyle/>
+          <a:p>
             <a:pPr algn="l" indent="0" marL="0">
               <a:lnSpc>
                 <a:spcPts val="1680"/>
@@ -3330,145 +5947,271 @@
                 <a:ea typeface="Arial" pitchFamily="34" charset="-122"/>
                 <a:cs typeface="Arial" pitchFamily="34" charset="-120"/>
               </a:rPr>
-              <a:t> — we do not cite a specific paper because RAG verification wasn't available; teachers can search "curcumin piperine bioavailability review" in any indexing database. – Turmeric as </a:t>
-            </a:r>
-            <a:pPr algn="l" indent="0" marL="0">
-              <a:lnSpc>
-                <a:spcPts val="1680"/>
+              <a:t>Middle ·  · IKS Curriculum</a:t>
+            </a:r>
+            <a:endParaRPr lang="en-US" sz="1200" dirty="0"/>
+          </a:p>
+        </p:txBody>
+      </p:sp>
+    </p:spTree>
+  </p:cSld>
+  <p:clrMapOvr>
+    <a:masterClrMapping/>
+  </p:clrMapOvr>
+</p:sld>
+</file>
+
+<file path=ppt/slides/slide19.xml><?xml version="1.0" encoding="utf-8"?>
+<p:sld xmlns:a="http://schemas.openxmlformats.org/drawingml/2006/main" xmlns:r="http://schemas.openxmlformats.org/officeDocument/2006/relationships" xmlns:p="http://schemas.openxmlformats.org/presentationml/2006/main">
+  <p:cSld name="Slide 19">
+    <p:bg>
+      <p:bgPr>
+        <a:solidFill>
+          <a:srgbClr val="FFFFFF"/>
+        </a:solidFill>
+      </p:bgPr>
+    </p:bg>
+    <p:spTree>
+      <p:nvGrpSpPr>
+        <p:cNvPr id="1" name=""/>
+        <p:cNvGrpSpPr/>
+        <p:nvPr/>
+      </p:nvGrpSpPr>
+      <p:grpSpPr>
+        <a:xfrm>
+          <a:off x="0" y="0"/>
+          <a:ext cx="0" cy="0"/>
+          <a:chOff x="0" y="0"/>
+          <a:chExt cx="0" cy="0"/>
+        </a:xfrm>
+      </p:grpSpPr>
+      <p:sp>
+        <p:nvSpPr>
+          <p:cNvPr id="2" name="Text 0"/>
+          <p:cNvSpPr/>
+          <p:nvPr/>
+        </p:nvSpPr>
+        <p:spPr>
+          <a:xfrm>
+            <a:off x="0" y="0"/>
+            <a:ext cx="9144000" cy="101501"/>
+          </a:xfrm>
+          <a:prstGeom prst="rect">
+            <a:avLst/>
+          </a:prstGeom>
+          <a:solidFill>
+            <a:srgbClr val="277884"/>
+          </a:solidFill>
+          <a:ln/>
+        </p:spPr>
+        <p:txBody>
+          <a:bodyPr wrap="square" rtlCol="0" anchor="ctr"/>
+          <a:lstStyle/>
+          <a:p>
+            <a:pPr indent="0" marL="0">
+              <a:buNone/>
+            </a:pPr>
+            <a:endParaRPr lang="en-US" dirty="0"/>
+          </a:p>
+        </p:txBody>
+      </p:sp>
+      <p:sp>
+        <p:nvSpPr>
+          <p:cNvPr id="3" name="Text 1"/>
+          <p:cNvSpPr/>
+          <p:nvPr/>
+        </p:nvSpPr>
+        <p:spPr>
+          <a:xfrm>
+            <a:off x="406301" y="457051"/>
+            <a:ext cx="8498026" cy="274290"/>
+          </a:xfrm>
+          <a:prstGeom prst="rect">
+            <a:avLst/>
+          </a:prstGeom>
+          <a:noFill/>
+          <a:ln/>
+        </p:spPr>
+        <p:txBody>
+          <a:bodyPr wrap="square" lIns="0" tIns="0" rIns="0" bIns="0" rtlCol="0" anchor="t"/>
+          <a:lstStyle/>
+          <a:p>
+            <a:pPr algn="l" indent="0" marL="0">
+              <a:lnSpc>
+                <a:spcPts val="2160"/>
               </a:lnSpc>
               <a:spcBef>
-                <a:spcPts val="300"/>
+                <a:spcPts val="600"/>
               </a:spcBef>
               <a:spcAft>
-                <a:spcPts val="300"/>
-              </a:spcAft>
-              <a:buNone/>
-            </a:pPr>
-            <a:r>
-              <a:rPr lang="en-US" sz="1200" i="1" dirty="0">
-                <a:solidFill>
-                  <a:srgbClr val="1C2833"/>
-                </a:solidFill>
-                <a:latin typeface="Arial" pitchFamily="34" charset="0"/>
-                <a:ea typeface="Arial" pitchFamily="34" charset="-122"/>
-                <a:cs typeface="Arial" pitchFamily="34" charset="-120"/>
-              </a:rPr>
-              <a:t>haridrā</a:t>
-            </a:r>
-            <a:pPr algn="l" indent="0" marL="0">
-              <a:lnSpc>
-                <a:spcPts val="1680"/>
-              </a:lnSpc>
-              <a:spcBef>
-                <a:spcPts val="300"/>
-              </a:spcBef>
-              <a:spcAft>
-                <a:spcPts val="300"/>
-              </a:spcAft>
-              <a:buNone/>
-            </a:pPr>
-            <a:r>
-              <a:rPr lang="en-US" sz="1200" dirty="0">
-                <a:solidFill>
-                  <a:srgbClr val="1C2833"/>
-                </a:solidFill>
-                <a:latin typeface="Arial" pitchFamily="34" charset="0"/>
-                <a:ea typeface="Arial" pitchFamily="34" charset="-122"/>
-                <a:cs typeface="Arial" pitchFamily="34" charset="-120"/>
-              </a:rPr>
-              <a:t> in Ayurveda — standard reference, </a:t>
-            </a:r>
-            <a:pPr algn="l" indent="0" marL="0">
-              <a:lnSpc>
-                <a:spcPts val="1680"/>
-              </a:lnSpc>
-              <a:spcBef>
-                <a:spcPts val="300"/>
-              </a:spcBef>
-              <a:spcAft>
-                <a:spcPts val="300"/>
-              </a:spcAft>
-              <a:buNone/>
-            </a:pPr>
-            <a:r>
-              <a:rPr lang="en-US" sz="1200" i="1" dirty="0">
-                <a:solidFill>
-                  <a:srgbClr val="1C2833"/>
-                </a:solidFill>
-                <a:latin typeface="Arial" pitchFamily="34" charset="0"/>
-                <a:ea typeface="Arial" pitchFamily="34" charset="-122"/>
-                <a:cs typeface="Arial" pitchFamily="34" charset="-120"/>
-              </a:rPr>
-              <a:t>Caraka Saṁhitā</a:t>
-            </a:r>
-            <a:pPr algn="l" indent="0" marL="0">
-              <a:lnSpc>
-                <a:spcPts val="1680"/>
-              </a:lnSpc>
-              <a:spcBef>
-                <a:spcPts val="300"/>
-              </a:spcBef>
-              <a:spcAft>
-                <a:spcPts val="300"/>
-              </a:spcAft>
-              <a:buNone/>
-            </a:pPr>
-            <a:r>
-              <a:rPr lang="en-US" sz="1200" dirty="0">
-                <a:solidFill>
-                  <a:srgbClr val="1C2833"/>
-                </a:solidFill>
-                <a:latin typeface="Arial" pitchFamily="34" charset="0"/>
-                <a:ea typeface="Arial" pitchFamily="34" charset="-122"/>
-                <a:cs typeface="Arial" pitchFamily="34" charset="-120"/>
-              </a:rPr>
-              <a:t> </a:t>
-            </a:r>
-            <a:pPr algn="l" indent="0" marL="0">
-              <a:lnSpc>
-                <a:spcPts val="1680"/>
-              </a:lnSpc>
-              <a:spcBef>
-                <a:spcPts val="300"/>
-              </a:spcBef>
-              <a:spcAft>
-                <a:spcPts val="300"/>
-              </a:spcAft>
-              <a:buNone/>
-            </a:pPr>
-            <a:r>
-              <a:rPr lang="en-US" sz="1200" i="1" dirty="0">
-                <a:solidFill>
-                  <a:srgbClr val="1C2833"/>
-                </a:solidFill>
-                <a:latin typeface="Arial" pitchFamily="34" charset="0"/>
-                <a:ea typeface="Arial" pitchFamily="34" charset="-122"/>
-                <a:cs typeface="Arial" pitchFamily="34" charset="-120"/>
-              </a:rPr>
-              <a:t>Sūtrasthāna</a:t>
-            </a:r>
-            <a:pPr algn="l" indent="0" marL="0">
-              <a:lnSpc>
-                <a:spcPts val="1680"/>
-              </a:lnSpc>
-              <a:spcBef>
-                <a:spcPts val="300"/>
-              </a:spcBef>
-              <a:spcAft>
-                <a:spcPts val="300"/>
-              </a:spcAft>
-              <a:buNone/>
-            </a:pPr>
-            <a:r>
-              <a:rPr lang="en-US" sz="1200" dirty="0">
-                <a:solidFill>
-                  <a:srgbClr val="1C2833"/>
-                </a:solidFill>
-                <a:latin typeface="Arial" pitchFamily="34" charset="0"/>
-                <a:ea typeface="Arial" pitchFamily="34" charset="-122"/>
-                <a:cs typeface="Arial" pitchFamily="34" charset="-120"/>
-              </a:rPr>
-              <a:t> (chapter level only).</a:t>
+                <a:spcPts val="800"/>
+              </a:spcAft>
+              <a:buNone/>
+            </a:pPr>
+            <a:r>
+              <a:rPr lang="en-US" sz="1800" b="1" dirty="0">
+                <a:solidFill>
+                  <a:srgbClr val="FE4447"/>
+                </a:solidFill>
+                <a:latin typeface="Georgia" pitchFamily="34" charset="0"/>
+                <a:ea typeface="Georgia" pitchFamily="34" charset="-122"/>
+                <a:cs typeface="Georgia" pitchFamily="34" charset="-120"/>
+              </a:rPr>
+              <a:t>Teacher notes</a:t>
+            </a:r>
+            <a:endParaRPr lang="en-US" sz="1800" dirty="0"/>
+          </a:p>
+        </p:txBody>
+      </p:sp>
+      <p:sp>
+        <p:nvSpPr>
+          <p:cNvPr id="4" name="Text 2"/>
+          <p:cNvSpPr/>
+          <p:nvPr/>
+        </p:nvSpPr>
+        <p:spPr>
+          <a:xfrm>
+            <a:off x="634901" y="883593"/>
+            <a:ext cx="8102798" cy="1386483"/>
+          </a:xfrm>
+          <a:prstGeom prst="rect">
+            <a:avLst/>
+          </a:prstGeom>
+          <a:noFill/>
+          <a:ln/>
+        </p:spPr>
+        <p:txBody>
+          <a:bodyPr wrap="square" lIns="0" tIns="0" rIns="0" bIns="0" rtlCol="0" anchor="t"/>
+          <a:lstStyle/>
+          <a:p>
+            <a:pPr algn="l" marL="342900" indent="-342900">
+              <a:lnSpc>
+                <a:spcPts val="1620"/>
+              </a:lnSpc>
+              <a:spcAft>
+                <a:spcPts val="300"/>
+              </a:spcAft>
+              <a:buSzPct val="100000"/>
+              <a:buChar char="•"/>
+            </a:pPr>
+            <a:r>
+              <a:rPr lang="en-US" sz="1200" b="1" dirty="0">
+                <a:solidFill>
+                  <a:srgbClr val="1C2833"/>
+                </a:solidFill>
+                <a:latin typeface="Arial" pitchFamily="34" charset="0"/>
+                <a:ea typeface="Arial" pitchFamily="34" charset="-122"/>
+                <a:cs typeface="Arial" pitchFamily="34" charset="-120"/>
+              </a:rPr>
+              <a:t>Stain risk in the classroom is real.</a:t>
+            </a:r>
+            <a:pPr algn="l" indent="0" marL="0">
+              <a:lnSpc>
+                <a:spcPts val="1620"/>
+              </a:lnSpc>
+              <a:spcAft>
+                <a:spcPts val="300"/>
+              </a:spcAft>
+              <a:buNone/>
+            </a:pPr>
+            <a:r>
+              <a:rPr lang="en-US" sz="1200" dirty="0">
+                <a:solidFill>
+                  <a:srgbClr val="1C2833"/>
+                </a:solidFill>
+                <a:latin typeface="Arial" pitchFamily="34" charset="0"/>
+                <a:ea typeface="Arial" pitchFamily="34" charset="-122"/>
+                <a:cs typeface="Arial" pitchFamily="34" charset="-120"/>
+              </a:rPr>
+              <a:t> Cover desks. Have warm water + soap nearby. A fresh curcumin stain on cloth washes out before it sets; once it sets and gets sun, it sticks.</a:t>
+            </a:r>
+            <a:endParaRPr lang="en-US" sz="1200" dirty="0"/>
+          </a:p>
+          <a:p>
+            <a:pPr algn="l" marL="342900" indent="-342900">
+              <a:lnSpc>
+                <a:spcPts val="1620"/>
+              </a:lnSpc>
+              <a:spcAft>
+                <a:spcPts val="300"/>
+              </a:spcAft>
+              <a:buSzPct val="100000"/>
+              <a:buChar char="•"/>
+            </a:pPr>
+            <a:r>
+              <a:rPr lang="en-US" sz="1200" dirty="0">
+                <a:solidFill>
+                  <a:srgbClr val="1C2833"/>
+                </a:solidFill>
+                <a:latin typeface="Arial" pitchFamily="34" charset="0"/>
+                <a:ea typeface="Arial" pitchFamily="34" charset="-122"/>
+                <a:cs typeface="Arial" pitchFamily="34" charset="-120"/>
+              </a:rPr>
+              <a:t>The bioavailability + black pepper story is the </a:t>
+            </a:r>
+            <a:pPr algn="l" indent="0" marL="0">
+              <a:lnSpc>
+                <a:spcPts val="1620"/>
+              </a:lnSpc>
+              <a:spcAft>
+                <a:spcPts val="300"/>
+              </a:spcAft>
+              <a:buNone/>
+            </a:pPr>
+            <a:r>
+              <a:rPr lang="en-US" sz="1200" b="1" dirty="0">
+                <a:solidFill>
+                  <a:srgbClr val="1C2833"/>
+                </a:solidFill>
+                <a:latin typeface="Arial" pitchFamily="34" charset="0"/>
+                <a:ea typeface="Arial" pitchFamily="34" charset="-122"/>
+                <a:cs typeface="Arial" pitchFamily="34" charset="-120"/>
+              </a:rPr>
+              <a:t>single biggest "aha"</a:t>
+            </a:r>
+            <a:pPr algn="l" indent="0" marL="0">
+              <a:lnSpc>
+                <a:spcPts val="1620"/>
+              </a:lnSpc>
+              <a:spcAft>
+                <a:spcPts val="300"/>
+              </a:spcAft>
+              <a:buNone/>
+            </a:pPr>
+            <a:r>
+              <a:rPr lang="en-US" sz="1200" dirty="0">
+                <a:solidFill>
+                  <a:srgbClr val="1C2833"/>
+                </a:solidFill>
+                <a:latin typeface="Arial" pitchFamily="34" charset="0"/>
+                <a:ea typeface="Arial" pitchFamily="34" charset="-122"/>
+                <a:cs typeface="Arial" pitchFamily="34" charset="-120"/>
+              </a:rPr>
+              <a:t> of this module for many students. Their families may have known to use the two together without knowing why. Let students go home and ask.</a:t>
+            </a:r>
+            <a:endParaRPr lang="en-US" sz="1200" dirty="0"/>
+          </a:p>
+          <a:p>
+            <a:pPr algn="l" marL="342900" indent="-342900">
+              <a:lnSpc>
+                <a:spcPts val="1620"/>
+              </a:lnSpc>
+              <a:spcAft>
+                <a:spcPts val="300"/>
+              </a:spcAft>
+              <a:buSzPct val="100000"/>
+              <a:buChar char="•"/>
+            </a:pPr>
+            <a:r>
+              <a:rPr lang="en-US" sz="1200" dirty="0">
+                <a:solidFill>
+                  <a:srgbClr val="1C2833"/>
+                </a:solidFill>
+                <a:latin typeface="Arial" pitchFamily="34" charset="0"/>
+                <a:ea typeface="Arial" pitchFamily="34" charset="-122"/>
+                <a:cs typeface="Arial" pitchFamily="34" charset="-120"/>
+              </a:rPr>
+              <a:t>Don't let the "cancer cure" myth go unaddressed. It's everywhere on social media. Be specific: "lab activity ≠ clinical effect ≠ cure."</a:t>
             </a:r>
             <a:endParaRPr lang="en-US" sz="1200" dirty="0"/>
           </a:p>
@@ -3626,7 +6369,7 @@
                 <a:ea typeface="Georgia" pitchFamily="34" charset="-122"/>
                 <a:cs typeface="Georgia" pitchFamily="34" charset="-120"/>
               </a:rPr>
-              <a:t>Materials</a:t>
+              <a:t>Learning objective</a:t>
             </a:r>
             <a:endParaRPr lang="en-US" sz="1800" dirty="0"/>
           </a:p>
@@ -3641,7 +6384,7 @@
         <p:spPr>
           <a:xfrm>
             <a:off x="406301" y="870942"/>
-            <a:ext cx="8498026" cy="1066354"/>
+            <a:ext cx="8498026" cy="639812"/>
           </a:xfrm>
           <a:prstGeom prst="rect">
             <a:avLst/>
@@ -3674,7 +6417,613 @@
                 <a:ea typeface="Arial" pitchFamily="34" charset="-122"/>
                 <a:cs typeface="Arial" pitchFamily="34" charset="-120"/>
               </a:rPr>
-              <a:t>– Fresh turmeric rhizome (the orange-coloured fingerlike root-like piece) — ideally with a fresh piece cut to show the inside – A small bowl of turmeric powder – A piece of white paper for the staining demo – A small piece of black pepper or a peppermill (for the curcumin-piperine pairing discussion) – Optional, for the demo: warm milk, a small saucepan, turmeric powder, a pinch of pepper, jaggery — to make a single demonstration "golden milk" (subject to school food policy) – Whiteboard</a:t>
+              <a:t>By the end of this lesson, students can identify </a:t>
+            </a:r>
+            <a:pPr algn="l" indent="0" marL="0">
+              <a:lnSpc>
+                <a:spcPts val="1680"/>
+              </a:lnSpc>
+              <a:spcBef>
+                <a:spcPts val="300"/>
+              </a:spcBef>
+              <a:spcAft>
+                <a:spcPts val="300"/>
+              </a:spcAft>
+              <a:buNone/>
+            </a:pPr>
+            <a:r>
+              <a:rPr lang="en-US" sz="1200" i="1" dirty="0">
+                <a:solidFill>
+                  <a:srgbClr val="1C2833"/>
+                </a:solidFill>
+                <a:latin typeface="Arial" pitchFamily="34" charset="0"/>
+                <a:ea typeface="Arial" pitchFamily="34" charset="-122"/>
+                <a:cs typeface="Arial" pitchFamily="34" charset="-120"/>
+              </a:rPr>
+              <a:t>haridrā</a:t>
+            </a:r>
+            <a:pPr algn="l" indent="0" marL="0">
+              <a:lnSpc>
+                <a:spcPts val="1680"/>
+              </a:lnSpc>
+              <a:spcBef>
+                <a:spcPts val="300"/>
+              </a:spcBef>
+              <a:spcAft>
+                <a:spcPts val="300"/>
+              </a:spcAft>
+              <a:buNone/>
+            </a:pPr>
+            <a:r>
+              <a:rPr lang="en-US" sz="1200" dirty="0">
+                <a:solidFill>
+                  <a:srgbClr val="1C2833"/>
+                </a:solidFill>
+                <a:latin typeface="Arial" pitchFamily="34" charset="0"/>
+                <a:ea typeface="Arial" pitchFamily="34" charset="-122"/>
+                <a:cs typeface="Arial" pitchFamily="34" charset="-120"/>
+              </a:rPr>
+              <a:t> (</a:t>
+            </a:r>
+            <a:pPr algn="l" indent="0" marL="0">
+              <a:lnSpc>
+                <a:spcPts val="1680"/>
+              </a:lnSpc>
+              <a:spcBef>
+                <a:spcPts val="300"/>
+              </a:spcBef>
+              <a:spcAft>
+                <a:spcPts val="300"/>
+              </a:spcAft>
+              <a:buNone/>
+            </a:pPr>
+            <a:r>
+              <a:rPr lang="en-US" sz="1200" i="1" dirty="0">
+                <a:solidFill>
+                  <a:srgbClr val="1C2833"/>
+                </a:solidFill>
+                <a:latin typeface="Arial" pitchFamily="34" charset="0"/>
+                <a:ea typeface="Arial" pitchFamily="34" charset="-122"/>
+                <a:cs typeface="Arial" pitchFamily="34" charset="-120"/>
+              </a:rPr>
+              <a:t>Curcuma longa</a:t>
+            </a:r>
+            <a:pPr algn="l" indent="0" marL="0">
+              <a:lnSpc>
+                <a:spcPts val="1680"/>
+              </a:lnSpc>
+              <a:spcBef>
+                <a:spcPts val="300"/>
+              </a:spcBef>
+              <a:spcAft>
+                <a:spcPts val="300"/>
+              </a:spcAft>
+              <a:buNone/>
+            </a:pPr>
+            <a:r>
+              <a:rPr lang="en-US" sz="1200" dirty="0">
+                <a:solidFill>
+                  <a:srgbClr val="1C2833"/>
+                </a:solidFill>
+                <a:latin typeface="Arial" pitchFamily="34" charset="0"/>
+                <a:ea typeface="Arial" pitchFamily="34" charset="-122"/>
+                <a:cs typeface="Arial" pitchFamily="34" charset="-120"/>
+              </a:rPr>
+              <a:t>) as a rhizome (not a root), name </a:t>
+            </a:r>
+            <a:pPr algn="l" indent="0" marL="0">
+              <a:lnSpc>
+                <a:spcPts val="1680"/>
+              </a:lnSpc>
+              <a:spcBef>
+                <a:spcPts val="300"/>
+              </a:spcBef>
+              <a:spcAft>
+                <a:spcPts val="300"/>
+              </a:spcAft>
+              <a:buNone/>
+            </a:pPr>
+            <a:r>
+              <a:rPr lang="en-US" sz="1200" b="1" dirty="0">
+                <a:solidFill>
+                  <a:srgbClr val="1C2833"/>
+                </a:solidFill>
+                <a:latin typeface="Arial" pitchFamily="34" charset="0"/>
+                <a:ea typeface="Arial" pitchFamily="34" charset="-122"/>
+                <a:cs typeface="Arial" pitchFamily="34" charset="-120"/>
+              </a:rPr>
+              <a:t>curcumin</a:t>
+            </a:r>
+            <a:pPr algn="l" indent="0" marL="0">
+              <a:lnSpc>
+                <a:spcPts val="1680"/>
+              </a:lnSpc>
+              <a:spcBef>
+                <a:spcPts val="300"/>
+              </a:spcBef>
+              <a:spcAft>
+                <a:spcPts val="300"/>
+              </a:spcAft>
+              <a:buNone/>
+            </a:pPr>
+            <a:r>
+              <a:rPr lang="en-US" sz="1200" dirty="0">
+                <a:solidFill>
+                  <a:srgbClr val="1C2833"/>
+                </a:solidFill>
+                <a:latin typeface="Arial" pitchFamily="34" charset="0"/>
+                <a:ea typeface="Arial" pitchFamily="34" charset="-122"/>
+                <a:cs typeface="Arial" pitchFamily="34" charset="-120"/>
+              </a:rPr>
+              <a:t> as its principal pigment and active compound, distinguish whole-spice culinary use from concentrated supplement use, and describe one well-supported and one over-claimed use.</a:t>
+            </a:r>
+            <a:endParaRPr lang="en-US" sz="1200" dirty="0"/>
+          </a:p>
+        </p:txBody>
+      </p:sp>
+      <p:sp>
+        <p:nvSpPr>
+          <p:cNvPr id="5" name="Text 3"/>
+          <p:cNvSpPr/>
+          <p:nvPr/>
+        </p:nvSpPr>
+        <p:spPr>
+          <a:xfrm>
+            <a:off x="406301" y="4434929"/>
+            <a:ext cx="8498026" cy="213271"/>
+          </a:xfrm>
+          <a:prstGeom prst="rect">
+            <a:avLst/>
+          </a:prstGeom>
+          <a:noFill/>
+          <a:ln/>
+        </p:spPr>
+        <p:txBody>
+          <a:bodyPr wrap="square" lIns="0" tIns="0" rIns="0" bIns="0" rtlCol="0" anchor="t"/>
+          <a:lstStyle/>
+          <a:p>
+            <a:pPr algn="l" indent="0" marL="0">
+              <a:lnSpc>
+                <a:spcPts val="1680"/>
+              </a:lnSpc>
+              <a:spcBef>
+                <a:spcPts val="300"/>
+              </a:spcBef>
+              <a:spcAft>
+                <a:spcPts val="300"/>
+              </a:spcAft>
+              <a:buNone/>
+            </a:pPr>
+            <a:r>
+              <a:rPr lang="en-US" sz="1200" dirty="0">
+                <a:solidFill>
+                  <a:srgbClr val="1C2833"/>
+                </a:solidFill>
+                <a:latin typeface="Arial" pitchFamily="34" charset="0"/>
+                <a:ea typeface="Arial" pitchFamily="34" charset="-122"/>
+                <a:cs typeface="Arial" pitchFamily="34" charset="-120"/>
+              </a:rPr>
+              <a:t>Middle ·  · IKS Curriculum</a:t>
+            </a:r>
+            <a:endParaRPr lang="en-US" sz="1200" dirty="0"/>
+          </a:p>
+        </p:txBody>
+      </p:sp>
+    </p:spTree>
+  </p:cSld>
+  <p:clrMapOvr>
+    <a:masterClrMapping/>
+  </p:clrMapOvr>
+</p:sld>
+</file>
+
+<file path=ppt/slides/slide20.xml><?xml version="1.0" encoding="utf-8"?>
+<p:sld xmlns:a="http://schemas.openxmlformats.org/drawingml/2006/main" xmlns:r="http://schemas.openxmlformats.org/officeDocument/2006/relationships" xmlns:p="http://schemas.openxmlformats.org/presentationml/2006/main">
+  <p:cSld name="Slide 20">
+    <p:bg>
+      <p:bgPr>
+        <a:solidFill>
+          <a:srgbClr val="FFFFFF"/>
+        </a:solidFill>
+      </p:bgPr>
+    </p:bg>
+    <p:spTree>
+      <p:nvGrpSpPr>
+        <p:cNvPr id="1" name=""/>
+        <p:cNvGrpSpPr/>
+        <p:nvPr/>
+      </p:nvGrpSpPr>
+      <p:grpSpPr>
+        <a:xfrm>
+          <a:off x="0" y="0"/>
+          <a:ext cx="0" cy="0"/>
+          <a:chOff x="0" y="0"/>
+          <a:chExt cx="0" cy="0"/>
+        </a:xfrm>
+      </p:grpSpPr>
+      <p:sp>
+        <p:nvSpPr>
+          <p:cNvPr id="2" name="Text 0"/>
+          <p:cNvSpPr/>
+          <p:nvPr/>
+        </p:nvSpPr>
+        <p:spPr>
+          <a:xfrm>
+            <a:off x="0" y="0"/>
+            <a:ext cx="9144000" cy="101501"/>
+          </a:xfrm>
+          <a:prstGeom prst="rect">
+            <a:avLst/>
+          </a:prstGeom>
+          <a:solidFill>
+            <a:srgbClr val="277884"/>
+          </a:solidFill>
+          <a:ln/>
+        </p:spPr>
+        <p:txBody>
+          <a:bodyPr wrap="square" rtlCol="0" anchor="ctr"/>
+          <a:lstStyle/>
+          <a:p>
+            <a:pPr indent="0" marL="0">
+              <a:buNone/>
+            </a:pPr>
+            <a:endParaRPr lang="en-US" dirty="0"/>
+          </a:p>
+        </p:txBody>
+      </p:sp>
+      <p:sp>
+        <p:nvSpPr>
+          <p:cNvPr id="3" name="Text 1"/>
+          <p:cNvSpPr/>
+          <p:nvPr/>
+        </p:nvSpPr>
+        <p:spPr>
+          <a:xfrm>
+            <a:off x="406301" y="457051"/>
+            <a:ext cx="8498026" cy="274290"/>
+          </a:xfrm>
+          <a:prstGeom prst="rect">
+            <a:avLst/>
+          </a:prstGeom>
+          <a:noFill/>
+          <a:ln/>
+        </p:spPr>
+        <p:txBody>
+          <a:bodyPr wrap="square" lIns="0" tIns="0" rIns="0" bIns="0" rtlCol="0" anchor="t"/>
+          <a:lstStyle/>
+          <a:p>
+            <a:pPr algn="l" indent="0" marL="0">
+              <a:lnSpc>
+                <a:spcPts val="2160"/>
+              </a:lnSpc>
+              <a:spcBef>
+                <a:spcPts val="600"/>
+              </a:spcBef>
+              <a:spcAft>
+                <a:spcPts val="800"/>
+              </a:spcAft>
+              <a:buNone/>
+            </a:pPr>
+            <a:r>
+              <a:rPr lang="en-US" sz="1800" b="1" dirty="0">
+                <a:solidFill>
+                  <a:srgbClr val="FE4447"/>
+                </a:solidFill>
+                <a:latin typeface="Georgia" pitchFamily="34" charset="0"/>
+                <a:ea typeface="Georgia" pitchFamily="34" charset="-122"/>
+                <a:cs typeface="Georgia" pitchFamily="34" charset="-120"/>
+              </a:rPr>
+              <a:t>Citation(s) used in this lesson</a:t>
+            </a:r>
+            <a:endParaRPr lang="en-US" sz="1800" dirty="0"/>
+          </a:p>
+        </p:txBody>
+      </p:sp>
+      <p:sp>
+        <p:nvSpPr>
+          <p:cNvPr id="4" name="Text 2"/>
+          <p:cNvSpPr/>
+          <p:nvPr/>
+        </p:nvSpPr>
+        <p:spPr>
+          <a:xfrm>
+            <a:off x="634901" y="883593"/>
+            <a:ext cx="8102798" cy="1142702"/>
+          </a:xfrm>
+          <a:prstGeom prst="rect">
+            <a:avLst/>
+          </a:prstGeom>
+          <a:noFill/>
+          <a:ln/>
+        </p:spPr>
+        <p:txBody>
+          <a:bodyPr wrap="square" lIns="0" tIns="0" rIns="0" bIns="0" rtlCol="0" anchor="t"/>
+          <a:lstStyle/>
+          <a:p>
+            <a:pPr algn="l" marL="342900" indent="-342900">
+              <a:lnSpc>
+                <a:spcPts val="1620"/>
+              </a:lnSpc>
+              <a:spcAft>
+                <a:spcPts val="300"/>
+              </a:spcAft>
+              <a:buSzPct val="100000"/>
+              <a:buChar char="•"/>
+            </a:pPr>
+            <a:r>
+              <a:rPr lang="en-US" sz="1200" dirty="0">
+                <a:solidFill>
+                  <a:srgbClr val="1C2833"/>
+                </a:solidFill>
+                <a:latin typeface="Arial" pitchFamily="34" charset="0"/>
+                <a:ea typeface="Arial" pitchFamily="34" charset="-122"/>
+                <a:cs typeface="Arial" pitchFamily="34" charset="-120"/>
+              </a:rPr>
+              <a:t>Curcumin chemistry and bioavailability with piperine: well-established in nutrition and ethnopharmacology textbooks. Modern reviews exist in journals such as </a:t>
+            </a:r>
+            <a:pPr algn="l" indent="0" marL="0">
+              <a:lnSpc>
+                <a:spcPts val="1620"/>
+              </a:lnSpc>
+              <a:spcAft>
+                <a:spcPts val="300"/>
+              </a:spcAft>
+              <a:buNone/>
+            </a:pPr>
+            <a:r>
+              <a:rPr lang="en-US" sz="1200" i="1" dirty="0">
+                <a:solidFill>
+                  <a:srgbClr val="1C2833"/>
+                </a:solidFill>
+                <a:latin typeface="Arial" pitchFamily="34" charset="0"/>
+                <a:ea typeface="Arial" pitchFamily="34" charset="-122"/>
+                <a:cs typeface="Arial" pitchFamily="34" charset="-120"/>
+              </a:rPr>
+              <a:t>Foods</a:t>
+            </a:r>
+            <a:pPr algn="l" indent="0" marL="0">
+              <a:lnSpc>
+                <a:spcPts val="1620"/>
+              </a:lnSpc>
+              <a:spcAft>
+                <a:spcPts val="300"/>
+              </a:spcAft>
+              <a:buNone/>
+            </a:pPr>
+            <a:r>
+              <a:rPr lang="en-US" sz="1200" dirty="0">
+                <a:solidFill>
+                  <a:srgbClr val="1C2833"/>
+                </a:solidFill>
+                <a:latin typeface="Arial" pitchFamily="34" charset="0"/>
+                <a:ea typeface="Arial" pitchFamily="34" charset="-122"/>
+                <a:cs typeface="Arial" pitchFamily="34" charset="-120"/>
+              </a:rPr>
+              <a:t>, </a:t>
+            </a:r>
+            <a:pPr algn="l" indent="0" marL="0">
+              <a:lnSpc>
+                <a:spcPts val="1620"/>
+              </a:lnSpc>
+              <a:spcAft>
+                <a:spcPts val="300"/>
+              </a:spcAft>
+              <a:buNone/>
+            </a:pPr>
+            <a:r>
+              <a:rPr lang="en-US" sz="1200" i="1" dirty="0">
+                <a:solidFill>
+                  <a:srgbClr val="1C2833"/>
+                </a:solidFill>
+                <a:latin typeface="Arial" pitchFamily="34" charset="0"/>
+                <a:ea typeface="Arial" pitchFamily="34" charset="-122"/>
+                <a:cs typeface="Arial" pitchFamily="34" charset="-120"/>
+              </a:rPr>
+              <a:t>Nutrients</a:t>
+            </a:r>
+            <a:pPr algn="l" indent="0" marL="0">
+              <a:lnSpc>
+                <a:spcPts val="1620"/>
+              </a:lnSpc>
+              <a:spcAft>
+                <a:spcPts val="300"/>
+              </a:spcAft>
+              <a:buNone/>
+            </a:pPr>
+            <a:r>
+              <a:rPr lang="en-US" sz="1200" dirty="0">
+                <a:solidFill>
+                  <a:srgbClr val="1C2833"/>
+                </a:solidFill>
+                <a:latin typeface="Arial" pitchFamily="34" charset="0"/>
+                <a:ea typeface="Arial" pitchFamily="34" charset="-122"/>
+                <a:cs typeface="Arial" pitchFamily="34" charset="-120"/>
+              </a:rPr>
+              <a:t>, and the </a:t>
+            </a:r>
+            <a:pPr algn="l" indent="0" marL="0">
+              <a:lnSpc>
+                <a:spcPts val="1620"/>
+              </a:lnSpc>
+              <a:spcAft>
+                <a:spcPts val="300"/>
+              </a:spcAft>
+              <a:buNone/>
+            </a:pPr>
+            <a:r>
+              <a:rPr lang="en-US" sz="1200" i="1" dirty="0">
+                <a:solidFill>
+                  <a:srgbClr val="1C2833"/>
+                </a:solidFill>
+                <a:latin typeface="Arial" pitchFamily="34" charset="0"/>
+                <a:ea typeface="Arial" pitchFamily="34" charset="-122"/>
+                <a:cs typeface="Arial" pitchFamily="34" charset="-120"/>
+              </a:rPr>
+              <a:t>Journal of Ethnopharmacology</a:t>
+            </a:r>
+            <a:pPr algn="l" indent="0" marL="0">
+              <a:lnSpc>
+                <a:spcPts val="1620"/>
+              </a:lnSpc>
+              <a:spcAft>
+                <a:spcPts val="300"/>
+              </a:spcAft>
+              <a:buNone/>
+            </a:pPr>
+            <a:r>
+              <a:rPr lang="en-US" sz="1200" dirty="0">
+                <a:solidFill>
+                  <a:srgbClr val="1C2833"/>
+                </a:solidFill>
+                <a:latin typeface="Arial" pitchFamily="34" charset="0"/>
+                <a:ea typeface="Arial" pitchFamily="34" charset="-122"/>
+                <a:cs typeface="Arial" pitchFamily="34" charset="-120"/>
+              </a:rPr>
+              <a:t> — we do not cite a specific paper because RAG verification wasn't available; teachers can search "curcumin piperine bioavailability review" in any indexing database.</a:t>
+            </a:r>
+            <a:endParaRPr lang="en-US" sz="1200" dirty="0"/>
+          </a:p>
+          <a:p>
+            <a:pPr algn="l" marL="342900" indent="-342900">
+              <a:lnSpc>
+                <a:spcPts val="1620"/>
+              </a:lnSpc>
+              <a:spcAft>
+                <a:spcPts val="300"/>
+              </a:spcAft>
+              <a:buSzPct val="100000"/>
+              <a:buChar char="•"/>
+            </a:pPr>
+            <a:r>
+              <a:rPr lang="en-US" sz="1200" dirty="0">
+                <a:solidFill>
+                  <a:srgbClr val="1C2833"/>
+                </a:solidFill>
+                <a:latin typeface="Arial" pitchFamily="34" charset="0"/>
+                <a:ea typeface="Arial" pitchFamily="34" charset="-122"/>
+                <a:cs typeface="Arial" pitchFamily="34" charset="-120"/>
+              </a:rPr>
+              <a:t>Turmeric as </a:t>
+            </a:r>
+            <a:pPr algn="l" indent="0" marL="0">
+              <a:lnSpc>
+                <a:spcPts val="1620"/>
+              </a:lnSpc>
+              <a:spcAft>
+                <a:spcPts val="300"/>
+              </a:spcAft>
+              <a:buNone/>
+            </a:pPr>
+            <a:r>
+              <a:rPr lang="en-US" sz="1200" i="1" dirty="0">
+                <a:solidFill>
+                  <a:srgbClr val="1C2833"/>
+                </a:solidFill>
+                <a:latin typeface="Arial" pitchFamily="34" charset="0"/>
+                <a:ea typeface="Arial" pitchFamily="34" charset="-122"/>
+                <a:cs typeface="Arial" pitchFamily="34" charset="-120"/>
+              </a:rPr>
+              <a:t>haridrā</a:t>
+            </a:r>
+            <a:pPr algn="l" indent="0" marL="0">
+              <a:lnSpc>
+                <a:spcPts val="1620"/>
+              </a:lnSpc>
+              <a:spcAft>
+                <a:spcPts val="300"/>
+              </a:spcAft>
+              <a:buNone/>
+            </a:pPr>
+            <a:r>
+              <a:rPr lang="en-US" sz="1200" dirty="0">
+                <a:solidFill>
+                  <a:srgbClr val="1C2833"/>
+                </a:solidFill>
+                <a:latin typeface="Arial" pitchFamily="34" charset="0"/>
+                <a:ea typeface="Arial" pitchFamily="34" charset="-122"/>
+                <a:cs typeface="Arial" pitchFamily="34" charset="-120"/>
+              </a:rPr>
+              <a:t> in Ayurveda — standard reference, </a:t>
+            </a:r>
+            <a:pPr algn="l" indent="0" marL="0">
+              <a:lnSpc>
+                <a:spcPts val="1620"/>
+              </a:lnSpc>
+              <a:spcAft>
+                <a:spcPts val="300"/>
+              </a:spcAft>
+              <a:buNone/>
+            </a:pPr>
+            <a:r>
+              <a:rPr lang="en-US" sz="1200" i="1" dirty="0">
+                <a:solidFill>
+                  <a:srgbClr val="1C2833"/>
+                </a:solidFill>
+                <a:latin typeface="Arial" pitchFamily="34" charset="0"/>
+                <a:ea typeface="Arial" pitchFamily="34" charset="-122"/>
+                <a:cs typeface="Arial" pitchFamily="34" charset="-120"/>
+              </a:rPr>
+              <a:t>Caraka Saṁhitā</a:t>
+            </a:r>
+            <a:pPr algn="l" indent="0" marL="0">
+              <a:lnSpc>
+                <a:spcPts val="1620"/>
+              </a:lnSpc>
+              <a:spcAft>
+                <a:spcPts val="300"/>
+              </a:spcAft>
+              <a:buNone/>
+            </a:pPr>
+            <a:r>
+              <a:rPr lang="en-US" sz="1200" dirty="0">
+                <a:solidFill>
+                  <a:srgbClr val="1C2833"/>
+                </a:solidFill>
+                <a:latin typeface="Arial" pitchFamily="34" charset="0"/>
+                <a:ea typeface="Arial" pitchFamily="34" charset="-122"/>
+                <a:cs typeface="Arial" pitchFamily="34" charset="-120"/>
+              </a:rPr>
+              <a:t> </a:t>
+            </a:r>
+            <a:pPr algn="l" indent="0" marL="0">
+              <a:lnSpc>
+                <a:spcPts val="1620"/>
+              </a:lnSpc>
+              <a:spcAft>
+                <a:spcPts val="300"/>
+              </a:spcAft>
+              <a:buNone/>
+            </a:pPr>
+            <a:r>
+              <a:rPr lang="en-US" sz="1200" i="1" dirty="0">
+                <a:solidFill>
+                  <a:srgbClr val="1C2833"/>
+                </a:solidFill>
+                <a:latin typeface="Arial" pitchFamily="34" charset="0"/>
+                <a:ea typeface="Arial" pitchFamily="34" charset="-122"/>
+                <a:cs typeface="Arial" pitchFamily="34" charset="-120"/>
+              </a:rPr>
+              <a:t>Sūtrasthāna</a:t>
+            </a:r>
+            <a:pPr algn="l" indent="0" marL="0">
+              <a:lnSpc>
+                <a:spcPts val="1620"/>
+              </a:lnSpc>
+              <a:spcAft>
+                <a:spcPts val="300"/>
+              </a:spcAft>
+              <a:buNone/>
+            </a:pPr>
+            <a:r>
+              <a:rPr lang="en-US" sz="1200" dirty="0">
+                <a:solidFill>
+                  <a:srgbClr val="1C2833"/>
+                </a:solidFill>
+                <a:latin typeface="Arial" pitchFamily="34" charset="0"/>
+                <a:ea typeface="Arial" pitchFamily="34" charset="-122"/>
+                <a:cs typeface="Arial" pitchFamily="34" charset="-120"/>
+              </a:rPr>
+              <a:t> (chapter level only).</a:t>
             </a:r>
             <a:endParaRPr lang="en-US" sz="1200" dirty="0"/>
           </a:p>
@@ -3832,7 +7181,7 @@
                 <a:ea typeface="Georgia" pitchFamily="34" charset="-122"/>
                 <a:cs typeface="Georgia" pitchFamily="34" charset="-120"/>
               </a:rPr>
-              <a:t>Vocabulary introduced today</a:t>
+              <a:t>Materials</a:t>
             </a:r>
             <a:endParaRPr lang="en-US" sz="1800" dirty="0"/>
           </a:p>
@@ -3847,7 +7196,7 @@
         <p:spPr>
           <a:xfrm>
             <a:off x="634901" y="883593"/>
-            <a:ext cx="8102798" cy="769441"/>
+            <a:ext cx="8102798" cy="1912144"/>
           </a:xfrm>
           <a:prstGeom prst="rect">
             <a:avLst/>
@@ -3870,75 +7219,15 @@
               <a:buChar char="•"/>
             </a:pPr>
             <a:r>
-              <a:rPr lang="en-US" sz="1200" i="1" dirty="0">
-                <a:solidFill>
-                  <a:srgbClr val="1C2833"/>
-                </a:solidFill>
-                <a:latin typeface="Arial" pitchFamily="34" charset="0"/>
-                <a:ea typeface="Arial" pitchFamily="34" charset="-122"/>
-                <a:cs typeface="Arial" pitchFamily="34" charset="-120"/>
-              </a:rPr>
-              <a:t>haridrā</a:t>
-            </a:r>
-            <a:pPr algn="l" indent="0" marL="0">
-              <a:lnSpc>
-                <a:spcPts val="1620"/>
-              </a:lnSpc>
-              <a:spcAft>
-                <a:spcPts val="300"/>
-              </a:spcAft>
-              <a:buNone/>
-            </a:pPr>
-            <a:r>
-              <a:rPr lang="en-US" sz="1200" dirty="0">
-                <a:solidFill>
-                  <a:srgbClr val="1C2833"/>
-                </a:solidFill>
-                <a:latin typeface="Arial" pitchFamily="34" charset="0"/>
-                <a:ea typeface="Arial" pitchFamily="34" charset="-122"/>
-                <a:cs typeface="Arial" pitchFamily="34" charset="-120"/>
-              </a:rPr>
-              <a:t> (IAST: haridrā; lit. "the yellow one") — </a:t>
-            </a:r>
-            <a:pPr algn="l" indent="0" marL="0">
-              <a:lnSpc>
-                <a:spcPts val="1620"/>
-              </a:lnSpc>
-              <a:spcAft>
-                <a:spcPts val="300"/>
-              </a:spcAft>
-              <a:buNone/>
-            </a:pPr>
-            <a:r>
-              <a:rPr lang="en-US" sz="1200" i="1" dirty="0">
-                <a:solidFill>
-                  <a:srgbClr val="1C2833"/>
-                </a:solidFill>
-                <a:latin typeface="Arial" pitchFamily="34" charset="0"/>
-                <a:ea typeface="Arial" pitchFamily="34" charset="-122"/>
-                <a:cs typeface="Arial" pitchFamily="34" charset="-120"/>
-              </a:rPr>
-              <a:t>Curcuma longa</a:t>
-            </a:r>
-            <a:pPr algn="l" indent="0" marL="0">
-              <a:lnSpc>
-                <a:spcPts val="1620"/>
-              </a:lnSpc>
-              <a:spcAft>
-                <a:spcPts val="300"/>
-              </a:spcAft>
-              <a:buNone/>
-            </a:pPr>
-            <a:r>
-              <a:rPr lang="en-US" sz="1200" dirty="0">
-                <a:solidFill>
-                  <a:srgbClr val="1C2833"/>
-                </a:solidFill>
-                <a:latin typeface="Arial" pitchFamily="34" charset="0"/>
-                <a:ea typeface="Arial" pitchFamily="34" charset="-122"/>
-                <a:cs typeface="Arial" pitchFamily="34" charset="-120"/>
-              </a:rPr>
-              <a:t>, the turmeric plant.</a:t>
+              <a:rPr lang="en-US" sz="1200" dirty="0">
+                <a:solidFill>
+                  <a:srgbClr val="1C2833"/>
+                </a:solidFill>
+                <a:latin typeface="Arial" pitchFamily="34" charset="0"/>
+                <a:ea typeface="Arial" pitchFamily="34" charset="-122"/>
+                <a:cs typeface="Arial" pitchFamily="34" charset="-120"/>
+              </a:rPr>
+              <a:t>Fresh turmeric rhizome (the orange-coloured fingerlike root-like piece) — ideally with a fresh piece cut to show the inside</a:t>
             </a:r>
             <a:endParaRPr lang="en-US" sz="1200" dirty="0"/>
           </a:p>
@@ -3954,35 +7243,15 @@
               <a:buChar char="•"/>
             </a:pPr>
             <a:r>
-              <a:rPr lang="en-US" sz="1200" b="1" dirty="0">
-                <a:solidFill>
-                  <a:srgbClr val="1C2833"/>
-                </a:solidFill>
-                <a:latin typeface="Arial" pitchFamily="34" charset="0"/>
-                <a:ea typeface="Arial" pitchFamily="34" charset="-122"/>
-                <a:cs typeface="Arial" pitchFamily="34" charset="-120"/>
-              </a:rPr>
-              <a:t>Rhizome</a:t>
-            </a:r>
-            <a:pPr algn="l" indent="0" marL="0">
-              <a:lnSpc>
-                <a:spcPts val="1620"/>
-              </a:lnSpc>
-              <a:spcAft>
-                <a:spcPts val="300"/>
-              </a:spcAft>
-              <a:buNone/>
-            </a:pPr>
-            <a:r>
-              <a:rPr lang="en-US" sz="1200" dirty="0">
-                <a:solidFill>
-                  <a:srgbClr val="1C2833"/>
-                </a:solidFill>
-                <a:latin typeface="Arial" pitchFamily="34" charset="0"/>
-                <a:ea typeface="Arial" pitchFamily="34" charset="-122"/>
-                <a:cs typeface="Arial" pitchFamily="34" charset="-120"/>
-              </a:rPr>
-              <a:t> — an underground horizontal stem (not a root). Distinguishes turmeric and ginger from carrot or beet.</a:t>
+              <a:rPr lang="en-US" sz="1200" dirty="0">
+                <a:solidFill>
+                  <a:srgbClr val="1C2833"/>
+                </a:solidFill>
+                <a:latin typeface="Arial" pitchFamily="34" charset="0"/>
+                <a:ea typeface="Arial" pitchFamily="34" charset="-122"/>
+                <a:cs typeface="Arial" pitchFamily="34" charset="-120"/>
+              </a:rPr>
+              <a:t>A small bowl of turmeric powder</a:t>
             </a:r>
             <a:endParaRPr lang="en-US" sz="1200" dirty="0"/>
           </a:p>
@@ -3998,35 +7267,87 @@
               <a:buChar char="•"/>
             </a:pPr>
             <a:r>
-              <a:rPr lang="en-US" sz="1200" b="1" dirty="0">
-                <a:solidFill>
-                  <a:srgbClr val="1C2833"/>
-                </a:solidFill>
-                <a:latin typeface="Arial" pitchFamily="34" charset="0"/>
-                <a:ea typeface="Arial" pitchFamily="34" charset="-122"/>
-                <a:cs typeface="Arial" pitchFamily="34" charset="-120"/>
-              </a:rPr>
-              <a:t>Curcumin</a:t>
-            </a:r>
-            <a:pPr algn="l" indent="0" marL="0">
-              <a:lnSpc>
-                <a:spcPts val="1620"/>
-              </a:lnSpc>
-              <a:spcAft>
-                <a:spcPts val="300"/>
-              </a:spcAft>
-              <a:buNone/>
-            </a:pPr>
-            <a:r>
-              <a:rPr lang="en-US" sz="1200" dirty="0">
-                <a:solidFill>
-                  <a:srgbClr val="1C2833"/>
-                </a:solidFill>
-                <a:latin typeface="Arial" pitchFamily="34" charset="0"/>
-                <a:ea typeface="Arial" pitchFamily="34" charset="-122"/>
-                <a:cs typeface="Arial" pitchFamily="34" charset="-120"/>
-              </a:rPr>
-              <a:t> — the polyphenol responsible for turmeric's yellow colour and most of its studied biological activity.</a:t>
+              <a:rPr lang="en-US" sz="1200" dirty="0">
+                <a:solidFill>
+                  <a:srgbClr val="1C2833"/>
+                </a:solidFill>
+                <a:latin typeface="Arial" pitchFamily="34" charset="0"/>
+                <a:ea typeface="Arial" pitchFamily="34" charset="-122"/>
+                <a:cs typeface="Arial" pitchFamily="34" charset="-120"/>
+              </a:rPr>
+              <a:t>A piece of white paper for the staining demo</a:t>
+            </a:r>
+            <a:endParaRPr lang="en-US" sz="1200" dirty="0"/>
+          </a:p>
+          <a:p>
+            <a:pPr algn="l" marL="342900" indent="-342900">
+              <a:lnSpc>
+                <a:spcPts val="1620"/>
+              </a:lnSpc>
+              <a:spcAft>
+                <a:spcPts val="300"/>
+              </a:spcAft>
+              <a:buSzPct val="100000"/>
+              <a:buChar char="•"/>
+            </a:pPr>
+            <a:r>
+              <a:rPr lang="en-US" sz="1200" dirty="0">
+                <a:solidFill>
+                  <a:srgbClr val="1C2833"/>
+                </a:solidFill>
+                <a:latin typeface="Arial" pitchFamily="34" charset="0"/>
+                <a:ea typeface="Arial" pitchFamily="34" charset="-122"/>
+                <a:cs typeface="Arial" pitchFamily="34" charset="-120"/>
+              </a:rPr>
+              <a:t>A small piece of black pepper or a peppermill (for the curcumin-piperine pairing discussion)</a:t>
+            </a:r>
+            <a:endParaRPr lang="en-US" sz="1200" dirty="0"/>
+          </a:p>
+          <a:p>
+            <a:pPr algn="l" marL="342900" indent="-342900">
+              <a:lnSpc>
+                <a:spcPts val="1620"/>
+              </a:lnSpc>
+              <a:spcAft>
+                <a:spcPts val="300"/>
+              </a:spcAft>
+              <a:buSzPct val="100000"/>
+              <a:buChar char="•"/>
+            </a:pPr>
+            <a:r>
+              <a:rPr lang="en-US" sz="1200" dirty="0">
+                <a:solidFill>
+                  <a:srgbClr val="1C2833"/>
+                </a:solidFill>
+                <a:latin typeface="Arial" pitchFamily="34" charset="0"/>
+                <a:ea typeface="Arial" pitchFamily="34" charset="-122"/>
+                <a:cs typeface="Arial" pitchFamily="34" charset="-120"/>
+              </a:rPr>
+              <a:t>Optional, for the demo: warm milk, a small saucepan, turmeric powder, a pinch of pepper, jaggery — to make a single demonstration "golden milk" (subject to school food policy)</a:t>
+            </a:r>
+            <a:endParaRPr lang="en-US" sz="1200" dirty="0"/>
+          </a:p>
+          <a:p>
+            <a:pPr algn="l" marL="342900" indent="-342900">
+              <a:lnSpc>
+                <a:spcPts val="1620"/>
+              </a:lnSpc>
+              <a:spcAft>
+                <a:spcPts val="300"/>
+              </a:spcAft>
+              <a:buSzPct val="100000"/>
+              <a:buChar char="•"/>
+            </a:pPr>
+            <a:r>
+              <a:rPr lang="en-US" sz="1200" dirty="0">
+                <a:solidFill>
+                  <a:srgbClr val="1C2833"/>
+                </a:solidFill>
+                <a:latin typeface="Arial" pitchFamily="34" charset="0"/>
+                <a:ea typeface="Arial" pitchFamily="34" charset="-122"/>
+                <a:cs typeface="Arial" pitchFamily="34" charset="-120"/>
+              </a:rPr>
+              <a:t>Whiteboard</a:t>
             </a:r>
             <a:endParaRPr lang="en-US" sz="1200" dirty="0"/>
           </a:p>
@@ -4184,7 +7505,7 @@
                 <a:ea typeface="Georgia" pitchFamily="34" charset="-122"/>
                 <a:cs typeface="Georgia" pitchFamily="34" charset="-120"/>
               </a:rPr>
-              <a:t>Lesson flow</a:t>
+              <a:t>Vocabulary introduced today</a:t>
             </a:r>
             <a:endParaRPr lang="en-US" sz="1800" dirty="0"/>
           </a:p>
@@ -4193,6 +7514,200 @@
       <p:sp>
         <p:nvSpPr>
           <p:cNvPr id="4" name="Text 2"/>
+          <p:cNvSpPr/>
+          <p:nvPr/>
+        </p:nvSpPr>
+        <p:spPr>
+          <a:xfrm>
+            <a:off x="634901" y="883593"/>
+            <a:ext cx="8102798" cy="769441"/>
+          </a:xfrm>
+          <a:prstGeom prst="rect">
+            <a:avLst/>
+          </a:prstGeom>
+          <a:noFill/>
+          <a:ln/>
+        </p:spPr>
+        <p:txBody>
+          <a:bodyPr wrap="square" lIns="0" tIns="0" rIns="0" bIns="0" rtlCol="0" anchor="t"/>
+          <a:lstStyle/>
+          <a:p>
+            <a:pPr algn="l" marL="342900" indent="-342900">
+              <a:lnSpc>
+                <a:spcPts val="1620"/>
+              </a:lnSpc>
+              <a:spcAft>
+                <a:spcPts val="300"/>
+              </a:spcAft>
+              <a:buSzPct val="100000"/>
+              <a:buChar char="•"/>
+            </a:pPr>
+            <a:r>
+              <a:rPr lang="en-US" sz="1200" i="1" dirty="0">
+                <a:solidFill>
+                  <a:srgbClr val="1C2833"/>
+                </a:solidFill>
+                <a:latin typeface="Arial" pitchFamily="34" charset="0"/>
+                <a:ea typeface="Arial" pitchFamily="34" charset="-122"/>
+                <a:cs typeface="Arial" pitchFamily="34" charset="-120"/>
+              </a:rPr>
+              <a:t>haridrā</a:t>
+            </a:r>
+            <a:pPr algn="l" indent="0" marL="0">
+              <a:lnSpc>
+                <a:spcPts val="1620"/>
+              </a:lnSpc>
+              <a:spcAft>
+                <a:spcPts val="300"/>
+              </a:spcAft>
+              <a:buNone/>
+            </a:pPr>
+            <a:r>
+              <a:rPr lang="en-US" sz="1200" dirty="0">
+                <a:solidFill>
+                  <a:srgbClr val="1C2833"/>
+                </a:solidFill>
+                <a:latin typeface="Arial" pitchFamily="34" charset="0"/>
+                <a:ea typeface="Arial" pitchFamily="34" charset="-122"/>
+                <a:cs typeface="Arial" pitchFamily="34" charset="-120"/>
+              </a:rPr>
+              <a:t> (IAST: haridrā; lit. "the yellow one") — </a:t>
+            </a:r>
+            <a:pPr algn="l" indent="0" marL="0">
+              <a:lnSpc>
+                <a:spcPts val="1620"/>
+              </a:lnSpc>
+              <a:spcAft>
+                <a:spcPts val="300"/>
+              </a:spcAft>
+              <a:buNone/>
+            </a:pPr>
+            <a:r>
+              <a:rPr lang="en-US" sz="1200" i="1" dirty="0">
+                <a:solidFill>
+                  <a:srgbClr val="1C2833"/>
+                </a:solidFill>
+                <a:latin typeface="Arial" pitchFamily="34" charset="0"/>
+                <a:ea typeface="Arial" pitchFamily="34" charset="-122"/>
+                <a:cs typeface="Arial" pitchFamily="34" charset="-120"/>
+              </a:rPr>
+              <a:t>Curcuma longa</a:t>
+            </a:r>
+            <a:pPr algn="l" indent="0" marL="0">
+              <a:lnSpc>
+                <a:spcPts val="1620"/>
+              </a:lnSpc>
+              <a:spcAft>
+                <a:spcPts val="300"/>
+              </a:spcAft>
+              <a:buNone/>
+            </a:pPr>
+            <a:r>
+              <a:rPr lang="en-US" sz="1200" dirty="0">
+                <a:solidFill>
+                  <a:srgbClr val="1C2833"/>
+                </a:solidFill>
+                <a:latin typeface="Arial" pitchFamily="34" charset="0"/>
+                <a:ea typeface="Arial" pitchFamily="34" charset="-122"/>
+                <a:cs typeface="Arial" pitchFamily="34" charset="-120"/>
+              </a:rPr>
+              <a:t>, the turmeric plant.</a:t>
+            </a:r>
+            <a:endParaRPr lang="en-US" sz="1200" dirty="0"/>
+          </a:p>
+          <a:p>
+            <a:pPr algn="l" marL="342900" indent="-342900">
+              <a:lnSpc>
+                <a:spcPts val="1620"/>
+              </a:lnSpc>
+              <a:spcAft>
+                <a:spcPts val="300"/>
+              </a:spcAft>
+              <a:buSzPct val="100000"/>
+              <a:buChar char="•"/>
+            </a:pPr>
+            <a:r>
+              <a:rPr lang="en-US" sz="1200" b="1" dirty="0">
+                <a:solidFill>
+                  <a:srgbClr val="1C2833"/>
+                </a:solidFill>
+                <a:latin typeface="Arial" pitchFamily="34" charset="0"/>
+                <a:ea typeface="Arial" pitchFamily="34" charset="-122"/>
+                <a:cs typeface="Arial" pitchFamily="34" charset="-120"/>
+              </a:rPr>
+              <a:t>Rhizome</a:t>
+            </a:r>
+            <a:pPr algn="l" indent="0" marL="0">
+              <a:lnSpc>
+                <a:spcPts val="1620"/>
+              </a:lnSpc>
+              <a:spcAft>
+                <a:spcPts val="300"/>
+              </a:spcAft>
+              <a:buNone/>
+            </a:pPr>
+            <a:r>
+              <a:rPr lang="en-US" sz="1200" dirty="0">
+                <a:solidFill>
+                  <a:srgbClr val="1C2833"/>
+                </a:solidFill>
+                <a:latin typeface="Arial" pitchFamily="34" charset="0"/>
+                <a:ea typeface="Arial" pitchFamily="34" charset="-122"/>
+                <a:cs typeface="Arial" pitchFamily="34" charset="-120"/>
+              </a:rPr>
+              <a:t> — an underground horizontal stem (not a root). Distinguishes turmeric and ginger from carrot or beet.</a:t>
+            </a:r>
+            <a:endParaRPr lang="en-US" sz="1200" dirty="0"/>
+          </a:p>
+          <a:p>
+            <a:pPr algn="l" marL="342900" indent="-342900">
+              <a:lnSpc>
+                <a:spcPts val="1620"/>
+              </a:lnSpc>
+              <a:spcAft>
+                <a:spcPts val="300"/>
+              </a:spcAft>
+              <a:buSzPct val="100000"/>
+              <a:buChar char="•"/>
+            </a:pPr>
+            <a:r>
+              <a:rPr lang="en-US" sz="1200" b="1" dirty="0">
+                <a:solidFill>
+                  <a:srgbClr val="1C2833"/>
+                </a:solidFill>
+                <a:latin typeface="Arial" pitchFamily="34" charset="0"/>
+                <a:ea typeface="Arial" pitchFamily="34" charset="-122"/>
+                <a:cs typeface="Arial" pitchFamily="34" charset="-120"/>
+              </a:rPr>
+              <a:t>Curcumin</a:t>
+            </a:r>
+            <a:pPr algn="l" indent="0" marL="0">
+              <a:lnSpc>
+                <a:spcPts val="1620"/>
+              </a:lnSpc>
+              <a:spcAft>
+                <a:spcPts val="300"/>
+              </a:spcAft>
+              <a:buNone/>
+            </a:pPr>
+            <a:r>
+              <a:rPr lang="en-US" sz="1200" dirty="0">
+                <a:solidFill>
+                  <a:srgbClr val="1C2833"/>
+                </a:solidFill>
+                <a:latin typeface="Arial" pitchFamily="34" charset="0"/>
+                <a:ea typeface="Arial" pitchFamily="34" charset="-122"/>
+                <a:cs typeface="Arial" pitchFamily="34" charset="-120"/>
+              </a:rPr>
+              <a:t> — the polyphenol responsible for turmeric's yellow colour and most of its studied biological activity.</a:t>
+            </a:r>
+            <a:endParaRPr lang="en-US" sz="1200" dirty="0"/>
+          </a:p>
+        </p:txBody>
+      </p:sp>
+      <p:sp>
+        <p:nvSpPr>
+          <p:cNvPr id="5" name="Text 3"/>
           <p:cNvSpPr/>
           <p:nvPr/>
         </p:nvSpPr>
@@ -4342,7 +7857,7 @@
                 <a:ea typeface="Georgia" pitchFamily="34" charset="-122"/>
                 <a:cs typeface="Georgia" pitchFamily="34" charset="-120"/>
               </a:rPr>
-              <a:t>Warm-up (5 min)</a:t>
+              <a:t>Lesson flow</a:t>
             </a:r>
             <a:endParaRPr lang="en-US" sz="1800" dirty="0"/>
           </a:p>
@@ -4351,219 +7866,6 @@
       <p:sp>
         <p:nvSpPr>
           <p:cNvPr id="4" name="Text 2"/>
-          <p:cNvSpPr/>
-          <p:nvPr/>
-        </p:nvSpPr>
-        <p:spPr>
-          <a:xfrm>
-            <a:off x="406301" y="870942"/>
-            <a:ext cx="8498026" cy="213271"/>
-          </a:xfrm>
-          <a:prstGeom prst="rect">
-            <a:avLst/>
-          </a:prstGeom>
-          <a:noFill/>
-          <a:ln/>
-        </p:spPr>
-        <p:txBody>
-          <a:bodyPr wrap="square" lIns="0" tIns="0" rIns="0" bIns="0" rtlCol="0" anchor="t"/>
-          <a:lstStyle/>
-          <a:p>
-            <a:pPr algn="l" indent="0" marL="0">
-              <a:lnSpc>
-                <a:spcPts val="1680"/>
-              </a:lnSpc>
-              <a:spcBef>
-                <a:spcPts val="300"/>
-              </a:spcBef>
-              <a:spcAft>
-                <a:spcPts val="300"/>
-              </a:spcAft>
-              <a:buNone/>
-            </a:pPr>
-            <a:r>
-              <a:rPr lang="en-US" sz="1200" dirty="0">
-                <a:solidFill>
-                  <a:srgbClr val="1C2833"/>
-                </a:solidFill>
-                <a:latin typeface="Arial" pitchFamily="34" charset="0"/>
-                <a:ea typeface="Arial" pitchFamily="34" charset="-122"/>
-                <a:cs typeface="Arial" pitchFamily="34" charset="-120"/>
-              </a:rPr>
-              <a:t>Hold up the fresh turmeric rhizome. Slice a tiny piece — bright orange interior. Pass on a small plate so students can see.</a:t>
-            </a:r>
-            <a:endParaRPr lang="en-US" sz="1200" dirty="0"/>
-          </a:p>
-        </p:txBody>
-      </p:sp>
-      <p:sp>
-        <p:nvSpPr>
-          <p:cNvPr id="5" name="Text 3"/>
-          <p:cNvSpPr/>
-          <p:nvPr/>
-        </p:nvSpPr>
-        <p:spPr>
-          <a:xfrm>
-            <a:off x="406301" y="1160413"/>
-            <a:ext cx="8498026" cy="426541"/>
-          </a:xfrm>
-          <a:prstGeom prst="rect">
-            <a:avLst/>
-          </a:prstGeom>
-          <a:noFill/>
-          <a:ln/>
-        </p:spPr>
-        <p:txBody>
-          <a:bodyPr wrap="square" lIns="0" tIns="0" rIns="0" bIns="0" rtlCol="0" anchor="t"/>
-          <a:lstStyle/>
-          <a:p>
-            <a:pPr algn="l" indent="0" marL="0">
-              <a:lnSpc>
-                <a:spcPts val="1680"/>
-              </a:lnSpc>
-              <a:spcBef>
-                <a:spcPts val="300"/>
-              </a:spcBef>
-              <a:spcAft>
-                <a:spcPts val="300"/>
-              </a:spcAft>
-              <a:buNone/>
-            </a:pPr>
-            <a:r>
-              <a:rPr lang="en-US" sz="1200" i="1" dirty="0">
-                <a:solidFill>
-                  <a:srgbClr val="1C2833"/>
-                </a:solidFill>
-                <a:latin typeface="Arial" pitchFamily="34" charset="0"/>
-                <a:ea typeface="Arial" pitchFamily="34" charset="-122"/>
-                <a:cs typeface="Arial" pitchFamily="34" charset="-120"/>
-              </a:rPr>
-              <a:t>"Hands up — who used turmeric in something you ate yesterday?"</a:t>
-            </a:r>
-            <a:pPr algn="l" indent="0" marL="0">
-              <a:lnSpc>
-                <a:spcPts val="1680"/>
-              </a:lnSpc>
-              <a:spcBef>
-                <a:spcPts val="300"/>
-              </a:spcBef>
-              <a:spcAft>
-                <a:spcPts val="300"/>
-              </a:spcAft>
-              <a:buNone/>
-            </a:pPr>
-            <a:r>
-              <a:rPr lang="en-US" sz="1200" dirty="0">
-                <a:solidFill>
-                  <a:srgbClr val="1C2833"/>
-                </a:solidFill>
-                <a:latin typeface="Arial" pitchFamily="34" charset="0"/>
-                <a:ea typeface="Arial" pitchFamily="34" charset="-122"/>
-                <a:cs typeface="Arial" pitchFamily="34" charset="-120"/>
-              </a:rPr>
-              <a:t> (Almost everyone.) </a:t>
-            </a:r>
-            <a:pPr algn="l" indent="0" marL="0">
-              <a:lnSpc>
-                <a:spcPts val="1680"/>
-              </a:lnSpc>
-              <a:spcBef>
-                <a:spcPts val="300"/>
-              </a:spcBef>
-              <a:spcAft>
-                <a:spcPts val="300"/>
-              </a:spcAft>
-              <a:buNone/>
-            </a:pPr>
-            <a:r>
-              <a:rPr lang="en-US" sz="1200" i="1" dirty="0">
-                <a:solidFill>
-                  <a:srgbClr val="1C2833"/>
-                </a:solidFill>
-                <a:latin typeface="Arial" pitchFamily="34" charset="0"/>
-                <a:ea typeface="Arial" pitchFamily="34" charset="-122"/>
-                <a:cs typeface="Arial" pitchFamily="34" charset="-120"/>
-              </a:rPr>
-              <a:t>"Hands up — who knows that the bright yellow colour is one specific molecule?"</a:t>
-            </a:r>
-            <a:pPr algn="l" indent="0" marL="0">
-              <a:lnSpc>
-                <a:spcPts val="1680"/>
-              </a:lnSpc>
-              <a:spcBef>
-                <a:spcPts val="300"/>
-              </a:spcBef>
-              <a:spcAft>
-                <a:spcPts val="300"/>
-              </a:spcAft>
-              <a:buNone/>
-            </a:pPr>
-            <a:r>
-              <a:rPr lang="en-US" sz="1200" dirty="0">
-                <a:solidFill>
-                  <a:srgbClr val="1C2833"/>
-                </a:solidFill>
-                <a:latin typeface="Arial" pitchFamily="34" charset="0"/>
-                <a:ea typeface="Arial" pitchFamily="34" charset="-122"/>
-                <a:cs typeface="Arial" pitchFamily="34" charset="-120"/>
-              </a:rPr>
-              <a:t> (Almost nobody.)</a:t>
-            </a:r>
-            <a:endParaRPr lang="en-US" sz="1200" dirty="0"/>
-          </a:p>
-        </p:txBody>
-      </p:sp>
-      <p:sp>
-        <p:nvSpPr>
-          <p:cNvPr id="6" name="Text 4"/>
-          <p:cNvSpPr/>
-          <p:nvPr/>
-        </p:nvSpPr>
-        <p:spPr>
-          <a:xfrm>
-            <a:off x="406301" y="1663154"/>
-            <a:ext cx="8498026" cy="213271"/>
-          </a:xfrm>
-          <a:prstGeom prst="rect">
-            <a:avLst/>
-          </a:prstGeom>
-          <a:noFill/>
-          <a:ln/>
-        </p:spPr>
-        <p:txBody>
-          <a:bodyPr wrap="square" lIns="0" tIns="0" rIns="0" bIns="0" rtlCol="0" anchor="t"/>
-          <a:lstStyle/>
-          <a:p>
-            <a:pPr algn="l" indent="0" marL="0">
-              <a:lnSpc>
-                <a:spcPts val="1680"/>
-              </a:lnSpc>
-              <a:spcBef>
-                <a:spcPts val="300"/>
-              </a:spcBef>
-              <a:spcAft>
-                <a:spcPts val="300"/>
-              </a:spcAft>
-              <a:buNone/>
-            </a:pPr>
-            <a:r>
-              <a:rPr lang="en-US" sz="1200" dirty="0">
-                <a:solidFill>
-                  <a:srgbClr val="1C2833"/>
-                </a:solidFill>
-                <a:latin typeface="Arial" pitchFamily="34" charset="0"/>
-                <a:ea typeface="Arial" pitchFamily="34" charset="-122"/>
-                <a:cs typeface="Arial" pitchFamily="34" charset="-120"/>
-              </a:rPr>
-              <a:t>That's today's hook: a single molecule is responsible for almost everything turmeric is famous for.</a:t>
-            </a:r>
-            <a:endParaRPr lang="en-US" sz="1200" dirty="0"/>
-          </a:p>
-        </p:txBody>
-      </p:sp>
-      <p:sp>
-        <p:nvSpPr>
-          <p:cNvPr id="7" name="Text 5"/>
           <p:cNvSpPr/>
           <p:nvPr/>
         </p:nvSpPr>
@@ -4680,7 +7982,7 @@
         <p:spPr>
           <a:xfrm>
             <a:off x="406301" y="457051"/>
-            <a:ext cx="8498026" cy="548580"/>
+            <a:ext cx="8498026" cy="274290"/>
           </a:xfrm>
           <a:prstGeom prst="rect">
             <a:avLst/>
@@ -4713,7 +8015,7 @@
                 <a:ea typeface="Georgia" pitchFamily="34" charset="-122"/>
                 <a:cs typeface="Georgia" pitchFamily="34" charset="-120"/>
               </a:rPr>
-              <a:t>Activity (15 min) — Golden-milk demonstration (or recipe-card if no cooking allowed)</a:t>
+              <a:t>Warm-up (5 min)</a:t>
             </a:r>
             <a:endParaRPr lang="en-US" sz="1800" dirty="0"/>
           </a:p>
@@ -4727,8 +8029,8 @@
         </p:nvSpPr>
         <p:spPr>
           <a:xfrm>
-            <a:off x="406301" y="1145232"/>
-            <a:ext cx="8498026" cy="639812"/>
+            <a:off x="406301" y="870942"/>
+            <a:ext cx="8498026" cy="213271"/>
           </a:xfrm>
           <a:prstGeom prst="rect">
             <a:avLst/>
@@ -4753,130 +8055,15 @@
               <a:buNone/>
             </a:pPr>
             <a:r>
-              <a:rPr lang="en-US" sz="1200" b="1" dirty="0">
-                <a:solidFill>
-                  <a:srgbClr val="1C2833"/>
-                </a:solidFill>
-                <a:latin typeface="Arial" pitchFamily="34" charset="0"/>
-                <a:ea typeface="Arial" pitchFamily="34" charset="-122"/>
-                <a:cs typeface="Arial" pitchFamily="34" charset="-120"/>
-              </a:rPr>
-              <a:t>If cooking is permitted:</a:t>
-            </a:r>
-            <a:pPr algn="l" indent="0" marL="0">
-              <a:lnSpc>
-                <a:spcPts val="1680"/>
-              </a:lnSpc>
-              <a:spcBef>
-                <a:spcPts val="300"/>
-              </a:spcBef>
-              <a:spcAft>
-                <a:spcPts val="300"/>
-              </a:spcAft>
-              <a:buNone/>
-            </a:pPr>
-            <a:r>
-              <a:rPr lang="en-US" sz="1200" dirty="0">
-                <a:solidFill>
-                  <a:srgbClr val="1C2833"/>
-                </a:solidFill>
-                <a:latin typeface="Arial" pitchFamily="34" charset="0"/>
-                <a:ea typeface="Arial" pitchFamily="34" charset="-122"/>
-                <a:cs typeface="Arial" pitchFamily="34" charset="-120"/>
-              </a:rPr>
-              <a:t> – Teacher prepares a single demo cup: 200 ml warm milk + ¼ tsp turmeric powder + tiny pinch black pepper + jaggery to taste. Warm gently (do </a:t>
-            </a:r>
-            <a:pPr algn="l" indent="0" marL="0">
-              <a:lnSpc>
-                <a:spcPts val="1680"/>
-              </a:lnSpc>
-              <a:spcBef>
-                <a:spcPts val="300"/>
-              </a:spcBef>
-              <a:spcAft>
-                <a:spcPts val="300"/>
-              </a:spcAft>
-              <a:buNone/>
-            </a:pPr>
-            <a:r>
-              <a:rPr lang="en-US" sz="1200" b="1" dirty="0">
-                <a:solidFill>
-                  <a:srgbClr val="1C2833"/>
-                </a:solidFill>
-                <a:latin typeface="Arial" pitchFamily="34" charset="0"/>
-                <a:ea typeface="Arial" pitchFamily="34" charset="-122"/>
-                <a:cs typeface="Arial" pitchFamily="34" charset="-120"/>
-              </a:rPr>
-              <a:t>not</a:t>
-            </a:r>
-            <a:pPr algn="l" indent="0" marL="0">
-              <a:lnSpc>
-                <a:spcPts val="1680"/>
-              </a:lnSpc>
-              <a:spcBef>
-                <a:spcPts val="300"/>
-              </a:spcBef>
-              <a:spcAft>
-                <a:spcPts val="300"/>
-              </a:spcAft>
-              <a:buNone/>
-            </a:pPr>
-            <a:r>
-              <a:rPr lang="en-US" sz="1200" dirty="0">
-                <a:solidFill>
-                  <a:srgbClr val="1C2833"/>
-                </a:solidFill>
-                <a:latin typeface="Arial" pitchFamily="34" charset="0"/>
-                <a:ea typeface="Arial" pitchFamily="34" charset="-122"/>
-                <a:cs typeface="Arial" pitchFamily="34" charset="-120"/>
-              </a:rPr>
-              <a:t> boil). – Don't drink in class. </a:t>
-            </a:r>
-            <a:pPr algn="l" indent="0" marL="0">
-              <a:lnSpc>
-                <a:spcPts val="1680"/>
-              </a:lnSpc>
-              <a:spcBef>
-                <a:spcPts val="300"/>
-              </a:spcBef>
-              <a:spcAft>
-                <a:spcPts val="300"/>
-              </a:spcAft>
-              <a:buNone/>
-            </a:pPr>
-            <a:r>
-              <a:rPr lang="en-US" sz="1200" b="1" dirty="0">
-                <a:solidFill>
-                  <a:srgbClr val="1C2833"/>
-                </a:solidFill>
-                <a:latin typeface="Arial" pitchFamily="34" charset="0"/>
-                <a:ea typeface="Arial" pitchFamily="34" charset="-122"/>
-                <a:cs typeface="Arial" pitchFamily="34" charset="-120"/>
-              </a:rPr>
-              <a:t>The point is the recipe, not the consumption.</a:t>
-            </a:r>
-            <a:pPr algn="l" indent="0" marL="0">
-              <a:lnSpc>
-                <a:spcPts val="1680"/>
-              </a:lnSpc>
-              <a:spcBef>
-                <a:spcPts val="300"/>
-              </a:spcBef>
-              <a:spcAft>
-                <a:spcPts val="300"/>
-              </a:spcAft>
-              <a:buNone/>
-            </a:pPr>
-            <a:r>
-              <a:rPr lang="en-US" sz="1200" dirty="0">
-                <a:solidFill>
-                  <a:srgbClr val="1C2833"/>
-                </a:solidFill>
-                <a:latin typeface="Arial" pitchFamily="34" charset="0"/>
-                <a:ea typeface="Arial" pitchFamily="34" charset="-122"/>
-                <a:cs typeface="Arial" pitchFamily="34" charset="-120"/>
-              </a:rPr>
-              <a:t> Or, prepare a cooled small tasting cup and offer to those without dairy/curcumin/dietary concerns.</a:t>
+              <a:rPr lang="en-US" sz="1200" dirty="0">
+                <a:solidFill>
+                  <a:srgbClr val="1C2833"/>
+                </a:solidFill>
+                <a:latin typeface="Arial" pitchFamily="34" charset="0"/>
+                <a:ea typeface="Arial" pitchFamily="34" charset="-122"/>
+                <a:cs typeface="Arial" pitchFamily="34" charset="-120"/>
+              </a:rPr>
+              <a:t>Hold up the fresh turmeric rhizome. Slice a tiny piece — bright orange interior. Pass on a small plate so students can see.</a:t>
             </a:r>
             <a:endParaRPr lang="en-US" sz="1200" dirty="0"/>
           </a:p>
@@ -4890,216 +8077,7 @@
         </p:nvSpPr>
         <p:spPr>
           <a:xfrm>
-            <a:off x="406301" y="1861245"/>
-            <a:ext cx="8498026" cy="639812"/>
-          </a:xfrm>
-          <a:prstGeom prst="rect">
-            <a:avLst/>
-          </a:prstGeom>
-          <a:noFill/>
-          <a:ln/>
-        </p:spPr>
-        <p:txBody>
-          <a:bodyPr wrap="square" lIns="0" tIns="0" rIns="0" bIns="0" rtlCol="0" anchor="t"/>
-          <a:lstStyle/>
-          <a:p>
-            <a:pPr algn="l" indent="0" marL="0">
-              <a:lnSpc>
-                <a:spcPts val="1680"/>
-              </a:lnSpc>
-              <a:spcBef>
-                <a:spcPts val="300"/>
-              </a:spcBef>
-              <a:spcAft>
-                <a:spcPts val="300"/>
-              </a:spcAft>
-              <a:buNone/>
-            </a:pPr>
-            <a:r>
-              <a:rPr lang="en-US" sz="1200" b="1" dirty="0">
-                <a:solidFill>
-                  <a:srgbClr val="1C2833"/>
-                </a:solidFill>
-                <a:latin typeface="Arial" pitchFamily="34" charset="0"/>
-                <a:ea typeface="Arial" pitchFamily="34" charset="-122"/>
-                <a:cs typeface="Arial" pitchFamily="34" charset="-120"/>
-              </a:rPr>
-              <a:t>If cooking is not permitted (or as a complement):</a:t>
-            </a:r>
-            <a:pPr algn="l" indent="0" marL="0">
-              <a:lnSpc>
-                <a:spcPts val="1680"/>
-              </a:lnSpc>
-              <a:spcBef>
-                <a:spcPts val="300"/>
-              </a:spcBef>
-              <a:spcAft>
-                <a:spcPts val="300"/>
-              </a:spcAft>
-              <a:buNone/>
-            </a:pPr>
-            <a:r>
-              <a:rPr lang="en-US" sz="1200" dirty="0">
-                <a:solidFill>
-                  <a:srgbClr val="1C2833"/>
-                </a:solidFill>
-                <a:latin typeface="Arial" pitchFamily="34" charset="0"/>
-                <a:ea typeface="Arial" pitchFamily="34" charset="-122"/>
-                <a:cs typeface="Arial" pitchFamily="34" charset="-120"/>
-              </a:rPr>
-              <a:t> – Each pair writes out a recipe card: ingredients, quantities, why each is there. – Specifically: </a:t>
-            </a:r>
-            <a:pPr algn="l" indent="0" marL="0">
-              <a:lnSpc>
-                <a:spcPts val="1680"/>
-              </a:lnSpc>
-              <a:spcBef>
-                <a:spcPts val="300"/>
-              </a:spcBef>
-              <a:spcAft>
-                <a:spcPts val="300"/>
-              </a:spcAft>
-              <a:buNone/>
-            </a:pPr>
-            <a:r>
-              <a:rPr lang="en-US" sz="1200" i="1" dirty="0">
-                <a:solidFill>
-                  <a:srgbClr val="1C2833"/>
-                </a:solidFill>
-                <a:latin typeface="Arial" pitchFamily="34" charset="0"/>
-                <a:ea typeface="Arial" pitchFamily="34" charset="-122"/>
-                <a:cs typeface="Arial" pitchFamily="34" charset="-120"/>
-              </a:rPr>
-              <a:t>why pepper?</a:t>
-            </a:r>
-            <a:pPr algn="l" indent="0" marL="0">
-              <a:lnSpc>
-                <a:spcPts val="1680"/>
-              </a:lnSpc>
-              <a:spcBef>
-                <a:spcPts val="300"/>
-              </a:spcBef>
-              <a:spcAft>
-                <a:spcPts val="300"/>
-              </a:spcAft>
-              <a:buNone/>
-            </a:pPr>
-            <a:r>
-              <a:rPr lang="en-US" sz="1200" dirty="0">
-                <a:solidFill>
-                  <a:srgbClr val="1C2833"/>
-                </a:solidFill>
-                <a:latin typeface="Arial" pitchFamily="34" charset="0"/>
-                <a:ea typeface="Arial" pitchFamily="34" charset="-122"/>
-                <a:cs typeface="Arial" pitchFamily="34" charset="-120"/>
-              </a:rPr>
-              <a:t> (bioavailability) </a:t>
-            </a:r>
-            <a:pPr algn="l" indent="0" marL="0">
-              <a:lnSpc>
-                <a:spcPts val="1680"/>
-              </a:lnSpc>
-              <a:spcBef>
-                <a:spcPts val="300"/>
-              </a:spcBef>
-              <a:spcAft>
-                <a:spcPts val="300"/>
-              </a:spcAft>
-              <a:buNone/>
-            </a:pPr>
-            <a:r>
-              <a:rPr lang="en-US" sz="1200" i="1" dirty="0">
-                <a:solidFill>
-                  <a:srgbClr val="1C2833"/>
-                </a:solidFill>
-                <a:latin typeface="Arial" pitchFamily="34" charset="0"/>
-                <a:ea typeface="Arial" pitchFamily="34" charset="-122"/>
-                <a:cs typeface="Arial" pitchFamily="34" charset="-120"/>
-              </a:rPr>
-              <a:t>why warm not hot?</a:t>
-            </a:r>
-            <a:pPr algn="l" indent="0" marL="0">
-              <a:lnSpc>
-                <a:spcPts val="1680"/>
-              </a:lnSpc>
-              <a:spcBef>
-                <a:spcPts val="300"/>
-              </a:spcBef>
-              <a:spcAft>
-                <a:spcPts val="300"/>
-              </a:spcAft>
-              <a:buNone/>
-            </a:pPr>
-            <a:r>
-              <a:rPr lang="en-US" sz="1200" dirty="0">
-                <a:solidFill>
-                  <a:srgbClr val="1C2833"/>
-                </a:solidFill>
-                <a:latin typeface="Arial" pitchFamily="34" charset="0"/>
-                <a:ea typeface="Arial" pitchFamily="34" charset="-122"/>
-                <a:cs typeface="Arial" pitchFamily="34" charset="-120"/>
-              </a:rPr>
-              <a:t> (palatable; also avoids breakdown) </a:t>
-            </a:r>
-            <a:pPr algn="l" indent="0" marL="0">
-              <a:lnSpc>
-                <a:spcPts val="1680"/>
-              </a:lnSpc>
-              <a:spcBef>
-                <a:spcPts val="300"/>
-              </a:spcBef>
-              <a:spcAft>
-                <a:spcPts val="300"/>
-              </a:spcAft>
-              <a:buNone/>
-            </a:pPr>
-            <a:r>
-              <a:rPr lang="en-US" sz="1200" i="1" dirty="0">
-                <a:solidFill>
-                  <a:srgbClr val="1C2833"/>
-                </a:solidFill>
-                <a:latin typeface="Arial" pitchFamily="34" charset="0"/>
-                <a:ea typeface="Arial" pitchFamily="34" charset="-122"/>
-                <a:cs typeface="Arial" pitchFamily="34" charset="-120"/>
-              </a:rPr>
-              <a:t>why jaggery not white sugar?</a:t>
-            </a:r>
-            <a:pPr algn="l" indent="0" marL="0">
-              <a:lnSpc>
-                <a:spcPts val="1680"/>
-              </a:lnSpc>
-              <a:spcBef>
-                <a:spcPts val="300"/>
-              </a:spcBef>
-              <a:spcAft>
-                <a:spcPts val="300"/>
-              </a:spcAft>
-              <a:buNone/>
-            </a:pPr>
-            <a:r>
-              <a:rPr lang="en-US" sz="1200" dirty="0">
-                <a:solidFill>
-                  <a:srgbClr val="1C2833"/>
-                </a:solidFill>
-                <a:latin typeface="Arial" pitchFamily="34" charset="0"/>
-                <a:ea typeface="Arial" pitchFamily="34" charset="-122"/>
-                <a:cs typeface="Arial" pitchFamily="34" charset="-120"/>
-              </a:rPr>
-              <a:t> (cultural preference; jaggery is unrefined cane sugar; no major chemistry difference for this purpose).</a:t>
-            </a:r>
-            <a:endParaRPr lang="en-US" sz="1200" dirty="0"/>
-          </a:p>
-        </p:txBody>
-      </p:sp>
-      <p:sp>
-        <p:nvSpPr>
-          <p:cNvPr id="6" name="Text 4"/>
-          <p:cNvSpPr/>
-          <p:nvPr/>
-        </p:nvSpPr>
-        <p:spPr>
-          <a:xfrm>
-            <a:off x="406301" y="2577257"/>
+            <a:off x="406301" y="1160413"/>
             <a:ext cx="8498026" cy="426541"/>
           </a:xfrm>
           <a:prstGeom prst="rect">
@@ -5125,15 +8103,15 @@
               <a:buNone/>
             </a:pPr>
             <a:r>
-              <a:rPr lang="en-US" sz="1200" dirty="0">
-                <a:solidFill>
-                  <a:srgbClr val="1C2833"/>
-                </a:solidFill>
-                <a:latin typeface="Arial" pitchFamily="34" charset="0"/>
-                <a:ea typeface="Arial" pitchFamily="34" charset="-122"/>
-                <a:cs typeface="Arial" pitchFamily="34" charset="-120"/>
-              </a:rPr>
-              <a:t>Either way: 5 minutes of write-up on a reflection slip — </a:t>
+              <a:rPr lang="en-US" sz="1200" i="1" dirty="0">
+                <a:solidFill>
+                  <a:srgbClr val="1C2833"/>
+                </a:solidFill>
+                <a:latin typeface="Arial" pitchFamily="34" charset="0"/>
+                <a:ea typeface="Arial" pitchFamily="34" charset="-122"/>
+                <a:cs typeface="Arial" pitchFamily="34" charset="-120"/>
+              </a:rPr>
+              <a:t>"Hands up — who used turmeric in something you ate yesterday?"</a:t>
             </a:r>
             <a:pPr algn="l" indent="0" marL="0">
               <a:lnSpc>
@@ -5148,6 +8126,29 @@
               <a:buNone/>
             </a:pPr>
             <a:r>
+              <a:rPr lang="en-US" sz="1200" dirty="0">
+                <a:solidFill>
+                  <a:srgbClr val="1C2833"/>
+                </a:solidFill>
+                <a:latin typeface="Arial" pitchFamily="34" charset="0"/>
+                <a:ea typeface="Arial" pitchFamily="34" charset="-122"/>
+                <a:cs typeface="Arial" pitchFamily="34" charset="-120"/>
+              </a:rPr>
+              <a:t> (Almost everyone.) </a:t>
+            </a:r>
+            <a:pPr algn="l" indent="0" marL="0">
+              <a:lnSpc>
+                <a:spcPts val="1680"/>
+              </a:lnSpc>
+              <a:spcBef>
+                <a:spcPts val="300"/>
+              </a:spcBef>
+              <a:spcAft>
+                <a:spcPts val="300"/>
+              </a:spcAft>
+              <a:buNone/>
+            </a:pPr>
+            <a:r>
               <a:rPr lang="en-US" sz="1200" i="1" dirty="0">
                 <a:solidFill>
                   <a:srgbClr val="1C2833"/>
@@ -5156,7 +8157,78 @@
                 <a:ea typeface="Arial" pitchFamily="34" charset="-122"/>
                 <a:cs typeface="Arial" pitchFamily="34" charset="-120"/>
               </a:rPr>
-              <a:t>"What did you learn today about claims around turmeric? Pick the most surprising thing."</a:t>
+              <a:t>"Hands up — who knows that the bright yellow colour is one specific molecule?"</a:t>
+            </a:r>
+            <a:pPr algn="l" indent="0" marL="0">
+              <a:lnSpc>
+                <a:spcPts val="1680"/>
+              </a:lnSpc>
+              <a:spcBef>
+                <a:spcPts val="300"/>
+              </a:spcBef>
+              <a:spcAft>
+                <a:spcPts val="300"/>
+              </a:spcAft>
+              <a:buNone/>
+            </a:pPr>
+            <a:r>
+              <a:rPr lang="en-US" sz="1200" dirty="0">
+                <a:solidFill>
+                  <a:srgbClr val="1C2833"/>
+                </a:solidFill>
+                <a:latin typeface="Arial" pitchFamily="34" charset="0"/>
+                <a:ea typeface="Arial" pitchFamily="34" charset="-122"/>
+                <a:cs typeface="Arial" pitchFamily="34" charset="-120"/>
+              </a:rPr>
+              <a:t> (Almost nobody.)</a:t>
+            </a:r>
+            <a:endParaRPr lang="en-US" sz="1200" dirty="0"/>
+          </a:p>
+        </p:txBody>
+      </p:sp>
+      <p:sp>
+        <p:nvSpPr>
+          <p:cNvPr id="6" name="Text 4"/>
+          <p:cNvSpPr/>
+          <p:nvPr/>
+        </p:nvSpPr>
+        <p:spPr>
+          <a:xfrm>
+            <a:off x="406301" y="1663154"/>
+            <a:ext cx="8498026" cy="213271"/>
+          </a:xfrm>
+          <a:prstGeom prst="rect">
+            <a:avLst/>
+          </a:prstGeom>
+          <a:noFill/>
+          <a:ln/>
+        </p:spPr>
+        <p:txBody>
+          <a:bodyPr wrap="square" lIns="0" tIns="0" rIns="0" bIns="0" rtlCol="0" anchor="t"/>
+          <a:lstStyle/>
+          <a:p>
+            <a:pPr algn="l" indent="0" marL="0">
+              <a:lnSpc>
+                <a:spcPts val="1680"/>
+              </a:lnSpc>
+              <a:spcBef>
+                <a:spcPts val="300"/>
+              </a:spcBef>
+              <a:spcAft>
+                <a:spcPts val="300"/>
+              </a:spcAft>
+              <a:buNone/>
+            </a:pPr>
+            <a:r>
+              <a:rPr lang="en-US" sz="1200" dirty="0">
+                <a:solidFill>
+                  <a:srgbClr val="1C2833"/>
+                </a:solidFill>
+                <a:latin typeface="Arial" pitchFamily="34" charset="0"/>
+                <a:ea typeface="Arial" pitchFamily="34" charset="-122"/>
+                <a:cs typeface="Arial" pitchFamily="34" charset="-120"/>
+              </a:rPr>
+              <a:t>That's today's hook: a single molecule is responsible for almost everything turmeric is famous for.</a:t>
             </a:r>
             <a:endParaRPr lang="en-US" sz="1200" dirty="0"/>
           </a:p>
@@ -5314,7 +8386,7 @@
                 <a:ea typeface="Georgia" pitchFamily="34" charset="-122"/>
                 <a:cs typeface="Georgia" pitchFamily="34" charset="-120"/>
               </a:rPr>
-              <a:t>Wrap-up (5 min)</a:t>
+              <a:t>Core (20 min)</a:t>
             </a:r>
             <a:endParaRPr lang="en-US" sz="1800" dirty="0"/>
           </a:p>
@@ -5328,8 +8400,8 @@
         </p:nvSpPr>
         <p:spPr>
           <a:xfrm>
-            <a:off x="406301" y="870942"/>
-            <a:ext cx="8498026" cy="853083"/>
+            <a:off x="634901" y="883593"/>
+            <a:ext cx="8102798" cy="281880"/>
           </a:xfrm>
           <a:prstGeom prst="rect">
             <a:avLst/>
@@ -5341,40 +8413,15 @@
           <a:bodyPr wrap="square" lIns="0" tIns="0" rIns="0" bIns="0" rtlCol="0" anchor="t"/>
           <a:lstStyle/>
           <a:p>
-            <a:pPr algn="l" indent="0" marL="0">
-              <a:lnSpc>
-                <a:spcPts val="1680"/>
-              </a:lnSpc>
-              <a:spcBef>
-                <a:spcPts val="300"/>
-              </a:spcBef>
-              <a:spcAft>
-                <a:spcPts val="300"/>
-              </a:spcAft>
-              <a:buNone/>
-            </a:pPr>
-            <a:r>
-              <a:rPr lang="en-US" sz="1200" dirty="0">
-                <a:solidFill>
-                  <a:srgbClr val="1C2833"/>
-                </a:solidFill>
-                <a:latin typeface="Arial" pitchFamily="34" charset="0"/>
-                <a:ea typeface="Arial" pitchFamily="34" charset="-122"/>
-                <a:cs typeface="Arial" pitchFamily="34" charset="-120"/>
-              </a:rPr>
-              <a:t>– Restate the safety rule. Add the turmeric-specific note: </a:t>
-            </a:r>
-            <a:pPr algn="l" indent="0" marL="0">
-              <a:lnSpc>
-                <a:spcPts val="1680"/>
-              </a:lnSpc>
-              <a:spcBef>
-                <a:spcPts val="300"/>
-              </a:spcBef>
-              <a:spcAft>
-                <a:spcPts val="300"/>
-              </a:spcAft>
-              <a:buNone/>
+            <a:pPr algn="l" marL="342900" indent="-342900">
+              <a:lnSpc>
+                <a:spcPts val="1620"/>
+              </a:lnSpc>
+              <a:spcAft>
+                <a:spcPts val="300"/>
+              </a:spcAft>
+              <a:buSzPct val="100000"/>
+              <a:buChar char="•"/>
             </a:pPr>
             <a:r>
               <a:rPr lang="en-US" sz="1200" b="1" dirty="0">
@@ -5385,53 +8432,27 @@
                 <a:ea typeface="Arial" pitchFamily="34" charset="-122"/>
                 <a:cs typeface="Arial" pitchFamily="34" charset="-120"/>
               </a:rPr>
-              <a:t>turmeric supplements at multi-gram daily doses have caused liver issues in some individuals, particularly when combined with other supplements.</a:t>
-            </a:r>
-            <a:pPr algn="l" indent="0" marL="0">
-              <a:lnSpc>
-                <a:spcPts val="1680"/>
-              </a:lnSpc>
-              <a:spcBef>
-                <a:spcPts val="300"/>
-              </a:spcBef>
-              <a:spcAft>
-                <a:spcPts val="300"/>
-              </a:spcAft>
-              <a:buNone/>
-            </a:pPr>
-            <a:r>
-              <a:rPr lang="en-US" sz="1200" dirty="0">
-                <a:solidFill>
-                  <a:srgbClr val="1C2833"/>
-                </a:solidFill>
-                <a:latin typeface="Arial" pitchFamily="34" charset="0"/>
-                <a:ea typeface="Arial" pitchFamily="34" charset="-122"/>
-                <a:cs typeface="Arial" pitchFamily="34" charset="-120"/>
-              </a:rPr>
-              <a:t> Culinary use in food is not the same as supplement use. – Preview Day 5: </a:t>
-            </a:r>
-            <a:pPr algn="l" indent="0" marL="0">
-              <a:lnSpc>
-                <a:spcPts val="1680"/>
-              </a:lnSpc>
-              <a:spcBef>
-                <a:spcPts val="300"/>
-              </a:spcBef>
-              <a:spcAft>
-                <a:spcPts val="300"/>
-              </a:spcAft>
-              <a:buNone/>
-            </a:pPr>
-            <a:r>
-              <a:rPr lang="en-US" sz="1200" i="1" dirty="0">
-                <a:solidFill>
-                  <a:srgbClr val="1C2833"/>
-                </a:solidFill>
-                <a:latin typeface="Arial" pitchFamily="34" charset="0"/>
-                <a:ea typeface="Arial" pitchFamily="34" charset="-122"/>
-                <a:cs typeface="Arial" pitchFamily="34" charset="-120"/>
-              </a:rPr>
-              <a:t>"Tomorrow, ginger — the kitchen rhizome that's also a key ingredient in many cold-and-flu home remedies."</a:t>
+              <a:t>Identify it — rhizome, not root.</a:t>
+            </a:r>
+            <a:pPr algn="l" indent="0" marL="0">
+              <a:lnSpc>
+                <a:spcPts val="1620"/>
+              </a:lnSpc>
+              <a:spcAft>
+                <a:spcPts val="300"/>
+              </a:spcAft>
+              <a:buNone/>
+            </a:pPr>
+            <a:r>
+              <a:rPr lang="en-US" sz="1200" dirty="0">
+                <a:solidFill>
+                  <a:srgbClr val="1C2833"/>
+                </a:solidFill>
+                <a:latin typeface="Arial" pitchFamily="34" charset="0"/>
+                <a:ea typeface="Arial" pitchFamily="34" charset="-122"/>
+                <a:cs typeface="Arial" pitchFamily="34" charset="-120"/>
+              </a:rPr>
+              <a:t> Important distinction:</a:t>
             </a:r>
             <a:endParaRPr lang="en-US" sz="1200" dirty="0"/>
           </a:p>
@@ -5440,6 +8461,204 @@
       <p:sp>
         <p:nvSpPr>
           <p:cNvPr id="5" name="Text 3"/>
+          <p:cNvSpPr/>
+          <p:nvPr/>
+        </p:nvSpPr>
+        <p:spPr>
+          <a:xfrm>
+            <a:off x="634901" y="1266974"/>
+            <a:ext cx="8102798" cy="1013222"/>
+          </a:xfrm>
+          <a:prstGeom prst="rect">
+            <a:avLst/>
+          </a:prstGeom>
+          <a:noFill/>
+          <a:ln/>
+        </p:spPr>
+        <p:txBody>
+          <a:bodyPr wrap="square" lIns="0" tIns="0" rIns="0" bIns="0" rtlCol="0" anchor="t"/>
+          <a:lstStyle/>
+          <a:p>
+            <a:pPr algn="l" marL="342900" indent="-342900">
+              <a:lnSpc>
+                <a:spcPts val="1620"/>
+              </a:lnSpc>
+              <a:spcAft>
+                <a:spcPts val="300"/>
+              </a:spcAft>
+              <a:buSzPct val="100000"/>
+              <a:buChar char="•"/>
+            </a:pPr>
+            <a:r>
+              <a:rPr lang="en-US" sz="1200" dirty="0">
+                <a:solidFill>
+                  <a:srgbClr val="1C2833"/>
+                </a:solidFill>
+                <a:latin typeface="Arial" pitchFamily="34" charset="0"/>
+                <a:ea typeface="Arial" pitchFamily="34" charset="-122"/>
+                <a:cs typeface="Arial" pitchFamily="34" charset="-120"/>
+              </a:rPr>
+              <a:t>A </a:t>
+            </a:r>
+            <a:pPr algn="l" indent="0" marL="0">
+              <a:lnSpc>
+                <a:spcPts val="1620"/>
+              </a:lnSpc>
+              <a:spcAft>
+                <a:spcPts val="300"/>
+              </a:spcAft>
+              <a:buNone/>
+            </a:pPr>
+            <a:r>
+              <a:rPr lang="en-US" sz="1200" b="1" dirty="0">
+                <a:solidFill>
+                  <a:srgbClr val="1C2833"/>
+                </a:solidFill>
+                <a:latin typeface="Arial" pitchFamily="34" charset="0"/>
+                <a:ea typeface="Arial" pitchFamily="34" charset="-122"/>
+                <a:cs typeface="Arial" pitchFamily="34" charset="-120"/>
+              </a:rPr>
+              <a:t>root</a:t>
+            </a:r>
+            <a:pPr algn="l" indent="0" marL="0">
+              <a:lnSpc>
+                <a:spcPts val="1620"/>
+              </a:lnSpc>
+              <a:spcAft>
+                <a:spcPts val="300"/>
+              </a:spcAft>
+              <a:buNone/>
+            </a:pPr>
+            <a:r>
+              <a:rPr lang="en-US" sz="1200" dirty="0">
+                <a:solidFill>
+                  <a:srgbClr val="1C2833"/>
+                </a:solidFill>
+                <a:latin typeface="Arial" pitchFamily="34" charset="0"/>
+                <a:ea typeface="Arial" pitchFamily="34" charset="-122"/>
+                <a:cs typeface="Arial" pitchFamily="34" charset="-120"/>
+              </a:rPr>
+              <a:t> absorbs water and nutrients (carrot, beetroot).</a:t>
+            </a:r>
+            <a:endParaRPr lang="en-US" sz="1200" dirty="0"/>
+          </a:p>
+          <a:p>
+            <a:pPr algn="l" marL="342900" indent="-342900">
+              <a:lnSpc>
+                <a:spcPts val="1620"/>
+              </a:lnSpc>
+              <a:spcAft>
+                <a:spcPts val="300"/>
+              </a:spcAft>
+              <a:buSzPct val="100000"/>
+              <a:buChar char="•"/>
+            </a:pPr>
+            <a:r>
+              <a:rPr lang="en-US" sz="1200" dirty="0">
+                <a:solidFill>
+                  <a:srgbClr val="1C2833"/>
+                </a:solidFill>
+                <a:latin typeface="Arial" pitchFamily="34" charset="0"/>
+                <a:ea typeface="Arial" pitchFamily="34" charset="-122"/>
+                <a:cs typeface="Arial" pitchFamily="34" charset="-120"/>
+              </a:rPr>
+              <a:t>A </a:t>
+            </a:r>
+            <a:pPr algn="l" indent="0" marL="0">
+              <a:lnSpc>
+                <a:spcPts val="1620"/>
+              </a:lnSpc>
+              <a:spcAft>
+                <a:spcPts val="300"/>
+              </a:spcAft>
+              <a:buNone/>
+            </a:pPr>
+            <a:r>
+              <a:rPr lang="en-US" sz="1200" b="1" dirty="0">
+                <a:solidFill>
+                  <a:srgbClr val="1C2833"/>
+                </a:solidFill>
+                <a:latin typeface="Arial" pitchFamily="34" charset="0"/>
+                <a:ea typeface="Arial" pitchFamily="34" charset="-122"/>
+                <a:cs typeface="Arial" pitchFamily="34" charset="-120"/>
+              </a:rPr>
+              <a:t>rhizome</a:t>
+            </a:r>
+            <a:pPr algn="l" indent="0" marL="0">
+              <a:lnSpc>
+                <a:spcPts val="1620"/>
+              </a:lnSpc>
+              <a:spcAft>
+                <a:spcPts val="300"/>
+              </a:spcAft>
+              <a:buNone/>
+            </a:pPr>
+            <a:r>
+              <a:rPr lang="en-US" sz="1200" dirty="0">
+                <a:solidFill>
+                  <a:srgbClr val="1C2833"/>
+                </a:solidFill>
+                <a:latin typeface="Arial" pitchFamily="34" charset="0"/>
+                <a:ea typeface="Arial" pitchFamily="34" charset="-122"/>
+                <a:cs typeface="Arial" pitchFamily="34" charset="-120"/>
+              </a:rPr>
+              <a:t> is an underground stem that stores starch and produces new shoots (turmeric, ginger, ginger lily, bamboo).</a:t>
+            </a:r>
+            <a:endParaRPr lang="en-US" sz="1200" dirty="0"/>
+          </a:p>
+          <a:p>
+            <a:pPr algn="l" marL="342900" indent="-342900">
+              <a:lnSpc>
+                <a:spcPts val="1620"/>
+              </a:lnSpc>
+              <a:spcAft>
+                <a:spcPts val="300"/>
+              </a:spcAft>
+              <a:buSzPct val="100000"/>
+              <a:buChar char="•"/>
+            </a:pPr>
+            <a:r>
+              <a:rPr lang="en-US" sz="1200" dirty="0">
+                <a:solidFill>
+                  <a:srgbClr val="1C2833"/>
+                </a:solidFill>
+                <a:latin typeface="Arial" pitchFamily="34" charset="0"/>
+                <a:ea typeface="Arial" pitchFamily="34" charset="-122"/>
+                <a:cs typeface="Arial" pitchFamily="34" charset="-120"/>
+              </a:rPr>
+              <a:t>Turmeric rhizomes are fingerlike, with skin that's pale brown to grey on the outside and bright orange on the inside.</a:t>
+            </a:r>
+            <a:endParaRPr lang="en-US" sz="1200" dirty="0"/>
+          </a:p>
+          <a:p>
+            <a:pPr algn="l" marL="342900" indent="-342900">
+              <a:lnSpc>
+                <a:spcPts val="1620"/>
+              </a:lnSpc>
+              <a:spcAft>
+                <a:spcPts val="300"/>
+              </a:spcAft>
+              <a:buSzPct val="100000"/>
+              <a:buChar char="•"/>
+            </a:pPr>
+            <a:r>
+              <a:rPr lang="en-US" sz="1200" dirty="0">
+                <a:solidFill>
+                  <a:srgbClr val="1C2833"/>
+                </a:solidFill>
+                <a:latin typeface="Arial" pitchFamily="34" charset="0"/>
+                <a:ea typeface="Arial" pitchFamily="34" charset="-122"/>
+                <a:cs typeface="Arial" pitchFamily="34" charset="-120"/>
+              </a:rPr>
+              <a:t>The plant above ground has long, broad green leaves — similar to ginger and to canna lily.</a:t>
+            </a:r>
+            <a:endParaRPr lang="en-US" sz="1200" dirty="0"/>
+          </a:p>
+        </p:txBody>
+      </p:sp>
+      <p:sp>
+        <p:nvSpPr>
+          <p:cNvPr id="6" name="Text 4"/>
           <p:cNvSpPr/>
           <p:nvPr/>
         </p:nvSpPr>
@@ -5589,7 +8808,7 @@
                 <a:ea typeface="Georgia" pitchFamily="34" charset="-122"/>
                 <a:cs typeface="Georgia" pitchFamily="34" charset="-120"/>
               </a:rPr>
-              <a:t>Student-facing content</a:t>
+              <a:t>Core (20 min) (cont.)</a:t>
             </a:r>
             <a:endParaRPr lang="en-US" sz="1800" dirty="0"/>
           </a:p>
@@ -5603,61 +8822,8 @@
         </p:nvSpPr>
         <p:spPr>
           <a:xfrm>
-            <a:off x="406301" y="883593"/>
-            <a:ext cx="8331398" cy="3343275"/>
-          </a:xfrm>
-          <a:prstGeom prst="rect">
-            <a:avLst/>
-          </a:prstGeom>
-          <a:solidFill>
-            <a:srgbClr val="F4F8F9"/>
-          </a:solidFill>
-          <a:ln/>
-        </p:spPr>
-        <p:txBody>
-          <a:bodyPr wrap="square" rtlCol="0" anchor="ctr"/>
-          <a:lstStyle/>
-          <a:p>
-            <a:pPr indent="0" marL="0">
-              <a:buNone/>
-            </a:pPr>
-            <a:endParaRPr lang="en-US" dirty="0"/>
-          </a:p>
-        </p:txBody>
-      </p:sp>
-      <p:sp>
-        <p:nvSpPr>
-          <p:cNvPr id="5" name="Shape 3"/>
-          <p:cNvSpPr/>
-          <p:nvPr/>
-        </p:nvSpPr>
-        <p:spPr>
-          <a:xfrm>
-            <a:off x="434876" y="883593"/>
-            <a:ext cx="0" cy="3343275"/>
-          </a:xfrm>
-          <a:prstGeom prst="line">
-            <a:avLst/>
-          </a:prstGeom>
-          <a:noFill/>
-          <a:ln w="57150">
-            <a:solidFill>
-              <a:srgbClr val="FE4447"/>
-            </a:solidFill>
-            <a:prstDash val="solid"/>
-          </a:ln>
-        </p:spPr>
-      </p:sp>
-      <p:sp>
-        <p:nvSpPr>
-          <p:cNvPr id="6" name="Text 4"/>
-          <p:cNvSpPr/>
-          <p:nvPr/>
-        </p:nvSpPr>
-        <p:spPr>
-          <a:xfrm>
-            <a:off x="692051" y="1074093"/>
-            <a:ext cx="7973389" cy="230981"/>
+            <a:off x="634901" y="883593"/>
+            <a:ext cx="8102798" cy="281880"/>
           </a:xfrm>
           <a:prstGeom prst="rect">
             <a:avLst/>
@@ -5669,112 +8835,61 @@
           <a:bodyPr wrap="square" lIns="0" tIns="0" rIns="0" bIns="0" rtlCol="0" anchor="t"/>
           <a:lstStyle/>
           <a:p>
-            <a:pPr algn="l" indent="0" marL="0">
-              <a:lnSpc>
-                <a:spcPts val="1820"/>
-              </a:lnSpc>
-              <a:spcBef>
-                <a:spcPts val="300"/>
-              </a:spcBef>
-              <a:spcAft>
-                <a:spcPts val="300"/>
-              </a:spcAft>
-              <a:buNone/>
-            </a:pPr>
-            <a:r>
-              <a:rPr lang="en-US" sz="1300" b="1" i="1" dirty="0">
-                <a:solidFill>
-                  <a:srgbClr val="1C2833"/>
-                </a:solidFill>
-                <a:latin typeface="Georgia" pitchFamily="34" charset="0"/>
-                <a:ea typeface="Georgia" pitchFamily="34" charset="-122"/>
-                <a:cs typeface="Georgia" pitchFamily="34" charset="-120"/>
-              </a:rPr>
-              <a:t>Haridrā</a:t>
-            </a:r>
-            <a:pPr algn="l" indent="0" marL="0">
-              <a:lnSpc>
-                <a:spcPts val="1820"/>
-              </a:lnSpc>
-              <a:spcBef>
-                <a:spcPts val="300"/>
-              </a:spcBef>
-              <a:spcAft>
-                <a:spcPts val="300"/>
-              </a:spcAft>
-              <a:buNone/>
-            </a:pPr>
-            <a:r>
-              <a:rPr lang="en-US" sz="1300" dirty="0">
-                <a:solidFill>
-                  <a:srgbClr val="1C2833"/>
-                </a:solidFill>
-                <a:latin typeface="Georgia" pitchFamily="34" charset="0"/>
-                <a:ea typeface="Georgia" pitchFamily="34" charset="-122"/>
-                <a:cs typeface="Georgia" pitchFamily="34" charset="-120"/>
-              </a:rPr>
-              <a:t> (</a:t>
-            </a:r>
-            <a:pPr algn="l" indent="0" marL="0">
-              <a:lnSpc>
-                <a:spcPts val="1820"/>
-              </a:lnSpc>
-              <a:spcBef>
-                <a:spcPts val="300"/>
-              </a:spcBef>
-              <a:spcAft>
-                <a:spcPts val="300"/>
-              </a:spcAft>
-              <a:buNone/>
-            </a:pPr>
-            <a:r>
-              <a:rPr lang="en-US" sz="1300" i="1" dirty="0">
-                <a:solidFill>
-                  <a:srgbClr val="1C2833"/>
-                </a:solidFill>
-                <a:latin typeface="Georgia" pitchFamily="34" charset="0"/>
-                <a:ea typeface="Georgia" pitchFamily="34" charset="-122"/>
-                <a:cs typeface="Georgia" pitchFamily="34" charset="-120"/>
-              </a:rPr>
-              <a:t>Curcuma longa</a:t>
-            </a:r>
-            <a:pPr algn="l" indent="0" marL="0">
-              <a:lnSpc>
-                <a:spcPts val="1820"/>
-              </a:lnSpc>
-              <a:spcBef>
-                <a:spcPts val="300"/>
-              </a:spcBef>
-              <a:spcAft>
-                <a:spcPts val="300"/>
-              </a:spcAft>
-              <a:buNone/>
-            </a:pPr>
-            <a:r>
-              <a:rPr lang="en-US" sz="1300" dirty="0">
-                <a:solidFill>
-                  <a:srgbClr val="1C2833"/>
-                </a:solidFill>
-                <a:latin typeface="Georgia" pitchFamily="34" charset="0"/>
-                <a:ea typeface="Georgia" pitchFamily="34" charset="-122"/>
-                <a:cs typeface="Georgia" pitchFamily="34" charset="-120"/>
-              </a:rPr>
-              <a:t>) — known in English as turmeric, in Hindi as haldi.</a:t>
-            </a:r>
-            <a:endParaRPr lang="en-US" sz="1300" dirty="0"/>
-          </a:p>
-        </p:txBody>
-      </p:sp>
-      <p:sp>
-        <p:nvSpPr>
-          <p:cNvPr id="7" name="Text 5"/>
+            <a:pPr algn="l" marL="342900" indent="-342900">
+              <a:lnSpc>
+                <a:spcPts val="1620"/>
+              </a:lnSpc>
+              <a:spcAft>
+                <a:spcPts val="300"/>
+              </a:spcAft>
+              <a:buSzPct val="100000"/>
+              <a:buChar char="•"/>
+            </a:pPr>
+            <a:r>
+              <a:rPr lang="en-US" sz="1200" b="1" dirty="0">
+                <a:solidFill>
+                  <a:srgbClr val="1C2833"/>
+                </a:solidFill>
+                <a:latin typeface="Arial" pitchFamily="34" charset="0"/>
+                <a:ea typeface="Arial" pitchFamily="34" charset="-122"/>
+                <a:cs typeface="Arial" pitchFamily="34" charset="-120"/>
+              </a:rPr>
+              <a:t>Powder vs whole.</a:t>
+            </a:r>
+            <a:pPr algn="l" indent="0" marL="0">
+              <a:lnSpc>
+                <a:spcPts val="1620"/>
+              </a:lnSpc>
+              <a:spcAft>
+                <a:spcPts val="300"/>
+              </a:spcAft>
+              <a:buNone/>
+            </a:pPr>
+            <a:r>
+              <a:rPr lang="en-US" sz="1200" dirty="0">
+                <a:solidFill>
+                  <a:srgbClr val="1C2833"/>
+                </a:solidFill>
+                <a:latin typeface="Arial" pitchFamily="34" charset="0"/>
+                <a:ea typeface="Arial" pitchFamily="34" charset="-122"/>
+                <a:cs typeface="Arial" pitchFamily="34" charset="-120"/>
+              </a:rPr>
+              <a:t> Both forms are used:</a:t>
+            </a:r>
+            <a:endParaRPr lang="en-US" sz="1200" dirty="0"/>
+          </a:p>
+        </p:txBody>
+      </p:sp>
+      <p:sp>
+        <p:nvSpPr>
+          <p:cNvPr id="5" name="Text 3"/>
           <p:cNvSpPr/>
           <p:nvPr/>
         </p:nvSpPr>
         <p:spPr>
           <a:xfrm>
-            <a:off x="692051" y="1343174"/>
-            <a:ext cx="7973389" cy="230981"/>
+            <a:off x="634901" y="1266974"/>
+            <a:ext cx="8102798" cy="975122"/>
           </a:xfrm>
           <a:prstGeom prst="rect">
             <a:avLst/>
@@ -5786,619 +8901,142 @@
           <a:bodyPr wrap="square" lIns="0" tIns="0" rIns="0" bIns="0" rtlCol="0" anchor="t"/>
           <a:lstStyle/>
           <a:p>
-            <a:pPr algn="l" indent="0" marL="0">
-              <a:lnSpc>
-                <a:spcPts val="1820"/>
-              </a:lnSpc>
-              <a:spcBef>
-                <a:spcPts val="300"/>
-              </a:spcBef>
-              <a:spcAft>
-                <a:spcPts val="300"/>
-              </a:spcAft>
-              <a:buNone/>
-            </a:pPr>
-            <a:r>
-              <a:rPr lang="en-US" sz="1300" b="1" i="1" dirty="0">
-                <a:solidFill>
-                  <a:srgbClr val="1C2833"/>
-                </a:solidFill>
-                <a:latin typeface="Georgia" pitchFamily="34" charset="0"/>
-                <a:ea typeface="Georgia" pitchFamily="34" charset="-122"/>
-                <a:cs typeface="Georgia" pitchFamily="34" charset="-120"/>
-              </a:rPr>
-              <a:t>What it is:</a:t>
-            </a:r>
-            <a:pPr algn="l" indent="0" marL="0">
-              <a:lnSpc>
-                <a:spcPts val="1820"/>
-              </a:lnSpc>
-              <a:spcBef>
-                <a:spcPts val="300"/>
-              </a:spcBef>
-              <a:spcAft>
-                <a:spcPts val="300"/>
-              </a:spcAft>
-              <a:buNone/>
-            </a:pPr>
-            <a:r>
-              <a:rPr lang="en-US" sz="1300" dirty="0">
-                <a:solidFill>
-                  <a:srgbClr val="1C2833"/>
-                </a:solidFill>
-                <a:latin typeface="Georgia" pitchFamily="34" charset="0"/>
-                <a:ea typeface="Georgia" pitchFamily="34" charset="-122"/>
-                <a:cs typeface="Georgia" pitchFamily="34" charset="-120"/>
-              </a:rPr>
-              <a:t> A </a:t>
-            </a:r>
-            <a:pPr algn="l" indent="0" marL="0">
-              <a:lnSpc>
-                <a:spcPts val="1820"/>
-              </a:lnSpc>
-              <a:spcBef>
-                <a:spcPts val="300"/>
-              </a:spcBef>
-              <a:spcAft>
-                <a:spcPts val="300"/>
-              </a:spcAft>
-              <a:buNone/>
-            </a:pPr>
-            <a:r>
-              <a:rPr lang="en-US" sz="1300" b="1" i="1" dirty="0">
-                <a:solidFill>
-                  <a:srgbClr val="1C2833"/>
-                </a:solidFill>
-                <a:latin typeface="Georgia" pitchFamily="34" charset="0"/>
-                <a:ea typeface="Georgia" pitchFamily="34" charset="-122"/>
-                <a:cs typeface="Georgia" pitchFamily="34" charset="-120"/>
-              </a:rPr>
-              <a:t>rhizome</a:t>
-            </a:r>
-            <a:pPr algn="l" indent="0" marL="0">
-              <a:lnSpc>
-                <a:spcPts val="1820"/>
-              </a:lnSpc>
-              <a:spcBef>
-                <a:spcPts val="300"/>
-              </a:spcBef>
-              <a:spcAft>
-                <a:spcPts val="300"/>
-              </a:spcAft>
-              <a:buNone/>
-            </a:pPr>
-            <a:r>
-              <a:rPr lang="en-US" sz="1300" dirty="0">
-                <a:solidFill>
-                  <a:srgbClr val="1C2833"/>
-                </a:solidFill>
-                <a:latin typeface="Georgia" pitchFamily="34" charset="0"/>
-                <a:ea typeface="Georgia" pitchFamily="34" charset="-122"/>
-                <a:cs typeface="Georgia" pitchFamily="34" charset="-120"/>
-              </a:rPr>
-              <a:t> — an underground stem, not a root. Bright orange inside; pale brown outside.</a:t>
-            </a:r>
-            <a:endParaRPr lang="en-US" sz="1300" dirty="0"/>
-          </a:p>
-        </p:txBody>
-      </p:sp>
-      <p:sp>
-        <p:nvSpPr>
-          <p:cNvPr id="8" name="Text 6"/>
-          <p:cNvSpPr/>
-          <p:nvPr/>
-        </p:nvSpPr>
-        <p:spPr>
-          <a:xfrm>
-            <a:off x="692051" y="1612255"/>
-            <a:ext cx="7973389" cy="461963"/>
-          </a:xfrm>
-          <a:prstGeom prst="rect">
-            <a:avLst/>
-          </a:prstGeom>
-          <a:noFill/>
-          <a:ln/>
-        </p:spPr>
-        <p:txBody>
-          <a:bodyPr wrap="square" lIns="0" tIns="0" rIns="0" bIns="0" rtlCol="0" anchor="t"/>
-          <a:lstStyle/>
-          <a:p>
-            <a:pPr algn="l" indent="0" marL="0">
-              <a:lnSpc>
-                <a:spcPts val="1820"/>
-              </a:lnSpc>
-              <a:spcBef>
-                <a:spcPts val="300"/>
-              </a:spcBef>
-              <a:spcAft>
-                <a:spcPts val="300"/>
-              </a:spcAft>
-              <a:buNone/>
-            </a:pPr>
-            <a:r>
-              <a:rPr lang="en-US" sz="1300" b="1" i="1" dirty="0">
-                <a:solidFill>
-                  <a:srgbClr val="1C2833"/>
-                </a:solidFill>
-                <a:latin typeface="Georgia" pitchFamily="34" charset="0"/>
-                <a:ea typeface="Georgia" pitchFamily="34" charset="-122"/>
-                <a:cs typeface="Georgia" pitchFamily="34" charset="-120"/>
-              </a:rPr>
-              <a:t>What's inside:</a:t>
-            </a:r>
-            <a:pPr algn="l" indent="0" marL="0">
-              <a:lnSpc>
-                <a:spcPts val="1820"/>
-              </a:lnSpc>
-              <a:spcBef>
-                <a:spcPts val="300"/>
-              </a:spcBef>
-              <a:spcAft>
-                <a:spcPts val="300"/>
-              </a:spcAft>
-              <a:buNone/>
-            </a:pPr>
-            <a:r>
-              <a:rPr lang="en-US" sz="1300" dirty="0">
-                <a:solidFill>
-                  <a:srgbClr val="1C2833"/>
-                </a:solidFill>
-                <a:latin typeface="Georgia" pitchFamily="34" charset="0"/>
-                <a:ea typeface="Georgia" pitchFamily="34" charset="-122"/>
-                <a:cs typeface="Georgia" pitchFamily="34" charset="-120"/>
-              </a:rPr>
-              <a:t> </a:t>
-            </a:r>
-            <a:pPr algn="l" indent="0" marL="0">
-              <a:lnSpc>
-                <a:spcPts val="1820"/>
-              </a:lnSpc>
-              <a:spcBef>
-                <a:spcPts val="300"/>
-              </a:spcBef>
-              <a:spcAft>
-                <a:spcPts val="300"/>
-              </a:spcAft>
-              <a:buNone/>
-            </a:pPr>
-            <a:r>
-              <a:rPr lang="en-US" sz="1300" b="1" i="1" dirty="0">
-                <a:solidFill>
-                  <a:srgbClr val="1C2833"/>
-                </a:solidFill>
-                <a:latin typeface="Georgia" pitchFamily="34" charset="0"/>
-                <a:ea typeface="Georgia" pitchFamily="34" charset="-122"/>
-                <a:cs typeface="Georgia" pitchFamily="34" charset="-120"/>
-              </a:rPr>
-              <a:t>Curcumin</a:t>
-            </a:r>
-            <a:pPr algn="l" indent="0" marL="0">
-              <a:lnSpc>
-                <a:spcPts val="1820"/>
-              </a:lnSpc>
-              <a:spcBef>
-                <a:spcPts val="300"/>
-              </a:spcBef>
-              <a:spcAft>
-                <a:spcPts val="300"/>
-              </a:spcAft>
-              <a:buNone/>
-            </a:pPr>
-            <a:r>
-              <a:rPr lang="en-US" sz="1300" dirty="0">
-                <a:solidFill>
-                  <a:srgbClr val="1C2833"/>
-                </a:solidFill>
-                <a:latin typeface="Georgia" pitchFamily="34" charset="0"/>
-                <a:ea typeface="Georgia" pitchFamily="34" charset="-122"/>
-                <a:cs typeface="Georgia" pitchFamily="34" charset="-120"/>
-              </a:rPr>
-              <a:t> — the polyphenol pigment. Same molecule that gives the yellow colour and most of the studied biological activity.</a:t>
-            </a:r>
-            <a:endParaRPr lang="en-US" sz="1300" dirty="0"/>
-          </a:p>
-        </p:txBody>
-      </p:sp>
-      <p:sp>
-        <p:nvSpPr>
-          <p:cNvPr id="9" name="Text 7"/>
-          <p:cNvSpPr/>
-          <p:nvPr/>
-        </p:nvSpPr>
-        <p:spPr>
-          <a:xfrm>
-            <a:off x="692051" y="2112318"/>
-            <a:ext cx="7973389" cy="692944"/>
-          </a:xfrm>
-          <a:prstGeom prst="rect">
-            <a:avLst/>
-          </a:prstGeom>
-          <a:noFill/>
-          <a:ln/>
-        </p:spPr>
-        <p:txBody>
-          <a:bodyPr wrap="square" lIns="0" tIns="0" rIns="0" bIns="0" rtlCol="0" anchor="t"/>
-          <a:lstStyle/>
-          <a:p>
-            <a:pPr algn="l" indent="0" marL="0">
-              <a:lnSpc>
-                <a:spcPts val="1820"/>
-              </a:lnSpc>
-              <a:spcBef>
-                <a:spcPts val="300"/>
-              </a:spcBef>
-              <a:spcAft>
-                <a:spcPts val="300"/>
-              </a:spcAft>
-              <a:buNone/>
-            </a:pPr>
-            <a:r>
-              <a:rPr lang="en-US" sz="1300" b="1" i="1" dirty="0">
-                <a:solidFill>
-                  <a:srgbClr val="1C2833"/>
-                </a:solidFill>
-                <a:latin typeface="Georgia" pitchFamily="34" charset="0"/>
-                <a:ea typeface="Georgia" pitchFamily="34" charset="-122"/>
-                <a:cs typeface="Georgia" pitchFamily="34" charset="-120"/>
-              </a:rPr>
-              <a:t>The bioavailability problem and the pepper fix:</a:t>
-            </a:r>
-            <a:pPr algn="l" indent="0" marL="0">
-              <a:lnSpc>
-                <a:spcPts val="1820"/>
-              </a:lnSpc>
-              <a:spcBef>
-                <a:spcPts val="300"/>
-              </a:spcBef>
-              <a:spcAft>
-                <a:spcPts val="300"/>
-              </a:spcAft>
-              <a:buNone/>
-            </a:pPr>
-            <a:r>
-              <a:rPr lang="en-US" sz="1300" dirty="0">
-                <a:solidFill>
-                  <a:srgbClr val="1C2833"/>
-                </a:solidFill>
-                <a:latin typeface="Georgia" pitchFamily="34" charset="0"/>
-                <a:ea typeface="Georgia" pitchFamily="34" charset="-122"/>
-                <a:cs typeface="Georgia" pitchFamily="34" charset="-120"/>
-              </a:rPr>
-              <a:t> - Curcumin is poorly absorbed by the gut on its own. - Black pepper (piperine) increases absorption by ~20×. - Traditional Indian cooking often pairs the two — the tradition got there empirically.</a:t>
-            </a:r>
-            <a:endParaRPr lang="en-US" sz="1300" dirty="0"/>
-          </a:p>
-        </p:txBody>
-      </p:sp>
-      <p:sp>
-        <p:nvSpPr>
-          <p:cNvPr id="10" name="Text 8"/>
-          <p:cNvSpPr/>
-          <p:nvPr/>
-        </p:nvSpPr>
-        <p:spPr>
-          <a:xfrm>
-            <a:off x="692051" y="2843361"/>
-            <a:ext cx="7973389" cy="692944"/>
-          </a:xfrm>
-          <a:prstGeom prst="rect">
-            <a:avLst/>
-          </a:prstGeom>
-          <a:noFill/>
-          <a:ln/>
-        </p:spPr>
-        <p:txBody>
-          <a:bodyPr wrap="square" lIns="0" tIns="0" rIns="0" bIns="0" rtlCol="0" anchor="t"/>
-          <a:lstStyle/>
-          <a:p>
-            <a:pPr algn="l" indent="0" marL="0">
-              <a:lnSpc>
-                <a:spcPts val="1820"/>
-              </a:lnSpc>
-              <a:spcBef>
-                <a:spcPts val="300"/>
-              </a:spcBef>
-              <a:spcAft>
-                <a:spcPts val="300"/>
-              </a:spcAft>
-              <a:buNone/>
-            </a:pPr>
-            <a:r>
-              <a:rPr lang="en-US" sz="1300" b="1" i="1" dirty="0">
-                <a:solidFill>
-                  <a:srgbClr val="1C2833"/>
-                </a:solidFill>
-                <a:latin typeface="Georgia" pitchFamily="34" charset="0"/>
-                <a:ea typeface="Georgia" pitchFamily="34" charset="-122"/>
-                <a:cs typeface="Georgia" pitchFamily="34" charset="-120"/>
-              </a:rPr>
-              <a:t>Honest evidence summary:</a:t>
-            </a:r>
-            <a:pPr algn="l" indent="0" marL="0">
-              <a:lnSpc>
-                <a:spcPts val="1820"/>
-              </a:lnSpc>
-              <a:spcBef>
-                <a:spcPts val="300"/>
-              </a:spcBef>
-              <a:spcAft>
-                <a:spcPts val="300"/>
-              </a:spcAft>
-              <a:buNone/>
-            </a:pPr>
-            <a:r>
-              <a:rPr lang="en-US" sz="1300" dirty="0">
-                <a:solidFill>
-                  <a:srgbClr val="1C2833"/>
-                </a:solidFill>
-                <a:latin typeface="Georgia" pitchFamily="34" charset="0"/>
-                <a:ea typeface="Georgia" pitchFamily="34" charset="-122"/>
-                <a:cs typeface="Georgia" pitchFamily="34" charset="-120"/>
-              </a:rPr>
-              <a:t> - Safe and useful as a culinary spice. - Strong lab evidence for anti-inflammatory mechanism. - </a:t>
-            </a:r>
-            <a:pPr algn="l" indent="0" marL="0">
-              <a:lnSpc>
-                <a:spcPts val="1820"/>
-              </a:lnSpc>
-              <a:spcBef>
-                <a:spcPts val="300"/>
-              </a:spcBef>
-              <a:spcAft>
-                <a:spcPts val="300"/>
-              </a:spcAft>
-              <a:buNone/>
-            </a:pPr>
-            <a:r>
-              <a:rPr lang="en-US" sz="1300" b="1" i="1" dirty="0">
-                <a:solidFill>
-                  <a:srgbClr val="1C2833"/>
-                </a:solidFill>
-                <a:latin typeface="Georgia" pitchFamily="34" charset="0"/>
-                <a:ea typeface="Georgia" pitchFamily="34" charset="-122"/>
-                <a:cs typeface="Georgia" pitchFamily="34" charset="-120"/>
-              </a:rPr>
-              <a:t>Mixed</a:t>
-            </a:r>
-            <a:pPr algn="l" indent="0" marL="0">
-              <a:lnSpc>
-                <a:spcPts val="1820"/>
-              </a:lnSpc>
-              <a:spcBef>
-                <a:spcPts val="300"/>
-              </a:spcBef>
-              <a:spcAft>
-                <a:spcPts val="300"/>
-              </a:spcAft>
-              <a:buNone/>
-            </a:pPr>
-            <a:r>
-              <a:rPr lang="en-US" sz="1300" dirty="0">
-                <a:solidFill>
-                  <a:srgbClr val="1C2833"/>
-                </a:solidFill>
-                <a:latin typeface="Georgia" pitchFamily="34" charset="0"/>
-                <a:ea typeface="Georgia" pitchFamily="34" charset="-122"/>
-                <a:cs typeface="Georgia" pitchFamily="34" charset="-120"/>
-              </a:rPr>
-              <a:t> clinical evidence for specific health claims; </a:t>
-            </a:r>
-            <a:pPr algn="l" indent="0" marL="0">
-              <a:lnSpc>
-                <a:spcPts val="1820"/>
-              </a:lnSpc>
-              <a:spcBef>
-                <a:spcPts val="300"/>
-              </a:spcBef>
-              <a:spcAft>
-                <a:spcPts val="300"/>
-              </a:spcAft>
-              <a:buNone/>
-            </a:pPr>
-            <a:r>
-              <a:rPr lang="en-US" sz="1300" b="1" i="1" dirty="0">
-                <a:solidFill>
-                  <a:srgbClr val="1C2833"/>
-                </a:solidFill>
-                <a:latin typeface="Georgia" pitchFamily="34" charset="0"/>
-                <a:ea typeface="Georgia" pitchFamily="34" charset="-122"/>
-                <a:cs typeface="Georgia" pitchFamily="34" charset="-120"/>
-              </a:rPr>
-              <a:t>no</a:t>
-            </a:r>
-            <a:pPr algn="l" indent="0" marL="0">
-              <a:lnSpc>
-                <a:spcPts val="1820"/>
-              </a:lnSpc>
-              <a:spcBef>
-                <a:spcPts val="300"/>
-              </a:spcBef>
-              <a:spcAft>
-                <a:spcPts val="300"/>
-              </a:spcAft>
-              <a:buNone/>
-            </a:pPr>
-            <a:r>
-              <a:rPr lang="en-US" sz="1300" dirty="0">
-                <a:solidFill>
-                  <a:srgbClr val="1C2833"/>
-                </a:solidFill>
-                <a:latin typeface="Georgia" pitchFamily="34" charset="0"/>
-                <a:ea typeface="Georgia" pitchFamily="34" charset="-122"/>
-                <a:cs typeface="Georgia" pitchFamily="34" charset="-120"/>
-              </a:rPr>
-              <a:t> evidence supports "cancer cure" claims.</a:t>
-            </a:r>
-            <a:endParaRPr lang="en-US" sz="1300" dirty="0"/>
-          </a:p>
-        </p:txBody>
-      </p:sp>
-      <p:sp>
-        <p:nvSpPr>
-          <p:cNvPr id="11" name="Text 9"/>
-          <p:cNvSpPr/>
-          <p:nvPr/>
-        </p:nvSpPr>
-        <p:spPr>
-          <a:xfrm>
-            <a:off x="692051" y="3574405"/>
-            <a:ext cx="7973389" cy="461963"/>
-          </a:xfrm>
-          <a:prstGeom prst="rect">
-            <a:avLst/>
-          </a:prstGeom>
-          <a:noFill/>
-          <a:ln/>
-        </p:spPr>
-        <p:txBody>
-          <a:bodyPr wrap="square" lIns="0" tIns="0" rIns="0" bIns="0" rtlCol="0" anchor="t"/>
-          <a:lstStyle/>
-          <a:p>
-            <a:pPr algn="l" indent="0" marL="0">
-              <a:lnSpc>
-                <a:spcPts val="1820"/>
-              </a:lnSpc>
-              <a:spcBef>
-                <a:spcPts val="300"/>
-              </a:spcBef>
-              <a:spcAft>
-                <a:spcPts val="300"/>
-              </a:spcAft>
-              <a:buNone/>
-            </a:pPr>
-            <a:r>
-              <a:rPr lang="en-US" sz="1300" b="1" i="1" dirty="0">
-                <a:solidFill>
-                  <a:srgbClr val="1C2833"/>
-                </a:solidFill>
-                <a:latin typeface="Georgia" pitchFamily="34" charset="0"/>
-                <a:ea typeface="Georgia" pitchFamily="34" charset="-122"/>
-                <a:cs typeface="Georgia" pitchFamily="34" charset="-120"/>
-              </a:rPr>
-              <a:t>Traditional Ayurvedic classification:</a:t>
-            </a:r>
-            <a:pPr algn="l" indent="0" marL="0">
-              <a:lnSpc>
-                <a:spcPts val="1820"/>
-              </a:lnSpc>
-              <a:spcBef>
-                <a:spcPts val="300"/>
-              </a:spcBef>
-              <a:spcAft>
-                <a:spcPts val="300"/>
-              </a:spcAft>
-              <a:buNone/>
-            </a:pPr>
-            <a:r>
-              <a:rPr lang="en-US" sz="1300" dirty="0">
-                <a:solidFill>
-                  <a:srgbClr val="1C2833"/>
-                </a:solidFill>
-                <a:latin typeface="Georgia" pitchFamily="34" charset="0"/>
-                <a:ea typeface="Georgia" pitchFamily="34" charset="-122"/>
-                <a:cs typeface="Georgia" pitchFamily="34" charset="-120"/>
-              </a:rPr>
-              <a:t> </a:t>
-            </a:r>
-            <a:pPr algn="l" indent="0" marL="0">
-              <a:lnSpc>
-                <a:spcPts val="1820"/>
-              </a:lnSpc>
-              <a:spcBef>
-                <a:spcPts val="300"/>
-              </a:spcBef>
-              <a:spcAft>
-                <a:spcPts val="300"/>
-              </a:spcAft>
-              <a:buNone/>
-            </a:pPr>
-            <a:r>
-              <a:rPr lang="en-US" sz="1300" i="1" dirty="0">
-                <a:solidFill>
-                  <a:srgbClr val="1C2833"/>
-                </a:solidFill>
-                <a:latin typeface="Georgia" pitchFamily="34" charset="0"/>
-                <a:ea typeface="Georgia" pitchFamily="34" charset="-122"/>
-                <a:cs typeface="Georgia" pitchFamily="34" charset="-120"/>
-              </a:rPr>
-              <a:t>kaṭu-tikta</a:t>
-            </a:r>
-            <a:pPr algn="l" indent="0" marL="0">
-              <a:lnSpc>
-                <a:spcPts val="1820"/>
-              </a:lnSpc>
-              <a:spcBef>
-                <a:spcPts val="300"/>
-              </a:spcBef>
-              <a:spcAft>
-                <a:spcPts val="300"/>
-              </a:spcAft>
-              <a:buNone/>
-            </a:pPr>
-            <a:r>
-              <a:rPr lang="en-US" sz="1300" dirty="0">
-                <a:solidFill>
-                  <a:srgbClr val="1C2833"/>
-                </a:solidFill>
-                <a:latin typeface="Georgia" pitchFamily="34" charset="0"/>
-                <a:ea typeface="Georgia" pitchFamily="34" charset="-122"/>
-                <a:cs typeface="Georgia" pitchFamily="34" charset="-120"/>
-              </a:rPr>
-              <a:t> (pungent-bitter) in taste, </a:t>
-            </a:r>
-            <a:pPr algn="l" indent="0" marL="0">
-              <a:lnSpc>
-                <a:spcPts val="1820"/>
-              </a:lnSpc>
-              <a:spcBef>
-                <a:spcPts val="300"/>
-              </a:spcBef>
-              <a:spcAft>
-                <a:spcPts val="300"/>
-              </a:spcAft>
-              <a:buNone/>
-            </a:pPr>
-            <a:r>
-              <a:rPr lang="en-US" sz="1300" i="1" dirty="0">
-                <a:solidFill>
-                  <a:srgbClr val="1C2833"/>
-                </a:solidFill>
-                <a:latin typeface="Georgia" pitchFamily="34" charset="0"/>
-                <a:ea typeface="Georgia" pitchFamily="34" charset="-122"/>
-                <a:cs typeface="Georgia" pitchFamily="34" charset="-120"/>
-              </a:rPr>
-              <a:t>uṣṇa</a:t>
-            </a:r>
-            <a:pPr algn="l" indent="0" marL="0">
-              <a:lnSpc>
-                <a:spcPts val="1820"/>
-              </a:lnSpc>
-              <a:spcBef>
-                <a:spcPts val="300"/>
-              </a:spcBef>
-              <a:spcAft>
-                <a:spcPts val="300"/>
-              </a:spcAft>
-              <a:buNone/>
-            </a:pPr>
-            <a:r>
-              <a:rPr lang="en-US" sz="1300" dirty="0">
-                <a:solidFill>
-                  <a:srgbClr val="1C2833"/>
-                </a:solidFill>
-                <a:latin typeface="Georgia" pitchFamily="34" charset="0"/>
-                <a:ea typeface="Georgia" pitchFamily="34" charset="-122"/>
-                <a:cs typeface="Georgia" pitchFamily="34" charset="-120"/>
-              </a:rPr>
-              <a:t> (heating) in potency.</a:t>
-            </a:r>
-            <a:endParaRPr lang="en-US" sz="1300" dirty="0"/>
-          </a:p>
-        </p:txBody>
-      </p:sp>
-      <p:sp>
-        <p:nvSpPr>
-          <p:cNvPr id="12" name="Text 10"/>
+            <a:pPr algn="l" marL="342900" indent="-342900">
+              <a:lnSpc>
+                <a:spcPts val="1620"/>
+              </a:lnSpc>
+              <a:spcAft>
+                <a:spcPts val="300"/>
+              </a:spcAft>
+              <a:buSzPct val="100000"/>
+              <a:buChar char="•"/>
+            </a:pPr>
+            <a:r>
+              <a:rPr lang="en-US" sz="1200" b="1" dirty="0">
+                <a:solidFill>
+                  <a:srgbClr val="1C2833"/>
+                </a:solidFill>
+                <a:latin typeface="Arial" pitchFamily="34" charset="0"/>
+                <a:ea typeface="Arial" pitchFamily="34" charset="-122"/>
+                <a:cs typeface="Arial" pitchFamily="34" charset="-120"/>
+              </a:rPr>
+              <a:t>Fresh rhizome:</a:t>
+            </a:r>
+            <a:pPr algn="l" indent="0" marL="0">
+              <a:lnSpc>
+                <a:spcPts val="1620"/>
+              </a:lnSpc>
+              <a:spcAft>
+                <a:spcPts val="300"/>
+              </a:spcAft>
+              <a:buNone/>
+            </a:pPr>
+            <a:r>
+              <a:rPr lang="en-US" sz="1200" dirty="0">
+                <a:solidFill>
+                  <a:srgbClr val="1C2833"/>
+                </a:solidFill>
+                <a:latin typeface="Arial" pitchFamily="34" charset="0"/>
+                <a:ea typeface="Arial" pitchFamily="34" charset="-122"/>
+                <a:cs typeface="Arial" pitchFamily="34" charset="-120"/>
+              </a:rPr>
+              <a:t> sliced into curries, pickled, sometimes juiced.</a:t>
+            </a:r>
+            <a:endParaRPr lang="en-US" sz="1200" dirty="0"/>
+          </a:p>
+          <a:p>
+            <a:pPr algn="l" marL="342900" indent="-342900">
+              <a:lnSpc>
+                <a:spcPts val="1620"/>
+              </a:lnSpc>
+              <a:spcAft>
+                <a:spcPts val="300"/>
+              </a:spcAft>
+              <a:buSzPct val="100000"/>
+              <a:buChar char="•"/>
+            </a:pPr>
+            <a:r>
+              <a:rPr lang="en-US" sz="1200" b="1" dirty="0">
+                <a:solidFill>
+                  <a:srgbClr val="1C2833"/>
+                </a:solidFill>
+                <a:latin typeface="Arial" pitchFamily="34" charset="0"/>
+                <a:ea typeface="Arial" pitchFamily="34" charset="-122"/>
+                <a:cs typeface="Arial" pitchFamily="34" charset="-120"/>
+              </a:rPr>
+              <a:t>Powdered (dried, ground):</a:t>
+            </a:r>
+            <a:pPr algn="l" indent="0" marL="0">
+              <a:lnSpc>
+                <a:spcPts val="1620"/>
+              </a:lnSpc>
+              <a:spcAft>
+                <a:spcPts val="300"/>
+              </a:spcAft>
+              <a:buNone/>
+            </a:pPr>
+            <a:r>
+              <a:rPr lang="en-US" sz="1200" dirty="0">
+                <a:solidFill>
+                  <a:srgbClr val="1C2833"/>
+                </a:solidFill>
+                <a:latin typeface="Arial" pitchFamily="34" charset="0"/>
+                <a:ea typeface="Arial" pitchFamily="34" charset="-122"/>
+                <a:cs typeface="Arial" pitchFamily="34" charset="-120"/>
+              </a:rPr>
+              <a:t> the everyday Indian kitchen form — added to dal, sabzi, curries.</a:t>
+            </a:r>
+            <a:endParaRPr lang="en-US" sz="1200" dirty="0"/>
+          </a:p>
+          <a:p>
+            <a:pPr algn="l" marL="342900" indent="-342900">
+              <a:lnSpc>
+                <a:spcPts val="1620"/>
+              </a:lnSpc>
+              <a:spcAft>
+                <a:spcPts val="300"/>
+              </a:spcAft>
+              <a:buSzPct val="100000"/>
+              <a:buChar char="•"/>
+            </a:pPr>
+            <a:r>
+              <a:rPr lang="en-US" sz="1200" b="1" dirty="0">
+                <a:solidFill>
+                  <a:srgbClr val="1C2833"/>
+                </a:solidFill>
+                <a:latin typeface="Arial" pitchFamily="34" charset="0"/>
+                <a:ea typeface="Arial" pitchFamily="34" charset="-122"/>
+                <a:cs typeface="Arial" pitchFamily="34" charset="-120"/>
+              </a:rPr>
+              <a:t>Why the colour?</a:t>
+            </a:r>
+            <a:pPr algn="l" indent="0" marL="0">
+              <a:lnSpc>
+                <a:spcPts val="1620"/>
+              </a:lnSpc>
+              <a:spcAft>
+                <a:spcPts val="300"/>
+              </a:spcAft>
+              <a:buNone/>
+            </a:pPr>
+            <a:r>
+              <a:rPr lang="en-US" sz="1200" dirty="0">
+                <a:solidFill>
+                  <a:srgbClr val="1C2833"/>
+                </a:solidFill>
+                <a:latin typeface="Arial" pitchFamily="34" charset="0"/>
+                <a:ea typeface="Arial" pitchFamily="34" charset="-122"/>
+                <a:cs typeface="Arial" pitchFamily="34" charset="-120"/>
+              </a:rPr>
+              <a:t> Curcumin and related curcuminoids — diarylheptanoid polyphenols. The molecule absorbs blue light and reflects yellow-orange.</a:t>
+            </a:r>
+            <a:endParaRPr lang="en-US" sz="1200" dirty="0"/>
+          </a:p>
+        </p:txBody>
+      </p:sp>
+      <p:sp>
+        <p:nvSpPr>
+          <p:cNvPr id="6" name="Text 4"/>
           <p:cNvSpPr/>
           <p:nvPr/>
         </p:nvSpPr>
@@ -6548,7 +9186,7 @@
                 <a:ea typeface="Georgia" pitchFamily="34" charset="-122"/>
                 <a:cs typeface="Georgia" pitchFamily="34" charset="-120"/>
               </a:rPr>
-              <a:t>Homework</a:t>
+              <a:t>Core (20 min) (cont.)</a:t>
             </a:r>
             <a:endParaRPr lang="en-US" sz="1800" dirty="0"/>
           </a:p>
@@ -6562,8 +9200,8 @@
         </p:nvSpPr>
         <p:spPr>
           <a:xfrm>
-            <a:off x="406301" y="870942"/>
-            <a:ext cx="8498026" cy="426541"/>
+            <a:off x="634901" y="883593"/>
+            <a:ext cx="8102798" cy="487561"/>
           </a:xfrm>
           <a:prstGeom prst="rect">
             <a:avLst/>
@@ -6575,28 +9213,66 @@
           <a:bodyPr wrap="square" lIns="0" tIns="0" rIns="0" bIns="0" rtlCol="0" anchor="t"/>
           <a:lstStyle/>
           <a:p>
-            <a:pPr algn="l" indent="0" marL="0">
-              <a:lnSpc>
-                <a:spcPts val="1680"/>
-              </a:lnSpc>
-              <a:spcBef>
-                <a:spcPts val="300"/>
-              </a:spcBef>
-              <a:spcAft>
-                <a:spcPts val="300"/>
-              </a:spcAft>
-              <a:buNone/>
-            </a:pPr>
-            <a:r>
-              <a:rPr lang="en-US" sz="1200" dirty="0">
-                <a:solidFill>
-                  <a:srgbClr val="1C2833"/>
-                </a:solidFill>
-                <a:latin typeface="Arial" pitchFamily="34" charset="0"/>
-                <a:ea typeface="Arial" pitchFamily="34" charset="-122"/>
-                <a:cs typeface="Arial" pitchFamily="34" charset="-120"/>
-              </a:rPr>
-              <a:t>– Find turmeric in your home (powder, fresh, capsules, golden milk — anything). Note: where is it? What form? Has anyone in your family ever said "turmeric helps with X"? If yes, write the claim down — we'll look at it on Day 8.</a:t>
+            <a:pPr algn="l" marL="342900" indent="-342900">
+              <a:lnSpc>
+                <a:spcPts val="1620"/>
+              </a:lnSpc>
+              <a:spcAft>
+                <a:spcPts val="300"/>
+              </a:spcAft>
+              <a:buSzPct val="100000"/>
+              <a:buChar char="•"/>
+            </a:pPr>
+            <a:r>
+              <a:rPr lang="en-US" sz="1200" b="1" dirty="0">
+                <a:solidFill>
+                  <a:srgbClr val="1C2833"/>
+                </a:solidFill>
+                <a:latin typeface="Arial" pitchFamily="34" charset="0"/>
+                <a:ea typeface="Arial" pitchFamily="34" charset="-122"/>
+                <a:cs typeface="Arial" pitchFamily="34" charset="-120"/>
+              </a:rPr>
+              <a:t>Staining demo (1 min).</a:t>
+            </a:r>
+            <a:pPr algn="l" indent="0" marL="0">
+              <a:lnSpc>
+                <a:spcPts val="1620"/>
+              </a:lnSpc>
+              <a:spcAft>
+                <a:spcPts val="300"/>
+              </a:spcAft>
+              <a:buNone/>
+            </a:pPr>
+            <a:r>
+              <a:rPr lang="en-US" sz="1200" dirty="0">
+                <a:solidFill>
+                  <a:srgbClr val="1C2833"/>
+                </a:solidFill>
+                <a:latin typeface="Arial" pitchFamily="34" charset="0"/>
+                <a:ea typeface="Arial" pitchFamily="34" charset="-122"/>
+                <a:cs typeface="Arial" pitchFamily="34" charset="-120"/>
+              </a:rPr>
+              <a:t> Dab a small amount of fresh turmeric on white paper. Permanent stain. </a:t>
+            </a:r>
+            <a:pPr algn="l" indent="0" marL="0">
+              <a:lnSpc>
+                <a:spcPts val="1620"/>
+              </a:lnSpc>
+              <a:spcAft>
+                <a:spcPts val="300"/>
+              </a:spcAft>
+              <a:buNone/>
+            </a:pPr>
+            <a:r>
+              <a:rPr lang="en-US" sz="1200" i="1" dirty="0">
+                <a:solidFill>
+                  <a:srgbClr val="1C2833"/>
+                </a:solidFill>
+                <a:latin typeface="Arial" pitchFamily="34" charset="0"/>
+                <a:ea typeface="Arial" pitchFamily="34" charset="-122"/>
+                <a:cs typeface="Arial" pitchFamily="34" charset="-120"/>
+              </a:rPr>
+              <a:t>"This is why turmeric on your shirt is a problem. Curcumin binds to fibres."</a:t>
             </a:r>
             <a:endParaRPr lang="en-US" sz="1200" dirty="0"/>
           </a:p>
